--- a/pptx/Module12_SELECT_filtrage_et_tri.pptx
+++ b/pptx/Module12_SELECT_filtrage_et_tri.pptx
@@ -13,9 +13,11 @@
     <p:sldId id="261" r:id="rId7"/>
     <p:sldId id="262" r:id="rId8"/>
     <p:sldId id="263" r:id="rId9"/>
+    <p:sldId id="264" r:id="rId10"/>
+    <p:sldId id="265" r:id="rId11"/>
   </p:sldIdLst>
   <p:notesMasterIdLst>
-    <p:notesMasterId r:id="rId10"/>
+    <p:notesMasterId r:id="rId12"/>
   </p:notesMasterIdLst>
   <p:sldSz cx="9144000" cy="5143500"/>
   <p:notesSz cx="5143500" cy="9144000"/>
@@ -551,6 +553,94 @@
 </p:notes>
 </file>
 
+<file path=ppt/notesSlides/notesSlide10.xml><?xml version="1.0" encoding="utf-8"?>
+<p:notes xmlns:a="http://schemas.openxmlformats.org/drawingml/2006/main" xmlns:r="http://schemas.openxmlformats.org/officeDocument/2006/relationships" xmlns:p="http://schemas.openxmlformats.org/presentationml/2006/main">
+  <p:cSld>
+    <p:spTree>
+      <p:nvGrpSpPr>
+        <p:cNvPr id="1" name=""/>
+        <p:cNvGrpSpPr/>
+        <p:nvPr/>
+      </p:nvGrpSpPr>
+      <p:grpSpPr>
+        <a:xfrm>
+          <a:off x="0" y="0"/>
+          <a:ext cx="0" cy="0"/>
+          <a:chOff x="0" y="0"/>
+          <a:chExt cx="0" cy="0"/>
+        </a:xfrm>
+      </p:grpSpPr>
+      <p:sp>
+        <p:nvSpPr>
+          <p:cNvPr id="2" name="Slide Image Placeholder 1"/>
+          <p:cNvSpPr>
+            <a:spLocks noGrp="1" noRot="1" noChangeAspect="1"/>
+          </p:cNvSpPr>
+          <p:nvPr>
+            <p:ph type="sldImg"/>
+          </p:nvPr>
+        </p:nvSpPr>
+        <p:spPr/>
+      </p:sp>
+      <p:sp>
+        <p:nvSpPr>
+          <p:cNvPr id="3" name="Notes Placeholder 2"/>
+          <p:cNvSpPr>
+            <a:spLocks noGrp="1"/>
+          </p:cNvSpPr>
+          <p:nvPr>
+            <p:ph type="body" idx="1"/>
+          </p:nvPr>
+        </p:nvSpPr>
+        <p:spPr/>
+        <p:txBody>
+          <a:bodyPr/>
+          <a:lstStyle/>
+          <a:p>
+            <a:r>
+              <a:rPr lang="en-US" dirty="0"/>
+              <a:t/>
+            </a:r>
+            <a:endParaRPr lang="en-US" dirty="0"/>
+          </a:p>
+        </p:txBody>
+      </p:sp>
+      <p:sp>
+        <p:nvSpPr>
+          <p:cNvPr id="4" name="Slide Number Placeholder 3"/>
+          <p:cNvSpPr>
+            <a:spLocks noGrp="1"/>
+          </p:cNvSpPr>
+          <p:nvPr>
+            <p:ph type="sldNum" sz="quarter" idx="10"/>
+          </p:nvPr>
+        </p:nvSpPr>
+        <p:spPr/>
+        <p:txBody>
+          <a:bodyPr/>
+          <a:lstStyle/>
+          <a:p>
+            <a:fld id="{F7021451-1387-4CA6-816F-3879F97B5CBC}" type="slidenum">
+              <a:rPr lang="en-US"/>
+              <a:t>10</a:t>
+            </a:fld>
+            <a:endParaRPr lang="en-US"/>
+          </a:p>
+        </p:txBody>
+      </p:sp>
+    </p:spTree>
+    <p:extLst>
+      <p:ext uri="{BB962C8B-B14F-4D97-AF65-F5344CB8AC3E}">
+        <p14:creationId xmlns:p14="http://schemas.microsoft.com/office/powerpoint/2010/main" val="1024086991"/>
+      </p:ext>
+    </p:extLst>
+  </p:cSld>
+  <p:clrMapOvr>
+    <a:masterClrMapping/>
+  </p:clrMapOvr>
+</p:notes>
+</file>
+
 <file path=ppt/notesSlides/notesSlide2.xml><?xml version="1.0" encoding="utf-8"?>
 <p:notes xmlns:a="http://schemas.openxmlformats.org/drawingml/2006/main" xmlns:r="http://schemas.openxmlformats.org/officeDocument/2006/relationships" xmlns:p="http://schemas.openxmlformats.org/presentationml/2006/main">
   <p:cSld>
@@ -597,7 +687,7 @@
           <a:p>
             <a:r>
               <a:rPr lang="en-US" dirty="0"/>
-              <a:t>Commencer par des SELECT simples. Les étudiants voient le résultat immédiatement dans HeidiSQL.</a:t>
+              <a:t>Commencer par des SELECT simples sur SwissSound. Les étudiants voient le résultat immédiatement.</a:t>
             </a:r>
             <a:endParaRPr lang="en-US" dirty="0"/>
           </a:p>
@@ -685,7 +775,7 @@
           <a:p>
             <a:r>
               <a:rPr lang="en-US" dirty="0"/>
-              <a:t>IS NULL vs = NULL : = NULL ne fonctionne JAMAIS. C'est une erreur classique.</a:t>
+              <a:t>IS NULL vs = NULL : = NULL ne fonctionne JAMAIS. Erreur classique.</a:t>
             </a:r>
             <a:endParaRPr lang="en-US" dirty="0"/>
           </a:p>
@@ -773,7 +863,7 @@
           <a:p>
             <a:r>
               <a:rPr lang="en-US" dirty="0"/>
-              <a:t>LIMIT/OFFSET est la base de la pagination dans les applications web.</a:t>
+              <a:t>LIMIT/OFFSET = pagination. Chaque page web qui affiche des résultats utilise LIMIT/OFFSET.</a:t>
             </a:r>
             <a:endParaRPr lang="en-US" dirty="0"/>
           </a:p>
@@ -861,7 +951,7 @@
           <a:p>
             <a:r>
               <a:rPr lang="en-US" dirty="0"/>
-              <a:t>Les étudiants tapent chaque requête dans HeidiSQL et vérifient le résultat. Progresser du simple au complexe.</a:t>
+              <a:t>Le piege AND/OR est la source #1 d'erreurs. Montrer un exemple concret avec et sans parentheses et comparer les resultats.</a:t>
             </a:r>
             <a:endParaRPr lang="en-US" dirty="0"/>
           </a:p>
@@ -949,7 +1039,7 @@
           <a:p>
             <a:r>
               <a:rPr lang="en-US" dirty="0"/>
-              <a:t>Les 10 requêtes sont fournies dans la feuille d'exercice. Corrigé distribué après.</a:t>
+              <a:t>Ces 3 opérateurs remplacent des conditions complexes. BETWEEN remplace &gt;= AND &lt;=. IN remplace OR OR OR.</a:t>
             </a:r>
             <a:endParaRPr lang="en-US" dirty="0"/>
           </a:p>
@@ -1037,7 +1127,7 @@
           <a:p>
             <a:r>
               <a:rPr lang="en-US" dirty="0"/>
-              <a:t/>
+              <a:t>Les étudiants font les exercices GESCOM sur le sandbox en ligne. La correction est automatique.</a:t>
             </a:r>
             <a:endParaRPr lang="en-US" dirty="0"/>
           </a:p>
@@ -1125,7 +1215,7 @@
           <a:p>
             <a:r>
               <a:rPr lang="en-US" dirty="0"/>
-              <a:t/>
+              <a:t>10 requetes progressives. Verifier dans HeidiSQL.</a:t>
             </a:r>
             <a:endParaRPr lang="en-US" dirty="0"/>
           </a:p>
@@ -1149,6 +1239,94 @@
             <a:fld id="{F7021451-1387-4CA6-816F-3879F97B5CBC}" type="slidenum">
               <a:rPr lang="en-US"/>
               <a:t>8</a:t>
+            </a:fld>
+            <a:endParaRPr lang="en-US"/>
+          </a:p>
+        </p:txBody>
+      </p:sp>
+    </p:spTree>
+    <p:extLst>
+      <p:ext uri="{BB962C8B-B14F-4D97-AF65-F5344CB8AC3E}">
+        <p14:creationId xmlns:p14="http://schemas.microsoft.com/office/powerpoint/2010/main" val="1024086991"/>
+      </p:ext>
+    </p:extLst>
+  </p:cSld>
+  <p:clrMapOvr>
+    <a:masterClrMapping/>
+  </p:clrMapOvr>
+</p:notes>
+</file>
+
+<file path=ppt/notesSlides/notesSlide9.xml><?xml version="1.0" encoding="utf-8"?>
+<p:notes xmlns:a="http://schemas.openxmlformats.org/drawingml/2006/main" xmlns:r="http://schemas.openxmlformats.org/officeDocument/2006/relationships" xmlns:p="http://schemas.openxmlformats.org/presentationml/2006/main">
+  <p:cSld>
+    <p:spTree>
+      <p:nvGrpSpPr>
+        <p:cNvPr id="1" name=""/>
+        <p:cNvGrpSpPr/>
+        <p:nvPr/>
+      </p:nvGrpSpPr>
+      <p:grpSpPr>
+        <a:xfrm>
+          <a:off x="0" y="0"/>
+          <a:ext cx="0" cy="0"/>
+          <a:chOff x="0" y="0"/>
+          <a:chExt cx="0" cy="0"/>
+        </a:xfrm>
+      </p:grpSpPr>
+      <p:sp>
+        <p:nvSpPr>
+          <p:cNvPr id="2" name="Slide Image Placeholder 1"/>
+          <p:cNvSpPr>
+            <a:spLocks noGrp="1" noRot="1" noChangeAspect="1"/>
+          </p:cNvSpPr>
+          <p:nvPr>
+            <p:ph type="sldImg"/>
+          </p:nvPr>
+        </p:nvSpPr>
+        <p:spPr/>
+      </p:sp>
+      <p:sp>
+        <p:nvSpPr>
+          <p:cNvPr id="3" name="Notes Placeholder 2"/>
+          <p:cNvSpPr>
+            <a:spLocks noGrp="1"/>
+          </p:cNvSpPr>
+          <p:nvPr>
+            <p:ph type="body" idx="1"/>
+          </p:nvPr>
+        </p:nvSpPr>
+        <p:spPr/>
+        <p:txBody>
+          <a:bodyPr/>
+          <a:lstStyle/>
+          <a:p>
+            <a:r>
+              <a:rPr lang="en-US" dirty="0"/>
+              <a:t/>
+            </a:r>
+            <a:endParaRPr lang="en-US" dirty="0"/>
+          </a:p>
+        </p:txBody>
+      </p:sp>
+      <p:sp>
+        <p:nvSpPr>
+          <p:cNvPr id="4" name="Slide Number Placeholder 3"/>
+          <p:cNvSpPr>
+            <a:spLocks noGrp="1"/>
+          </p:cNvSpPr>
+          <p:nvPr>
+            <p:ph type="sldNum" sz="quarter" idx="10"/>
+          </p:nvPr>
+        </p:nvSpPr>
+        <p:spPr/>
+        <p:txBody>
+          <a:bodyPr/>
+          <a:lstStyle/>
+          <a:p>
+            <a:fld id="{F7021451-1387-4CA6-816F-3879F97B5CBC}" type="slidenum">
+              <a:rPr lang="en-US"/>
+              <a:t>9</a:t>
             </a:fld>
             <a:endParaRPr lang="en-US"/>
           </a:p>
@@ -1606,7 +1784,7 @@
               <a:buNone/>
             </a:pPr>
             <a:r>
-              <a:rPr lang="en-US" sz="3200" b="1" dirty="0">
+              <a:rPr lang="en-US" sz="3000" b="1" dirty="0">
                 <a:solidFill>
                   <a:srgbClr val="FFFFFF"/>
                 </a:solidFill>
@@ -1614,9 +1792,9 @@
                 <a:ea typeface="Trebuchet MS" pitchFamily="34" charset="-122"/>
                 <a:cs typeface="Trebuchet MS" pitchFamily="34" charset="-120"/>
               </a:rPr>
-              <a:t>SELECT filtrage et tri</a:t>
-            </a:r>
-            <a:endParaRPr lang="en-US" sz="3200" dirty="0"/>
+              <a:t>SELECT — Filtrage et tri</a:t>
+            </a:r>
+            <a:endParaRPr lang="en-US" sz="3000" dirty="0"/>
           </a:p>
         </p:txBody>
       </p:sp>
@@ -1645,7 +1823,7 @@
               <a:buNone/>
             </a:pPr>
             <a:r>
-              <a:rPr lang="en-US" sz="1500" dirty="0">
+              <a:rPr lang="en-US" sz="1400" dirty="0">
                 <a:solidFill>
                   <a:srgbClr val="CCCCCC"/>
                 </a:solidFill>
@@ -1653,9 +1831,9 @@
                 <a:ea typeface="Calibri" pitchFamily="34" charset="-122"/>
                 <a:cs typeface="Calibri" pitchFamily="34" charset="-120"/>
               </a:rPr>
-              <a:t>WHERE · LIKE · ORDER BY · LIMIT · Alias</a:t>
-            </a:r>
-            <a:endParaRPr lang="en-US" sz="1500" dirty="0"/>
+              <a:t>WHERE, LIKE, BETWEEN, IN, ORDER BY, LIMIT, AND/OR, alias</a:t>
+            </a:r>
+            <a:endParaRPr lang="en-US" sz="1400" dirty="0"/>
           </a:p>
         </p:txBody>
       </p:sp>
@@ -1695,6 +1873,903 @@
               <a:t>SwissSound Studios | BTEC: P2 P3 | LO2</a:t>
             </a:r>
             <a:endParaRPr lang="en-US" sz="1100" dirty="0"/>
+          </a:p>
+        </p:txBody>
+      </p:sp>
+    </p:spTree>
+  </p:cSld>
+  <p:clrMapOvr>
+    <a:masterClrMapping/>
+  </p:clrMapOvr>
+</p:sld>
+</file>
+
+<file path=ppt/slides/slide10.xml><?xml version="1.0" encoding="utf-8"?>
+<p:sld xmlns:a="http://schemas.openxmlformats.org/drawingml/2006/main" xmlns:r="http://schemas.openxmlformats.org/officeDocument/2006/relationships" xmlns:p="http://schemas.openxmlformats.org/presentationml/2006/main">
+  <p:cSld name="Slide 10">
+    <p:bg>
+      <p:bgPr>
+        <a:solidFill>
+          <a:srgbClr val="F5F7FA"/>
+        </a:solidFill>
+      </p:bgPr>
+    </p:bg>
+    <p:spTree>
+      <p:nvGrpSpPr>
+        <p:cNvPr id="1" name=""/>
+        <p:cNvGrpSpPr/>
+        <p:nvPr/>
+      </p:nvGrpSpPr>
+      <p:grpSpPr>
+        <a:xfrm>
+          <a:off x="0" y="0"/>
+          <a:ext cx="0" cy="0"/>
+          <a:chOff x="0" y="0"/>
+          <a:chExt cx="0" cy="0"/>
+        </a:xfrm>
+      </p:grpSpPr>
+      <p:sp>
+        <p:nvSpPr>
+          <p:cNvPr id="2" name="Text 0"/>
+          <p:cNvSpPr/>
+          <p:nvPr/>
+        </p:nvSpPr>
+        <p:spPr>
+          <a:xfrm>
+            <a:off x="457200" y="137160"/>
+            <a:ext cx="5486400" cy="365760"/>
+          </a:xfrm>
+          <a:prstGeom prst="rect">
+            <a:avLst/>
+          </a:prstGeom>
+          <a:noFill/>
+          <a:ln/>
+        </p:spPr>
+        <p:txBody>
+          <a:bodyPr wrap="square" lIns="0" tIns="0" rIns="0" bIns="0" rtlCol="0" anchor="ctr"/>
+          <a:lstStyle/>
+          <a:p>
+            <a:pPr indent="0" marL="0">
+              <a:buNone/>
+            </a:pPr>
+            <a:r>
+              <a:rPr lang="en-US" sz="1600" b="1" dirty="0">
+                <a:solidFill>
+                  <a:srgbClr val="0D47A1"/>
+                </a:solidFill>
+                <a:latin typeface="Trebuchet MS" pitchFamily="34" charset="0"/>
+                <a:ea typeface="Trebuchet MS" pitchFamily="34" charset="-122"/>
+                <a:cs typeface="Trebuchet MS" pitchFamily="34" charset="-120"/>
+              </a:rPr>
+              <a:t>Memo Module 12</a:t>
+            </a:r>
+            <a:endParaRPr lang="en-US" sz="1600" dirty="0"/>
+          </a:p>
+        </p:txBody>
+      </p:sp>
+      <p:sp>
+        <p:nvSpPr>
+          <p:cNvPr id="3" name="Shape 1"/>
+          <p:cNvSpPr/>
+          <p:nvPr/>
+        </p:nvSpPr>
+        <p:spPr>
+          <a:xfrm>
+            <a:off x="457200" y="640080"/>
+            <a:ext cx="2286000" cy="429768"/>
+          </a:xfrm>
+          <a:prstGeom prst="rect">
+            <a:avLst/>
+          </a:prstGeom>
+          <a:solidFill>
+            <a:srgbClr val="E3F2FD"/>
+          </a:solidFill>
+          <a:ln/>
+        </p:spPr>
+      </p:sp>
+      <p:sp>
+        <p:nvSpPr>
+          <p:cNvPr id="4" name="Text 2"/>
+          <p:cNvSpPr/>
+          <p:nvPr/>
+        </p:nvSpPr>
+        <p:spPr>
+          <a:xfrm>
+            <a:off x="548640" y="640080"/>
+            <a:ext cx="2103120" cy="429768"/>
+          </a:xfrm>
+          <a:prstGeom prst="rect">
+            <a:avLst/>
+          </a:prstGeom>
+          <a:noFill/>
+          <a:ln/>
+        </p:spPr>
+        <p:txBody>
+          <a:bodyPr wrap="square" lIns="0" tIns="0" rIns="0" bIns="0" rtlCol="0" anchor="ctr"/>
+          <a:lstStyle/>
+          <a:p>
+            <a:pPr indent="0" marL="0">
+              <a:buNone/>
+            </a:pPr>
+            <a:r>
+              <a:rPr lang="en-US" sz="900" b="1" dirty="0">
+                <a:solidFill>
+                  <a:srgbClr val="0D47A1"/>
+                </a:solidFill>
+                <a:latin typeface="Trebuchet MS" pitchFamily="34" charset="0"/>
+                <a:ea typeface="Trebuchet MS" pitchFamily="34" charset="-122"/>
+                <a:cs typeface="Trebuchet MS" pitchFamily="34" charset="-120"/>
+              </a:rPr>
+              <a:t>WHERE</a:t>
+            </a:r>
+            <a:endParaRPr lang="en-US" sz="900" dirty="0"/>
+          </a:p>
+        </p:txBody>
+      </p:sp>
+      <p:sp>
+        <p:nvSpPr>
+          <p:cNvPr id="5" name="Shape 3"/>
+          <p:cNvSpPr/>
+          <p:nvPr/>
+        </p:nvSpPr>
+        <p:spPr>
+          <a:xfrm>
+            <a:off x="2743200" y="640080"/>
+            <a:ext cx="5943600" cy="429768"/>
+          </a:xfrm>
+          <a:prstGeom prst="rect">
+            <a:avLst/>
+          </a:prstGeom>
+          <a:solidFill>
+            <a:srgbClr val="E3F2FD"/>
+          </a:solidFill>
+          <a:ln/>
+        </p:spPr>
+      </p:sp>
+      <p:sp>
+        <p:nvSpPr>
+          <p:cNvPr id="6" name="Text 4"/>
+          <p:cNvSpPr/>
+          <p:nvPr/>
+        </p:nvSpPr>
+        <p:spPr>
+          <a:xfrm>
+            <a:off x="2834640" y="640080"/>
+            <a:ext cx="5760720" cy="429768"/>
+          </a:xfrm>
+          <a:prstGeom prst="rect">
+            <a:avLst/>
+          </a:prstGeom>
+          <a:noFill/>
+          <a:ln/>
+        </p:spPr>
+        <p:txBody>
+          <a:bodyPr wrap="square" lIns="0" tIns="0" rIns="0" bIns="0" rtlCol="0" anchor="ctr"/>
+          <a:lstStyle/>
+          <a:p>
+            <a:pPr indent="0" marL="0">
+              <a:buNone/>
+            </a:pPr>
+            <a:r>
+              <a:rPr lang="en-US" sz="900" dirty="0">
+                <a:solidFill>
+                  <a:srgbClr val="333333"/>
+                </a:solidFill>
+                <a:latin typeface="Calibri" pitchFamily="34" charset="0"/>
+                <a:ea typeface="Calibri" pitchFamily="34" charset="-122"/>
+                <a:cs typeface="Calibri" pitchFamily="34" charset="-120"/>
+              </a:rPr>
+              <a:t>=, &lt;&gt;, BETWEEN, IN, LIKE, IS NULL, AND/OR/NOT</a:t>
+            </a:r>
+            <a:endParaRPr lang="en-US" sz="900" dirty="0"/>
+          </a:p>
+        </p:txBody>
+      </p:sp>
+      <p:sp>
+        <p:nvSpPr>
+          <p:cNvPr id="7" name="Shape 5"/>
+          <p:cNvSpPr/>
+          <p:nvPr/>
+        </p:nvSpPr>
+        <p:spPr>
+          <a:xfrm>
+            <a:off x="457200" y="1097280"/>
+            <a:ext cx="2286000" cy="429768"/>
+          </a:xfrm>
+          <a:prstGeom prst="rect">
+            <a:avLst/>
+          </a:prstGeom>
+          <a:solidFill>
+            <a:srgbClr val="F0F0F0"/>
+          </a:solidFill>
+          <a:ln/>
+        </p:spPr>
+      </p:sp>
+      <p:sp>
+        <p:nvSpPr>
+          <p:cNvPr id="8" name="Text 6"/>
+          <p:cNvSpPr/>
+          <p:nvPr/>
+        </p:nvSpPr>
+        <p:spPr>
+          <a:xfrm>
+            <a:off x="548640" y="1097280"/>
+            <a:ext cx="2103120" cy="429768"/>
+          </a:xfrm>
+          <a:prstGeom prst="rect">
+            <a:avLst/>
+          </a:prstGeom>
+          <a:noFill/>
+          <a:ln/>
+        </p:spPr>
+        <p:txBody>
+          <a:bodyPr wrap="square" lIns="0" tIns="0" rIns="0" bIns="0" rtlCol="0" anchor="ctr"/>
+          <a:lstStyle/>
+          <a:p>
+            <a:pPr indent="0" marL="0">
+              <a:buNone/>
+            </a:pPr>
+            <a:r>
+              <a:rPr lang="en-US" sz="900" b="1" dirty="0">
+                <a:solidFill>
+                  <a:srgbClr val="0D47A1"/>
+                </a:solidFill>
+                <a:latin typeface="Trebuchet MS" pitchFamily="34" charset="0"/>
+                <a:ea typeface="Trebuchet MS" pitchFamily="34" charset="-122"/>
+                <a:cs typeface="Trebuchet MS" pitchFamily="34" charset="-120"/>
+              </a:rPr>
+              <a:t>LIKE</a:t>
+            </a:r>
+            <a:endParaRPr lang="en-US" sz="900" dirty="0"/>
+          </a:p>
+        </p:txBody>
+      </p:sp>
+      <p:sp>
+        <p:nvSpPr>
+          <p:cNvPr id="9" name="Shape 7"/>
+          <p:cNvSpPr/>
+          <p:nvPr/>
+        </p:nvSpPr>
+        <p:spPr>
+          <a:xfrm>
+            <a:off x="2743200" y="1097280"/>
+            <a:ext cx="5943600" cy="429768"/>
+          </a:xfrm>
+          <a:prstGeom prst="rect">
+            <a:avLst/>
+          </a:prstGeom>
+          <a:solidFill>
+            <a:srgbClr val="F0F0F0"/>
+          </a:solidFill>
+          <a:ln/>
+        </p:spPr>
+      </p:sp>
+      <p:sp>
+        <p:nvSpPr>
+          <p:cNvPr id="10" name="Text 8"/>
+          <p:cNvSpPr/>
+          <p:nvPr/>
+        </p:nvSpPr>
+        <p:spPr>
+          <a:xfrm>
+            <a:off x="2834640" y="1097280"/>
+            <a:ext cx="5760720" cy="429768"/>
+          </a:xfrm>
+          <a:prstGeom prst="rect">
+            <a:avLst/>
+          </a:prstGeom>
+          <a:noFill/>
+          <a:ln/>
+        </p:spPr>
+        <p:txBody>
+          <a:bodyPr wrap="square" lIns="0" tIns="0" rIns="0" bIns="0" rtlCol="0" anchor="ctr"/>
+          <a:lstStyle/>
+          <a:p>
+            <a:pPr indent="0" marL="0">
+              <a:buNone/>
+            </a:pPr>
+            <a:r>
+              <a:rPr lang="en-US" sz="900" dirty="0">
+                <a:solidFill>
+                  <a:srgbClr val="333333"/>
+                </a:solidFill>
+                <a:latin typeface="Calibri" pitchFamily="34" charset="0"/>
+                <a:ea typeface="Calibri" pitchFamily="34" charset="-122"/>
+                <a:cs typeface="Calibri" pitchFamily="34" charset="-120"/>
+              </a:rPr>
+              <a:t>% = tout, _ = 1 char. Insensible casse</a:t>
+            </a:r>
+            <a:endParaRPr lang="en-US" sz="900" dirty="0"/>
+          </a:p>
+        </p:txBody>
+      </p:sp>
+      <p:sp>
+        <p:nvSpPr>
+          <p:cNvPr id="11" name="Shape 9"/>
+          <p:cNvSpPr/>
+          <p:nvPr/>
+        </p:nvSpPr>
+        <p:spPr>
+          <a:xfrm>
+            <a:off x="457200" y="1554480"/>
+            <a:ext cx="2286000" cy="429768"/>
+          </a:xfrm>
+          <a:prstGeom prst="rect">
+            <a:avLst/>
+          </a:prstGeom>
+          <a:solidFill>
+            <a:srgbClr val="E3F2FD"/>
+          </a:solidFill>
+          <a:ln/>
+        </p:spPr>
+      </p:sp>
+      <p:sp>
+        <p:nvSpPr>
+          <p:cNvPr id="12" name="Text 10"/>
+          <p:cNvSpPr/>
+          <p:nvPr/>
+        </p:nvSpPr>
+        <p:spPr>
+          <a:xfrm>
+            <a:off x="548640" y="1554480"/>
+            <a:ext cx="2103120" cy="429768"/>
+          </a:xfrm>
+          <a:prstGeom prst="rect">
+            <a:avLst/>
+          </a:prstGeom>
+          <a:noFill/>
+          <a:ln/>
+        </p:spPr>
+        <p:txBody>
+          <a:bodyPr wrap="square" lIns="0" tIns="0" rIns="0" bIns="0" rtlCol="0" anchor="ctr"/>
+          <a:lstStyle/>
+          <a:p>
+            <a:pPr indent="0" marL="0">
+              <a:buNone/>
+            </a:pPr>
+            <a:r>
+              <a:rPr lang="en-US" sz="900" b="1" dirty="0">
+                <a:solidFill>
+                  <a:srgbClr val="0D47A1"/>
+                </a:solidFill>
+                <a:latin typeface="Trebuchet MS" pitchFamily="34" charset="0"/>
+                <a:ea typeface="Trebuchet MS" pitchFamily="34" charset="-122"/>
+                <a:cs typeface="Trebuchet MS" pitchFamily="34" charset="-120"/>
+              </a:rPr>
+              <a:t>IS NULL</a:t>
+            </a:r>
+            <a:endParaRPr lang="en-US" sz="900" dirty="0"/>
+          </a:p>
+        </p:txBody>
+      </p:sp>
+      <p:sp>
+        <p:nvSpPr>
+          <p:cNvPr id="13" name="Shape 11"/>
+          <p:cNvSpPr/>
+          <p:nvPr/>
+        </p:nvSpPr>
+        <p:spPr>
+          <a:xfrm>
+            <a:off x="2743200" y="1554480"/>
+            <a:ext cx="5943600" cy="429768"/>
+          </a:xfrm>
+          <a:prstGeom prst="rect">
+            <a:avLst/>
+          </a:prstGeom>
+          <a:solidFill>
+            <a:srgbClr val="E3F2FD"/>
+          </a:solidFill>
+          <a:ln/>
+        </p:spPr>
+      </p:sp>
+      <p:sp>
+        <p:nvSpPr>
+          <p:cNvPr id="14" name="Text 12"/>
+          <p:cNvSpPr/>
+          <p:nvPr/>
+        </p:nvSpPr>
+        <p:spPr>
+          <a:xfrm>
+            <a:off x="2834640" y="1554480"/>
+            <a:ext cx="5760720" cy="429768"/>
+          </a:xfrm>
+          <a:prstGeom prst="rect">
+            <a:avLst/>
+          </a:prstGeom>
+          <a:noFill/>
+          <a:ln/>
+        </p:spPr>
+        <p:txBody>
+          <a:bodyPr wrap="square" lIns="0" tIns="0" rIns="0" bIns="0" rtlCol="0" anchor="ctr"/>
+          <a:lstStyle/>
+          <a:p>
+            <a:pPr indent="0" marL="0">
+              <a:buNone/>
+            </a:pPr>
+            <a:r>
+              <a:rPr lang="en-US" sz="900" dirty="0">
+                <a:solidFill>
+                  <a:srgbClr val="333333"/>
+                </a:solidFill>
+                <a:latin typeface="Calibri" pitchFamily="34" charset="0"/>
+                <a:ea typeface="Calibri" pitchFamily="34" charset="-122"/>
+                <a:cs typeface="Calibri" pitchFamily="34" charset="-120"/>
+              </a:rPr>
+              <a:t>Seul moyen de tester NULL (pas = NULL !)</a:t>
+            </a:r>
+            <a:endParaRPr lang="en-US" sz="900" dirty="0"/>
+          </a:p>
+        </p:txBody>
+      </p:sp>
+      <p:sp>
+        <p:nvSpPr>
+          <p:cNvPr id="15" name="Shape 13"/>
+          <p:cNvSpPr/>
+          <p:nvPr/>
+        </p:nvSpPr>
+        <p:spPr>
+          <a:xfrm>
+            <a:off x="457200" y="2011680"/>
+            <a:ext cx="2286000" cy="429768"/>
+          </a:xfrm>
+          <a:prstGeom prst="rect">
+            <a:avLst/>
+          </a:prstGeom>
+          <a:solidFill>
+            <a:srgbClr val="F0F0F0"/>
+          </a:solidFill>
+          <a:ln/>
+        </p:spPr>
+      </p:sp>
+      <p:sp>
+        <p:nvSpPr>
+          <p:cNvPr id="16" name="Text 14"/>
+          <p:cNvSpPr/>
+          <p:nvPr/>
+        </p:nvSpPr>
+        <p:spPr>
+          <a:xfrm>
+            <a:off x="548640" y="2011680"/>
+            <a:ext cx="2103120" cy="429768"/>
+          </a:xfrm>
+          <a:prstGeom prst="rect">
+            <a:avLst/>
+          </a:prstGeom>
+          <a:noFill/>
+          <a:ln/>
+        </p:spPr>
+        <p:txBody>
+          <a:bodyPr wrap="square" lIns="0" tIns="0" rIns="0" bIns="0" rtlCol="0" anchor="ctr"/>
+          <a:lstStyle/>
+          <a:p>
+            <a:pPr indent="0" marL="0">
+              <a:buNone/>
+            </a:pPr>
+            <a:r>
+              <a:rPr lang="en-US" sz="900" b="1" dirty="0">
+                <a:solidFill>
+                  <a:srgbClr val="0D47A1"/>
+                </a:solidFill>
+                <a:latin typeface="Trebuchet MS" pitchFamily="34" charset="0"/>
+                <a:ea typeface="Trebuchet MS" pitchFamily="34" charset="-122"/>
+                <a:cs typeface="Trebuchet MS" pitchFamily="34" charset="-120"/>
+              </a:rPr>
+              <a:t>ORDER BY</a:t>
+            </a:r>
+            <a:endParaRPr lang="en-US" sz="900" dirty="0"/>
+          </a:p>
+        </p:txBody>
+      </p:sp>
+      <p:sp>
+        <p:nvSpPr>
+          <p:cNvPr id="17" name="Shape 15"/>
+          <p:cNvSpPr/>
+          <p:nvPr/>
+        </p:nvSpPr>
+        <p:spPr>
+          <a:xfrm>
+            <a:off x="2743200" y="2011680"/>
+            <a:ext cx="5943600" cy="429768"/>
+          </a:xfrm>
+          <a:prstGeom prst="rect">
+            <a:avLst/>
+          </a:prstGeom>
+          <a:solidFill>
+            <a:srgbClr val="F0F0F0"/>
+          </a:solidFill>
+          <a:ln/>
+        </p:spPr>
+      </p:sp>
+      <p:sp>
+        <p:nvSpPr>
+          <p:cNvPr id="18" name="Text 16"/>
+          <p:cNvSpPr/>
+          <p:nvPr/>
+        </p:nvSpPr>
+        <p:spPr>
+          <a:xfrm>
+            <a:off x="2834640" y="2011680"/>
+            <a:ext cx="5760720" cy="429768"/>
+          </a:xfrm>
+          <a:prstGeom prst="rect">
+            <a:avLst/>
+          </a:prstGeom>
+          <a:noFill/>
+          <a:ln/>
+        </p:spPr>
+        <p:txBody>
+          <a:bodyPr wrap="square" lIns="0" tIns="0" rIns="0" bIns="0" rtlCol="0" anchor="ctr"/>
+          <a:lstStyle/>
+          <a:p>
+            <a:pPr indent="0" marL="0">
+              <a:buNone/>
+            </a:pPr>
+            <a:r>
+              <a:rPr lang="en-US" sz="900" dirty="0">
+                <a:solidFill>
+                  <a:srgbClr val="333333"/>
+                </a:solidFill>
+                <a:latin typeface="Calibri" pitchFamily="34" charset="0"/>
+                <a:ea typeface="Calibri" pitchFamily="34" charset="-122"/>
+                <a:cs typeface="Calibri" pitchFamily="34" charset="-120"/>
+              </a:rPr>
+              <a:t>ASC/DESC, multi-colonnes, apres WHERE</a:t>
+            </a:r>
+            <a:endParaRPr lang="en-US" sz="900" dirty="0"/>
+          </a:p>
+        </p:txBody>
+      </p:sp>
+      <p:sp>
+        <p:nvSpPr>
+          <p:cNvPr id="19" name="Shape 17"/>
+          <p:cNvSpPr/>
+          <p:nvPr/>
+        </p:nvSpPr>
+        <p:spPr>
+          <a:xfrm>
+            <a:off x="457200" y="2468880"/>
+            <a:ext cx="2286000" cy="429768"/>
+          </a:xfrm>
+          <a:prstGeom prst="rect">
+            <a:avLst/>
+          </a:prstGeom>
+          <a:solidFill>
+            <a:srgbClr val="E3F2FD"/>
+          </a:solidFill>
+          <a:ln/>
+        </p:spPr>
+      </p:sp>
+      <p:sp>
+        <p:nvSpPr>
+          <p:cNvPr id="20" name="Text 18"/>
+          <p:cNvSpPr/>
+          <p:nvPr/>
+        </p:nvSpPr>
+        <p:spPr>
+          <a:xfrm>
+            <a:off x="548640" y="2468880"/>
+            <a:ext cx="2103120" cy="429768"/>
+          </a:xfrm>
+          <a:prstGeom prst="rect">
+            <a:avLst/>
+          </a:prstGeom>
+          <a:noFill/>
+          <a:ln/>
+        </p:spPr>
+        <p:txBody>
+          <a:bodyPr wrap="square" lIns="0" tIns="0" rIns="0" bIns="0" rtlCol="0" anchor="ctr"/>
+          <a:lstStyle/>
+          <a:p>
+            <a:pPr indent="0" marL="0">
+              <a:buNone/>
+            </a:pPr>
+            <a:r>
+              <a:rPr lang="en-US" sz="900" b="1" dirty="0">
+                <a:solidFill>
+                  <a:srgbClr val="0D47A1"/>
+                </a:solidFill>
+                <a:latin typeface="Trebuchet MS" pitchFamily="34" charset="0"/>
+                <a:ea typeface="Trebuchet MS" pitchFamily="34" charset="-122"/>
+                <a:cs typeface="Trebuchet MS" pitchFamily="34" charset="-120"/>
+              </a:rPr>
+              <a:t>LIMIT</a:t>
+            </a:r>
+            <a:endParaRPr lang="en-US" sz="900" dirty="0"/>
+          </a:p>
+        </p:txBody>
+      </p:sp>
+      <p:sp>
+        <p:nvSpPr>
+          <p:cNvPr id="21" name="Shape 19"/>
+          <p:cNvSpPr/>
+          <p:nvPr/>
+        </p:nvSpPr>
+        <p:spPr>
+          <a:xfrm>
+            <a:off x="2743200" y="2468880"/>
+            <a:ext cx="5943600" cy="429768"/>
+          </a:xfrm>
+          <a:prstGeom prst="rect">
+            <a:avLst/>
+          </a:prstGeom>
+          <a:solidFill>
+            <a:srgbClr val="E3F2FD"/>
+          </a:solidFill>
+          <a:ln/>
+        </p:spPr>
+      </p:sp>
+      <p:sp>
+        <p:nvSpPr>
+          <p:cNvPr id="22" name="Text 20"/>
+          <p:cNvSpPr/>
+          <p:nvPr/>
+        </p:nvSpPr>
+        <p:spPr>
+          <a:xfrm>
+            <a:off x="2834640" y="2468880"/>
+            <a:ext cx="5760720" cy="429768"/>
+          </a:xfrm>
+          <a:prstGeom prst="rect">
+            <a:avLst/>
+          </a:prstGeom>
+          <a:noFill/>
+          <a:ln/>
+        </p:spPr>
+        <p:txBody>
+          <a:bodyPr wrap="square" lIns="0" tIns="0" rIns="0" bIns="0" rtlCol="0" anchor="ctr"/>
+          <a:lstStyle/>
+          <a:p>
+            <a:pPr indent="0" marL="0">
+              <a:buNone/>
+            </a:pPr>
+            <a:r>
+              <a:rPr lang="en-US" sz="900" dirty="0">
+                <a:solidFill>
+                  <a:srgbClr val="333333"/>
+                </a:solidFill>
+                <a:latin typeface="Calibri" pitchFamily="34" charset="0"/>
+                <a:ea typeface="Calibri" pitchFamily="34" charset="-122"/>
+                <a:cs typeface="Calibri" pitchFamily="34" charset="-120"/>
+              </a:rPr>
+              <a:t>Pagination : LIMIT 10 OFFSET 20</a:t>
+            </a:r>
+            <a:endParaRPr lang="en-US" sz="900" dirty="0"/>
+          </a:p>
+        </p:txBody>
+      </p:sp>
+      <p:sp>
+        <p:nvSpPr>
+          <p:cNvPr id="23" name="Shape 21"/>
+          <p:cNvSpPr/>
+          <p:nvPr/>
+        </p:nvSpPr>
+        <p:spPr>
+          <a:xfrm>
+            <a:off x="457200" y="2926080"/>
+            <a:ext cx="2286000" cy="429768"/>
+          </a:xfrm>
+          <a:prstGeom prst="rect">
+            <a:avLst/>
+          </a:prstGeom>
+          <a:solidFill>
+            <a:srgbClr val="F0F0F0"/>
+          </a:solidFill>
+          <a:ln/>
+        </p:spPr>
+      </p:sp>
+      <p:sp>
+        <p:nvSpPr>
+          <p:cNvPr id="24" name="Text 22"/>
+          <p:cNvSpPr/>
+          <p:nvPr/>
+        </p:nvSpPr>
+        <p:spPr>
+          <a:xfrm>
+            <a:off x="548640" y="2926080"/>
+            <a:ext cx="2103120" cy="429768"/>
+          </a:xfrm>
+          <a:prstGeom prst="rect">
+            <a:avLst/>
+          </a:prstGeom>
+          <a:noFill/>
+          <a:ln/>
+        </p:spPr>
+        <p:txBody>
+          <a:bodyPr wrap="square" lIns="0" tIns="0" rIns="0" bIns="0" rtlCol="0" anchor="ctr"/>
+          <a:lstStyle/>
+          <a:p>
+            <a:pPr indent="0" marL="0">
+              <a:buNone/>
+            </a:pPr>
+            <a:r>
+              <a:rPr lang="en-US" sz="900" b="1" dirty="0">
+                <a:solidFill>
+                  <a:srgbClr val="0D47A1"/>
+                </a:solidFill>
+                <a:latin typeface="Trebuchet MS" pitchFamily="34" charset="0"/>
+                <a:ea typeface="Trebuchet MS" pitchFamily="34" charset="-122"/>
+                <a:cs typeface="Trebuchet MS" pitchFamily="34" charset="-120"/>
+              </a:rPr>
+              <a:t>AND/OR</a:t>
+            </a:r>
+            <a:endParaRPr lang="en-US" sz="900" dirty="0"/>
+          </a:p>
+        </p:txBody>
+      </p:sp>
+      <p:sp>
+        <p:nvSpPr>
+          <p:cNvPr id="25" name="Shape 23"/>
+          <p:cNvSpPr/>
+          <p:nvPr/>
+        </p:nvSpPr>
+        <p:spPr>
+          <a:xfrm>
+            <a:off x="2743200" y="2926080"/>
+            <a:ext cx="5943600" cy="429768"/>
+          </a:xfrm>
+          <a:prstGeom prst="rect">
+            <a:avLst/>
+          </a:prstGeom>
+          <a:solidFill>
+            <a:srgbClr val="F0F0F0"/>
+          </a:solidFill>
+          <a:ln/>
+        </p:spPr>
+      </p:sp>
+      <p:sp>
+        <p:nvSpPr>
+          <p:cNvPr id="26" name="Text 24"/>
+          <p:cNvSpPr/>
+          <p:nvPr/>
+        </p:nvSpPr>
+        <p:spPr>
+          <a:xfrm>
+            <a:off x="2834640" y="2926080"/>
+            <a:ext cx="5760720" cy="429768"/>
+          </a:xfrm>
+          <a:prstGeom prst="rect">
+            <a:avLst/>
+          </a:prstGeom>
+          <a:noFill/>
+          <a:ln/>
+        </p:spPr>
+        <p:txBody>
+          <a:bodyPr wrap="square" lIns="0" tIns="0" rIns="0" bIns="0" rtlCol="0" anchor="ctr"/>
+          <a:lstStyle/>
+          <a:p>
+            <a:pPr indent="0" marL="0">
+              <a:buNone/>
+            </a:pPr>
+            <a:r>
+              <a:rPr lang="en-US" sz="900" dirty="0">
+                <a:solidFill>
+                  <a:srgbClr val="333333"/>
+                </a:solidFill>
+                <a:latin typeface="Calibri" pitchFamily="34" charset="0"/>
+                <a:ea typeface="Calibri" pitchFamily="34" charset="-122"/>
+                <a:cs typeface="Calibri" pitchFamily="34" charset="-120"/>
+              </a:rPr>
+              <a:t>AND prioritaire sur OR — parentheses !</a:t>
+            </a:r>
+            <a:endParaRPr lang="en-US" sz="900" dirty="0"/>
+          </a:p>
+        </p:txBody>
+      </p:sp>
+      <p:sp>
+        <p:nvSpPr>
+          <p:cNvPr id="27" name="Shape 25"/>
+          <p:cNvSpPr/>
+          <p:nvPr/>
+        </p:nvSpPr>
+        <p:spPr>
+          <a:xfrm>
+            <a:off x="457200" y="3383280"/>
+            <a:ext cx="2286000" cy="429768"/>
+          </a:xfrm>
+          <a:prstGeom prst="rect">
+            <a:avLst/>
+          </a:prstGeom>
+          <a:solidFill>
+            <a:srgbClr val="E3F2FD"/>
+          </a:solidFill>
+          <a:ln/>
+        </p:spPr>
+      </p:sp>
+      <p:sp>
+        <p:nvSpPr>
+          <p:cNvPr id="28" name="Text 26"/>
+          <p:cNvSpPr/>
+          <p:nvPr/>
+        </p:nvSpPr>
+        <p:spPr>
+          <a:xfrm>
+            <a:off x="548640" y="3383280"/>
+            <a:ext cx="2103120" cy="429768"/>
+          </a:xfrm>
+          <a:prstGeom prst="rect">
+            <a:avLst/>
+          </a:prstGeom>
+          <a:noFill/>
+          <a:ln/>
+        </p:spPr>
+        <p:txBody>
+          <a:bodyPr wrap="square" lIns="0" tIns="0" rIns="0" bIns="0" rtlCol="0" anchor="ctr"/>
+          <a:lstStyle/>
+          <a:p>
+            <a:pPr indent="0" marL="0">
+              <a:buNone/>
+            </a:pPr>
+            <a:r>
+              <a:rPr lang="en-US" sz="900" b="1" dirty="0">
+                <a:solidFill>
+                  <a:srgbClr val="0D47A1"/>
+                </a:solidFill>
+                <a:latin typeface="Trebuchet MS" pitchFamily="34" charset="0"/>
+                <a:ea typeface="Trebuchet MS" pitchFamily="34" charset="-122"/>
+                <a:cs typeface="Trebuchet MS" pitchFamily="34" charset="-120"/>
+              </a:rPr>
+              <a:t>Alias</a:t>
+            </a:r>
+            <a:endParaRPr lang="en-US" sz="900" dirty="0"/>
+          </a:p>
+        </p:txBody>
+      </p:sp>
+      <p:sp>
+        <p:nvSpPr>
+          <p:cNvPr id="29" name="Shape 27"/>
+          <p:cNvSpPr/>
+          <p:nvPr/>
+        </p:nvSpPr>
+        <p:spPr>
+          <a:xfrm>
+            <a:off x="2743200" y="3383280"/>
+            <a:ext cx="5943600" cy="429768"/>
+          </a:xfrm>
+          <a:prstGeom prst="rect">
+            <a:avLst/>
+          </a:prstGeom>
+          <a:solidFill>
+            <a:srgbClr val="E3F2FD"/>
+          </a:solidFill>
+          <a:ln/>
+        </p:spPr>
+      </p:sp>
+      <p:sp>
+        <p:nvSpPr>
+          <p:cNvPr id="30" name="Text 28"/>
+          <p:cNvSpPr/>
+          <p:nvPr/>
+        </p:nvSpPr>
+        <p:spPr>
+          <a:xfrm>
+            <a:off x="2834640" y="3383280"/>
+            <a:ext cx="5760720" cy="429768"/>
+          </a:xfrm>
+          <a:prstGeom prst="rect">
+            <a:avLst/>
+          </a:prstGeom>
+          <a:noFill/>
+          <a:ln/>
+        </p:spPr>
+        <p:txBody>
+          <a:bodyPr wrap="square" lIns="0" tIns="0" rIns="0" bIns="0" rtlCol="0" anchor="ctr"/>
+          <a:lstStyle/>
+          <a:p>
+            <a:pPr indent="0" marL="0">
+              <a:buNone/>
+            </a:pPr>
+            <a:r>
+              <a:rPr lang="en-US" sz="900" dirty="0">
+                <a:solidFill>
+                  <a:srgbClr val="333333"/>
+                </a:solidFill>
+                <a:latin typeface="Calibri" pitchFamily="34" charset="0"/>
+                <a:ea typeface="Calibri" pitchFamily="34" charset="-122"/>
+                <a:cs typeface="Calibri" pitchFamily="34" charset="-120"/>
+              </a:rPr>
+              <a:t>AS pour renommer dans le resultat</a:t>
+            </a:r>
+            <a:endParaRPr lang="en-US" sz="900" dirty="0"/>
           </a:p>
         </p:txBody>
       </p:sp>
@@ -1759,7 +2834,7 @@
         <p:spPr>
           <a:xfrm>
             <a:off x="457200" y="182880"/>
-            <a:ext cx="8229600" cy="594360"/>
+            <a:ext cx="8229600" cy="548640"/>
           </a:xfrm>
           <a:prstGeom prst="rect">
             <a:avLst/>
@@ -1775,7 +2850,7 @@
               <a:buNone/>
             </a:pPr>
             <a:r>
-              <a:rPr lang="en-US" sz="2400" b="1" dirty="0">
+              <a:rPr lang="en-US" sz="2200" b="1" dirty="0">
                 <a:solidFill>
                   <a:srgbClr val="0D47A1"/>
                 </a:solidFill>
@@ -1783,9 +2858,9 @@
                 <a:ea typeface="Trebuchet MS" pitchFamily="34" charset="-122"/>
                 <a:cs typeface="Trebuchet MS" pitchFamily="34" charset="-120"/>
               </a:rPr>
-              <a:t>SELECT de base</a:t>
-            </a:r>
-            <a:endParaRPr lang="en-US" sz="2400" dirty="0"/>
+              <a:t>SELECT de base — rappel syntaxe</a:t>
+            </a:r>
+            <a:endParaRPr lang="en-US" sz="2200" dirty="0"/>
           </a:p>
         </p:txBody>
       </p:sp>
@@ -1797,8 +2872,8 @@
         </p:nvSpPr>
         <p:spPr>
           <a:xfrm>
-            <a:off x="457200" y="914400"/>
-            <a:ext cx="8229600" cy="521208"/>
+            <a:off x="457200" y="868680"/>
+            <a:ext cx="8229600" cy="475488"/>
           </a:xfrm>
           <a:prstGeom prst="rect">
             <a:avLst/>
@@ -1807,13 +2882,6 @@
             <a:srgbClr val="FFFFFF"/>
           </a:solidFill>
           <a:ln/>
-          <a:effectLst>
-            <a:outerShdw sx="100000" sy="100000" kx="0" ky="0" algn="bl" rotWithShape="0" blurRad="50800" dist="25400" dir="8100000">
-              <a:srgbClr val="000000">
-                <a:alpha val="12000"/>
-              </a:srgbClr>
-            </a:outerShdw>
-          </a:effectLst>
         </p:spPr>
       </p:sp>
       <p:sp>
@@ -1824,8 +2892,8 @@
         </p:nvSpPr>
         <p:spPr>
           <a:xfrm>
-            <a:off x="457200" y="914400"/>
-            <a:ext cx="45720" cy="521208"/>
+            <a:off x="457200" y="868680"/>
+            <a:ext cx="45720" cy="475488"/>
           </a:xfrm>
           <a:prstGeom prst="rect">
             <a:avLst/>
@@ -1844,8 +2912,8 @@
         </p:nvSpPr>
         <p:spPr>
           <a:xfrm>
-            <a:off x="685800" y="914400"/>
-            <a:ext cx="7818120" cy="521208"/>
+            <a:off x="640080" y="868680"/>
+            <a:ext cx="7863840" cy="475488"/>
           </a:xfrm>
           <a:prstGeom prst="rect">
             <a:avLst/>
@@ -1869,7 +2937,7 @@
                 <a:ea typeface="JetBrains Mono" pitchFamily="34" charset="-122"/>
                 <a:cs typeface="JetBrains Mono" pitchFamily="34" charset="-120"/>
               </a:rPr>
-              <a:t>SELECT * FROM artiste;  -- toutes colonnes, toutes lignes</a:t>
+              <a:t>SELECT * FROM artiste; — toutes colonnes</a:t>
             </a:r>
             <a:endParaRPr lang="en-US" sz="1000" dirty="0"/>
           </a:p>
@@ -1883,8 +2951,8 @@
         </p:nvSpPr>
         <p:spPr>
           <a:xfrm>
-            <a:off x="457200" y="1463040"/>
-            <a:ext cx="8229600" cy="521208"/>
+            <a:off x="457200" y="1371600"/>
+            <a:ext cx="8229600" cy="475488"/>
           </a:xfrm>
           <a:prstGeom prst="rect">
             <a:avLst/>
@@ -1893,13 +2961,6 @@
             <a:srgbClr val="E3F2FD"/>
           </a:solidFill>
           <a:ln/>
-          <a:effectLst>
-            <a:outerShdw sx="100000" sy="100000" kx="0" ky="0" algn="bl" rotWithShape="0" blurRad="50800" dist="25400" dir="8100000">
-              <a:srgbClr val="000000">
-                <a:alpha val="12000"/>
-              </a:srgbClr>
-            </a:outerShdw>
-          </a:effectLst>
         </p:spPr>
       </p:sp>
       <p:sp>
@@ -1910,8 +2971,8 @@
         </p:nvSpPr>
         <p:spPr>
           <a:xfrm>
-            <a:off x="457200" y="1463040"/>
-            <a:ext cx="45720" cy="521208"/>
+            <a:off x="457200" y="1371600"/>
+            <a:ext cx="45720" cy="475488"/>
           </a:xfrm>
           <a:prstGeom prst="rect">
             <a:avLst/>
@@ -1930,8 +2991,8 @@
         </p:nvSpPr>
         <p:spPr>
           <a:xfrm>
-            <a:off x="685800" y="1463040"/>
-            <a:ext cx="7818120" cy="521208"/>
+            <a:off x="640080" y="1371600"/>
+            <a:ext cx="7863840" cy="475488"/>
           </a:xfrm>
           <a:prstGeom prst="rect">
             <a:avLst/>
@@ -1955,7 +3016,7 @@
                 <a:ea typeface="JetBrains Mono" pitchFamily="34" charset="-122"/>
                 <a:cs typeface="JetBrains Mono" pitchFamily="34" charset="-120"/>
               </a:rPr>
-              <a:t>SELECT nom, email FROM artiste;  -- colonnes spécifiques</a:t>
+              <a:t>SELECT nom, email FROM artiste; — colonnes specifiques</a:t>
             </a:r>
             <a:endParaRPr lang="en-US" sz="1000" dirty="0"/>
           </a:p>
@@ -1969,8 +3030,8 @@
         </p:nvSpPr>
         <p:spPr>
           <a:xfrm>
-            <a:off x="457200" y="2011680"/>
-            <a:ext cx="8229600" cy="521208"/>
+            <a:off x="457200" y="1874520"/>
+            <a:ext cx="8229600" cy="475488"/>
           </a:xfrm>
           <a:prstGeom prst="rect">
             <a:avLst/>
@@ -1979,13 +3040,6 @@
             <a:srgbClr val="FFFFFF"/>
           </a:solidFill>
           <a:ln/>
-          <a:effectLst>
-            <a:outerShdw sx="100000" sy="100000" kx="0" ky="0" algn="bl" rotWithShape="0" blurRad="50800" dist="25400" dir="8100000">
-              <a:srgbClr val="000000">
-                <a:alpha val="12000"/>
-              </a:srgbClr>
-            </a:outerShdw>
-          </a:effectLst>
         </p:spPr>
       </p:sp>
       <p:sp>
@@ -1996,8 +3050,8 @@
         </p:nvSpPr>
         <p:spPr>
           <a:xfrm>
-            <a:off x="457200" y="2011680"/>
-            <a:ext cx="45720" cy="521208"/>
+            <a:off x="457200" y="1874520"/>
+            <a:ext cx="45720" cy="475488"/>
           </a:xfrm>
           <a:prstGeom prst="rect">
             <a:avLst/>
@@ -2016,8 +3070,8 @@
         </p:nvSpPr>
         <p:spPr>
           <a:xfrm>
-            <a:off x="685800" y="2011680"/>
-            <a:ext cx="7818120" cy="521208"/>
+            <a:off x="640080" y="1874520"/>
+            <a:ext cx="7863840" cy="475488"/>
           </a:xfrm>
           <a:prstGeom prst="rect">
             <a:avLst/>
@@ -2041,7 +3095,7 @@
                 <a:ea typeface="JetBrains Mono" pitchFamily="34" charset="-122"/>
                 <a:cs typeface="JetBrains Mono" pitchFamily="34" charset="-120"/>
               </a:rPr>
-              <a:t>SELECT DISTINCT genre FROM ...;  -- sans doublons</a:t>
+              <a:t>SELECT DISTINCT genre FROM ...; — sans doublons</a:t>
             </a:r>
             <a:endParaRPr lang="en-US" sz="1000" dirty="0"/>
           </a:p>
@@ -2055,8 +3109,8 @@
         </p:nvSpPr>
         <p:spPr>
           <a:xfrm>
-            <a:off x="457200" y="2560320"/>
-            <a:ext cx="8229600" cy="521208"/>
+            <a:off x="457200" y="2377440"/>
+            <a:ext cx="8229600" cy="475488"/>
           </a:xfrm>
           <a:prstGeom prst="rect">
             <a:avLst/>
@@ -2065,13 +3119,6 @@
             <a:srgbClr val="E3F2FD"/>
           </a:solidFill>
           <a:ln/>
-          <a:effectLst>
-            <a:outerShdw sx="100000" sy="100000" kx="0" ky="0" algn="bl" rotWithShape="0" blurRad="50800" dist="25400" dir="8100000">
-              <a:srgbClr val="000000">
-                <a:alpha val="12000"/>
-              </a:srgbClr>
-            </a:outerShdw>
-          </a:effectLst>
         </p:spPr>
       </p:sp>
       <p:sp>
@@ -2082,8 +3129,8 @@
         </p:nvSpPr>
         <p:spPr>
           <a:xfrm>
-            <a:off x="457200" y="2560320"/>
-            <a:ext cx="45720" cy="521208"/>
+            <a:off x="457200" y="2377440"/>
+            <a:ext cx="45720" cy="475488"/>
           </a:xfrm>
           <a:prstGeom prst="rect">
             <a:avLst/>
@@ -2102,8 +3149,8 @@
         </p:nvSpPr>
         <p:spPr>
           <a:xfrm>
-            <a:off x="685800" y="2560320"/>
-            <a:ext cx="7818120" cy="521208"/>
+            <a:off x="640080" y="2377440"/>
+            <a:ext cx="7863840" cy="475488"/>
           </a:xfrm>
           <a:prstGeom prst="rect">
             <a:avLst/>
@@ -2127,7 +3174,7 @@
                 <a:ea typeface="JetBrains Mono" pitchFamily="34" charset="-122"/>
                 <a:cs typeface="JetBrains Mono" pitchFamily="34" charset="-120"/>
               </a:rPr>
-              <a:t>SELECT nom AS artiste_nom FROM ...;  -- alias de colonne</a:t>
+              <a:t>SELECT nom AS artiste_nom FROM ...; — alias</a:t>
             </a:r>
             <a:endParaRPr lang="en-US" sz="1000" dirty="0"/>
           </a:p>
@@ -2141,8 +3188,8 @@
         </p:nvSpPr>
         <p:spPr>
           <a:xfrm>
-            <a:off x="457200" y="3108960"/>
-            <a:ext cx="8229600" cy="521208"/>
+            <a:off x="457200" y="2880360"/>
+            <a:ext cx="8229600" cy="475488"/>
           </a:xfrm>
           <a:prstGeom prst="rect">
             <a:avLst/>
@@ -2151,13 +3198,6 @@
             <a:srgbClr val="FFFFFF"/>
           </a:solidFill>
           <a:ln/>
-          <a:effectLst>
-            <a:outerShdw sx="100000" sy="100000" kx="0" ky="0" algn="bl" rotWithShape="0" blurRad="50800" dist="25400" dir="8100000">
-              <a:srgbClr val="000000">
-                <a:alpha val="12000"/>
-              </a:srgbClr>
-            </a:outerShdw>
-          </a:effectLst>
         </p:spPr>
       </p:sp>
       <p:sp>
@@ -2168,8 +3208,8 @@
         </p:nvSpPr>
         <p:spPr>
           <a:xfrm>
-            <a:off x="457200" y="3108960"/>
-            <a:ext cx="45720" cy="521208"/>
+            <a:off x="457200" y="2880360"/>
+            <a:ext cx="45720" cy="475488"/>
           </a:xfrm>
           <a:prstGeom prst="rect">
             <a:avLst/>
@@ -2188,8 +3228,8 @@
         </p:nvSpPr>
         <p:spPr>
           <a:xfrm>
-            <a:off x="685800" y="3108960"/>
-            <a:ext cx="7818120" cy="521208"/>
+            <a:off x="640080" y="2880360"/>
+            <a:ext cx="7863840" cy="475488"/>
           </a:xfrm>
           <a:prstGeom prst="rect">
             <a:avLst/>
@@ -2227,8 +3267,8 @@
         </p:nvSpPr>
         <p:spPr>
           <a:xfrm>
-            <a:off x="457200" y="3657600"/>
-            <a:ext cx="8229600" cy="521208"/>
+            <a:off x="457200" y="3383280"/>
+            <a:ext cx="8229600" cy="475488"/>
           </a:xfrm>
           <a:prstGeom prst="rect">
             <a:avLst/>
@@ -2237,13 +3277,6 @@
             <a:srgbClr val="E3F2FD"/>
           </a:solidFill>
           <a:ln/>
-          <a:effectLst>
-            <a:outerShdw sx="100000" sy="100000" kx="0" ky="0" algn="bl" rotWithShape="0" blurRad="50800" dist="25400" dir="8100000">
-              <a:srgbClr val="000000">
-                <a:alpha val="12000"/>
-              </a:srgbClr>
-            </a:outerShdw>
-          </a:effectLst>
         </p:spPr>
       </p:sp>
       <p:sp>
@@ -2254,8 +3287,8 @@
         </p:nvSpPr>
         <p:spPr>
           <a:xfrm>
-            <a:off x="457200" y="3657600"/>
-            <a:ext cx="45720" cy="521208"/>
+            <a:off x="457200" y="3383280"/>
+            <a:ext cx="45720" cy="475488"/>
           </a:xfrm>
           <a:prstGeom prst="rect">
             <a:avLst/>
@@ -2274,8 +3307,8 @@
         </p:nvSpPr>
         <p:spPr>
           <a:xfrm>
-            <a:off x="685800" y="3657600"/>
-            <a:ext cx="7818120" cy="521208"/>
+            <a:off x="640080" y="3383280"/>
+            <a:ext cx="7863840" cy="475488"/>
           </a:xfrm>
           <a:prstGeom prst="rect">
             <a:avLst/>
@@ -2313,8 +3346,8 @@
         </p:nvSpPr>
         <p:spPr>
           <a:xfrm>
-            <a:off x="457200" y="4206240"/>
-            <a:ext cx="8229600" cy="521208"/>
+            <a:off x="457200" y="3886200"/>
+            <a:ext cx="8229600" cy="475488"/>
           </a:xfrm>
           <a:prstGeom prst="rect">
             <a:avLst/>
@@ -2323,13 +3356,6 @@
             <a:srgbClr val="FFFFFF"/>
           </a:solidFill>
           <a:ln/>
-          <a:effectLst>
-            <a:outerShdw sx="100000" sy="100000" kx="0" ky="0" algn="bl" rotWithShape="0" blurRad="50800" dist="25400" dir="8100000">
-              <a:srgbClr val="000000">
-                <a:alpha val="12000"/>
-              </a:srgbClr>
-            </a:outerShdw>
-          </a:effectLst>
         </p:spPr>
       </p:sp>
       <p:sp>
@@ -2340,8 +3366,8 @@
         </p:nvSpPr>
         <p:spPr>
           <a:xfrm>
-            <a:off x="457200" y="4206240"/>
-            <a:ext cx="45720" cy="521208"/>
+            <a:off x="457200" y="3886200"/>
+            <a:ext cx="45720" cy="475488"/>
           </a:xfrm>
           <a:prstGeom prst="rect">
             <a:avLst/>
@@ -2360,8 +3386,8 @@
         </p:nvSpPr>
         <p:spPr>
           <a:xfrm>
-            <a:off x="685800" y="4206240"/>
-            <a:ext cx="7818120" cy="521208"/>
+            <a:off x="640080" y="3886200"/>
+            <a:ext cx="7863840" cy="475488"/>
           </a:xfrm>
           <a:prstGeom prst="rect">
             <a:avLst/>
@@ -2377,7 +3403,7 @@
               <a:buNone/>
             </a:pPr>
             <a:r>
-              <a:rPr lang="en-US" sz="1200" dirty="0">
+              <a:rPr lang="en-US" sz="1100" dirty="0">
                 <a:solidFill>
                   <a:srgbClr val="1A1A2E"/>
                 </a:solidFill>
@@ -2385,9 +3411,9 @@
                 <a:ea typeface="Calibri" pitchFamily="34" charset="-122"/>
                 <a:cs typeface="Calibri" pitchFamily="34" charset="-120"/>
               </a:rPr>
-              <a:t>Les alias ne modifient PAS la table, juste l'affichage</a:t>
-            </a:r>
-            <a:endParaRPr lang="en-US" sz="1200" dirty="0"/>
+              <a:t>Regles : SELECT avant FROM, point-virgule obligatoire</a:t>
+            </a:r>
+            <a:endParaRPr lang="en-US" sz="1100" dirty="0"/>
           </a:p>
         </p:txBody>
       </p:sp>
@@ -2452,7 +3478,7 @@
         <p:spPr>
           <a:xfrm>
             <a:off x="457200" y="182880"/>
-            <a:ext cx="8229600" cy="594360"/>
+            <a:ext cx="8229600" cy="548640"/>
           </a:xfrm>
           <a:prstGeom prst="rect">
             <a:avLst/>
@@ -2468,7 +3494,7 @@
               <a:buNone/>
             </a:pPr>
             <a:r>
-              <a:rPr lang="en-US" sz="2400" b="1" dirty="0">
+              <a:rPr lang="en-US" sz="2200" b="1" dirty="0">
                 <a:solidFill>
                   <a:srgbClr val="0D47A1"/>
                 </a:solidFill>
@@ -2476,9 +3502,9 @@
                 <a:ea typeface="Trebuchet MS" pitchFamily="34" charset="-122"/>
                 <a:cs typeface="Trebuchet MS" pitchFamily="34" charset="-120"/>
               </a:rPr>
-              <a:t>WHERE : filtrer les résultats</a:t>
-            </a:r>
-            <a:endParaRPr lang="en-US" sz="2400" dirty="0"/>
+              <a:t>WHERE : tous les operateurs</a:t>
+            </a:r>
+            <a:endParaRPr lang="en-US" sz="2200" dirty="0"/>
           </a:p>
         </p:txBody>
       </p:sp>
@@ -2490,7 +3516,7 @@
         </p:nvSpPr>
         <p:spPr>
           <a:xfrm>
-            <a:off x="457200" y="914400"/>
+            <a:off x="457200" y="868680"/>
             <a:ext cx="8229600" cy="464058"/>
           </a:xfrm>
           <a:prstGeom prst="rect">
@@ -2500,13 +3526,6 @@
             <a:srgbClr val="FFFFFF"/>
           </a:solidFill>
           <a:ln/>
-          <a:effectLst>
-            <a:outerShdw sx="100000" sy="100000" kx="0" ky="0" algn="bl" rotWithShape="0" blurRad="50800" dist="25400" dir="8100000">
-              <a:srgbClr val="000000">
-                <a:alpha val="12000"/>
-              </a:srgbClr>
-            </a:outerShdw>
-          </a:effectLst>
         </p:spPr>
       </p:sp>
       <p:sp>
@@ -2517,7 +3536,7 @@
         </p:nvSpPr>
         <p:spPr>
           <a:xfrm>
-            <a:off x="457200" y="914400"/>
+            <a:off x="457200" y="868680"/>
             <a:ext cx="45720" cy="464058"/>
           </a:xfrm>
           <a:prstGeom prst="rect">
@@ -2537,8 +3556,8 @@
         </p:nvSpPr>
         <p:spPr>
           <a:xfrm>
-            <a:off x="685800" y="914400"/>
-            <a:ext cx="7818120" cy="464058"/>
+            <a:off x="640080" y="868680"/>
+            <a:ext cx="7863840" cy="464058"/>
           </a:xfrm>
           <a:prstGeom prst="rect">
             <a:avLst/>
@@ -2554,7 +3573,7 @@
               <a:buNone/>
             </a:pPr>
             <a:r>
-              <a:rPr lang="en-US" sz="1200" dirty="0">
+              <a:rPr lang="en-US" sz="1100" dirty="0">
                 <a:solidFill>
                   <a:srgbClr val="1A1A2E"/>
                 </a:solidFill>
@@ -2564,7 +3583,7 @@
               </a:rPr>
               <a:t>= , &lt;&gt; (ou !=) , &gt; , &lt; , &gt;= , &lt;=</a:t>
             </a:r>
-            <a:endParaRPr lang="en-US" sz="1200" dirty="0"/>
+            <a:endParaRPr lang="en-US" sz="1100" dirty="0"/>
           </a:p>
         </p:txBody>
       </p:sp>
@@ -2576,7 +3595,7 @@
         </p:nvSpPr>
         <p:spPr>
           <a:xfrm>
-            <a:off x="457200" y="1405890"/>
+            <a:off x="457200" y="1360170"/>
             <a:ext cx="8229600" cy="464058"/>
           </a:xfrm>
           <a:prstGeom prst="rect">
@@ -2586,13 +3605,6 @@
             <a:srgbClr val="E3F2FD"/>
           </a:solidFill>
           <a:ln/>
-          <a:effectLst>
-            <a:outerShdw sx="100000" sy="100000" kx="0" ky="0" algn="bl" rotWithShape="0" blurRad="50800" dist="25400" dir="8100000">
-              <a:srgbClr val="000000">
-                <a:alpha val="12000"/>
-              </a:srgbClr>
-            </a:outerShdw>
-          </a:effectLst>
         </p:spPr>
       </p:sp>
       <p:sp>
@@ -2603,7 +3615,7 @@
         </p:nvSpPr>
         <p:spPr>
           <a:xfrm>
-            <a:off x="457200" y="1405890"/>
+            <a:off x="457200" y="1360170"/>
             <a:ext cx="45720" cy="464058"/>
           </a:xfrm>
           <a:prstGeom prst="rect">
@@ -2623,8 +3635,8 @@
         </p:nvSpPr>
         <p:spPr>
           <a:xfrm>
-            <a:off x="685800" y="1405890"/>
-            <a:ext cx="7818120" cy="464058"/>
+            <a:off x="640080" y="1360170"/>
+            <a:ext cx="7863840" cy="464058"/>
           </a:xfrm>
           <a:prstGeom prst="rect">
             <a:avLst/>
@@ -2648,7 +3660,7 @@
                 <a:ea typeface="JetBrains Mono" pitchFamily="34" charset="-122"/>
                 <a:cs typeface="JetBrains Mono" pitchFamily="34" charset="-120"/>
               </a:rPr>
-              <a:t>WHERE prix BETWEEN 20 AND 30  -- inclusif (≥20 ET ≤30)</a:t>
+              <a:t>WHERE prix BETWEEN 20 AND 30 — inclusif</a:t>
             </a:r>
             <a:endParaRPr lang="en-US" sz="1000" dirty="0"/>
           </a:p>
@@ -2662,7 +3674,7 @@
         </p:nvSpPr>
         <p:spPr>
           <a:xfrm>
-            <a:off x="457200" y="1897380"/>
+            <a:off x="457200" y="1851660"/>
             <a:ext cx="8229600" cy="464058"/>
           </a:xfrm>
           <a:prstGeom prst="rect">
@@ -2672,13 +3684,6 @@
             <a:srgbClr val="FFFFFF"/>
           </a:solidFill>
           <a:ln/>
-          <a:effectLst>
-            <a:outerShdw sx="100000" sy="100000" kx="0" ky="0" algn="bl" rotWithShape="0" blurRad="50800" dist="25400" dir="8100000">
-              <a:srgbClr val="000000">
-                <a:alpha val="12000"/>
-              </a:srgbClr>
-            </a:outerShdw>
-          </a:effectLst>
         </p:spPr>
       </p:sp>
       <p:sp>
@@ -2689,7 +3694,7 @@
         </p:nvSpPr>
         <p:spPr>
           <a:xfrm>
-            <a:off x="457200" y="1897380"/>
+            <a:off x="457200" y="1851660"/>
             <a:ext cx="45720" cy="464058"/>
           </a:xfrm>
           <a:prstGeom prst="rect">
@@ -2709,8 +3714,8 @@
         </p:nvSpPr>
         <p:spPr>
           <a:xfrm>
-            <a:off x="685800" y="1897380"/>
-            <a:ext cx="7818120" cy="464058"/>
+            <a:off x="640080" y="1851660"/>
+            <a:ext cx="7863840" cy="464058"/>
           </a:xfrm>
           <a:prstGeom prst="rect">
             <a:avLst/>
@@ -2734,7 +3739,7 @@
                 <a:ea typeface="JetBrains Mono" pitchFamily="34" charset="-122"/>
                 <a:cs typeface="JetBrains Mono" pitchFamily="34" charset="-120"/>
               </a:rPr>
-              <a:t>WHERE nom IN ('Léman', 'Dubois', 'Müller')  -- liste de valeurs</a:t>
+              <a:t>WHERE nom IN ('Leman', 'Dubois', 'Muller') — liste</a:t>
             </a:r>
             <a:endParaRPr lang="en-US" sz="1000" dirty="0"/>
           </a:p>
@@ -2748,7 +3753,7 @@
         </p:nvSpPr>
         <p:spPr>
           <a:xfrm>
-            <a:off x="457200" y="2388870"/>
+            <a:off x="457200" y="2343150"/>
             <a:ext cx="8229600" cy="464058"/>
           </a:xfrm>
           <a:prstGeom prst="rect">
@@ -2758,13 +3763,6 @@
             <a:srgbClr val="E3F2FD"/>
           </a:solidFill>
           <a:ln/>
-          <a:effectLst>
-            <a:outerShdw sx="100000" sy="100000" kx="0" ky="0" algn="bl" rotWithShape="0" blurRad="50800" dist="25400" dir="8100000">
-              <a:srgbClr val="000000">
-                <a:alpha val="12000"/>
-              </a:srgbClr>
-            </a:outerShdw>
-          </a:effectLst>
         </p:spPr>
       </p:sp>
       <p:sp>
@@ -2775,7 +3773,7 @@
         </p:nvSpPr>
         <p:spPr>
           <a:xfrm>
-            <a:off x="457200" y="2388870"/>
+            <a:off x="457200" y="2343150"/>
             <a:ext cx="45720" cy="464058"/>
           </a:xfrm>
           <a:prstGeom prst="rect">
@@ -2795,8 +3793,8 @@
         </p:nvSpPr>
         <p:spPr>
           <a:xfrm>
-            <a:off x="685800" y="2388870"/>
-            <a:ext cx="7818120" cy="464058"/>
+            <a:off x="640080" y="2343150"/>
+            <a:ext cx="7863840" cy="464058"/>
           </a:xfrm>
           <a:prstGeom prst="rect">
             <a:avLst/>
@@ -2820,7 +3818,7 @@
                 <a:ea typeface="JetBrains Mono" pitchFamily="34" charset="-122"/>
                 <a:cs typeface="JetBrains Mono" pitchFamily="34" charset="-120"/>
               </a:rPr>
-              <a:t>WHERE nom LIKE 'A%'  -- commence par A</a:t>
+              <a:t>WHERE nom LIKE 'A%' — commence par A</a:t>
             </a:r>
             <a:endParaRPr lang="en-US" sz="1000" dirty="0"/>
           </a:p>
@@ -2834,7 +3832,7 @@
         </p:nvSpPr>
         <p:spPr>
           <a:xfrm>
-            <a:off x="457200" y="2880360"/>
+            <a:off x="457200" y="2834640"/>
             <a:ext cx="8229600" cy="464058"/>
           </a:xfrm>
           <a:prstGeom prst="rect">
@@ -2844,13 +3842,6 @@
             <a:srgbClr val="FFFFFF"/>
           </a:solidFill>
           <a:ln/>
-          <a:effectLst>
-            <a:outerShdw sx="100000" sy="100000" kx="0" ky="0" algn="bl" rotWithShape="0" blurRad="50800" dist="25400" dir="8100000">
-              <a:srgbClr val="000000">
-                <a:alpha val="12000"/>
-              </a:srgbClr>
-            </a:outerShdw>
-          </a:effectLst>
         </p:spPr>
       </p:sp>
       <p:sp>
@@ -2861,7 +3852,7 @@
         </p:nvSpPr>
         <p:spPr>
           <a:xfrm>
-            <a:off x="457200" y="2880360"/>
+            <a:off x="457200" y="2834640"/>
             <a:ext cx="45720" cy="464058"/>
           </a:xfrm>
           <a:prstGeom prst="rect">
@@ -2881,8 +3872,8 @@
         </p:nvSpPr>
         <p:spPr>
           <a:xfrm>
-            <a:off x="685800" y="2880360"/>
-            <a:ext cx="7818120" cy="464058"/>
+            <a:off x="640080" y="2834640"/>
+            <a:ext cx="7863840" cy="464058"/>
           </a:xfrm>
           <a:prstGeom prst="rect">
             <a:avLst/>
@@ -2906,7 +3897,7 @@
                 <a:ea typeface="JetBrains Mono" pitchFamily="34" charset="-122"/>
                 <a:cs typeface="JetBrains Mono" pitchFamily="34" charset="-120"/>
               </a:rPr>
-              <a:t>WHERE nom LIKE '%son'  -- finit par 'son'</a:t>
+              <a:t>WHERE nom LIKE '%son' — finit par 'son'</a:t>
             </a:r>
             <a:endParaRPr lang="en-US" sz="1000" dirty="0"/>
           </a:p>
@@ -2920,7 +3911,7 @@
         </p:nvSpPr>
         <p:spPr>
           <a:xfrm>
-            <a:off x="457200" y="3371850"/>
+            <a:off x="457200" y="3326130"/>
             <a:ext cx="8229600" cy="464058"/>
           </a:xfrm>
           <a:prstGeom prst="rect">
@@ -2930,13 +3921,6 @@
             <a:srgbClr val="E3F2FD"/>
           </a:solidFill>
           <a:ln/>
-          <a:effectLst>
-            <a:outerShdw sx="100000" sy="100000" kx="0" ky="0" algn="bl" rotWithShape="0" blurRad="50800" dist="25400" dir="8100000">
-              <a:srgbClr val="000000">
-                <a:alpha val="12000"/>
-              </a:srgbClr>
-            </a:outerShdw>
-          </a:effectLst>
         </p:spPr>
       </p:sp>
       <p:sp>
@@ -2947,7 +3931,7 @@
         </p:nvSpPr>
         <p:spPr>
           <a:xfrm>
-            <a:off x="457200" y="3371850"/>
+            <a:off x="457200" y="3326130"/>
             <a:ext cx="45720" cy="464058"/>
           </a:xfrm>
           <a:prstGeom prst="rect">
@@ -2967,8 +3951,8 @@
         </p:nvSpPr>
         <p:spPr>
           <a:xfrm>
-            <a:off x="685800" y="3371850"/>
-            <a:ext cx="7818120" cy="464058"/>
+            <a:off x="640080" y="3326130"/>
+            <a:ext cx="7863840" cy="464058"/>
           </a:xfrm>
           <a:prstGeom prst="rect">
             <a:avLst/>
@@ -2992,7 +3976,7 @@
                 <a:ea typeface="JetBrains Mono" pitchFamily="34" charset="-122"/>
                 <a:cs typeface="JetBrains Mono" pitchFamily="34" charset="-120"/>
               </a:rPr>
-              <a:t>WHERE nom LIKE '%ali%'  -- contient 'ali'</a:t>
+              <a:t>WHERE nom LIKE '%ali%' — contient 'ali'</a:t>
             </a:r>
             <a:endParaRPr lang="en-US" sz="1000" dirty="0"/>
           </a:p>
@@ -3006,7 +3990,7 @@
         </p:nvSpPr>
         <p:spPr>
           <a:xfrm>
-            <a:off x="457200" y="3863340"/>
+            <a:off x="457200" y="3817620"/>
             <a:ext cx="8229600" cy="464058"/>
           </a:xfrm>
           <a:prstGeom prst="rect">
@@ -3016,13 +4000,6 @@
             <a:srgbClr val="FFFFFF"/>
           </a:solidFill>
           <a:ln/>
-          <a:effectLst>
-            <a:outerShdw sx="100000" sy="100000" kx="0" ky="0" algn="bl" rotWithShape="0" blurRad="50800" dist="25400" dir="8100000">
-              <a:srgbClr val="000000">
-                <a:alpha val="12000"/>
-              </a:srgbClr>
-            </a:outerShdw>
-          </a:effectLst>
         </p:spPr>
       </p:sp>
       <p:sp>
@@ -3033,7 +4010,7 @@
         </p:nvSpPr>
         <p:spPr>
           <a:xfrm>
-            <a:off x="457200" y="3863340"/>
+            <a:off x="457200" y="3817620"/>
             <a:ext cx="45720" cy="464058"/>
           </a:xfrm>
           <a:prstGeom prst="rect">
@@ -3053,8 +4030,8 @@
         </p:nvSpPr>
         <p:spPr>
           <a:xfrm>
-            <a:off x="685800" y="3863340"/>
-            <a:ext cx="7818120" cy="464058"/>
+            <a:off x="640080" y="3817620"/>
+            <a:ext cx="7863840" cy="464058"/>
           </a:xfrm>
           <a:prstGeom prst="rect">
             <a:avLst/>
@@ -3078,7 +4055,7 @@
                 <a:ea typeface="JetBrains Mono" pitchFamily="34" charset="-122"/>
                 <a:cs typeface="JetBrains Mono" pitchFamily="34" charset="-120"/>
               </a:rPr>
-              <a:t>WHERE prenom IS NULL  -- tester NULL (pas = NULL !)</a:t>
+              <a:t>WHERE prenom IS NULL — tester NULL (PAS = NULL !)</a:t>
             </a:r>
             <a:endParaRPr lang="en-US" sz="1000" dirty="0"/>
           </a:p>
@@ -3092,7 +4069,7 @@
         </p:nvSpPr>
         <p:spPr>
           <a:xfrm>
-            <a:off x="457200" y="4354830"/>
+            <a:off x="457200" y="4309110"/>
             <a:ext cx="8229600" cy="464058"/>
           </a:xfrm>
           <a:prstGeom prst="rect">
@@ -3102,13 +4079,6 @@
             <a:srgbClr val="E3F2FD"/>
           </a:solidFill>
           <a:ln/>
-          <a:effectLst>
-            <a:outerShdw sx="100000" sy="100000" kx="0" ky="0" algn="bl" rotWithShape="0" blurRad="50800" dist="25400" dir="8100000">
-              <a:srgbClr val="000000">
-                <a:alpha val="12000"/>
-              </a:srgbClr>
-            </a:outerShdw>
-          </a:effectLst>
         </p:spPr>
       </p:sp>
       <p:sp>
@@ -3119,7 +4089,7 @@
         </p:nvSpPr>
         <p:spPr>
           <a:xfrm>
-            <a:off x="457200" y="4354830"/>
+            <a:off x="457200" y="4309110"/>
             <a:ext cx="45720" cy="464058"/>
           </a:xfrm>
           <a:prstGeom prst="rect">
@@ -3139,8 +4109,8 @@
         </p:nvSpPr>
         <p:spPr>
           <a:xfrm>
-            <a:off x="685800" y="4354830"/>
-            <a:ext cx="7818120" cy="464058"/>
+            <a:off x="640080" y="4309110"/>
+            <a:ext cx="7863840" cy="464058"/>
           </a:xfrm>
           <a:prstGeom prst="rect">
             <a:avLst/>
@@ -3231,7 +4201,7 @@
         <p:spPr>
           <a:xfrm>
             <a:off x="457200" y="182880"/>
-            <a:ext cx="8229600" cy="594360"/>
+            <a:ext cx="8229600" cy="548640"/>
           </a:xfrm>
           <a:prstGeom prst="rect">
             <a:avLst/>
@@ -3247,7 +4217,7 @@
               <a:buNone/>
             </a:pPr>
             <a:r>
-              <a:rPr lang="en-US" sz="2400" b="1" dirty="0">
+              <a:rPr lang="en-US" sz="2200" b="1" dirty="0">
                 <a:solidFill>
                   <a:srgbClr val="0D47A1"/>
                 </a:solidFill>
@@ -3255,9 +4225,9 @@
                 <a:ea typeface="Trebuchet MS" pitchFamily="34" charset="-122"/>
                 <a:cs typeface="Trebuchet MS" pitchFamily="34" charset="-120"/>
               </a:rPr>
-              <a:t>ORDER BY et LIMIT</a:t>
-            </a:r>
-            <a:endParaRPr lang="en-US" sz="2400" dirty="0"/>
+              <a:t>ORDER BY et LIMIT — tri et pagination</a:t>
+            </a:r>
+            <a:endParaRPr lang="en-US" sz="2200" dirty="0"/>
           </a:p>
         </p:txBody>
       </p:sp>
@@ -3269,8 +4239,8 @@
         </p:nvSpPr>
         <p:spPr>
           <a:xfrm>
-            <a:off x="457200" y="914400"/>
-            <a:ext cx="8229600" cy="521208"/>
+            <a:off x="457200" y="868680"/>
+            <a:ext cx="8229600" cy="475488"/>
           </a:xfrm>
           <a:prstGeom prst="rect">
             <a:avLst/>
@@ -3279,13 +4249,6 @@
             <a:srgbClr val="FFFFFF"/>
           </a:solidFill>
           <a:ln/>
-          <a:effectLst>
-            <a:outerShdw sx="100000" sy="100000" kx="0" ky="0" algn="bl" rotWithShape="0" blurRad="50800" dist="25400" dir="8100000">
-              <a:srgbClr val="000000">
-                <a:alpha val="12000"/>
-              </a:srgbClr>
-            </a:outerShdw>
-          </a:effectLst>
         </p:spPr>
       </p:sp>
       <p:sp>
@@ -3296,8 +4259,8 @@
         </p:nvSpPr>
         <p:spPr>
           <a:xfrm>
-            <a:off x="457200" y="914400"/>
-            <a:ext cx="45720" cy="521208"/>
+            <a:off x="457200" y="868680"/>
+            <a:ext cx="45720" cy="475488"/>
           </a:xfrm>
           <a:prstGeom prst="rect">
             <a:avLst/>
@@ -3316,8 +4279,8 @@
         </p:nvSpPr>
         <p:spPr>
           <a:xfrm>
-            <a:off x="685800" y="914400"/>
-            <a:ext cx="7818120" cy="521208"/>
+            <a:off x="640080" y="868680"/>
+            <a:ext cx="7863840" cy="475488"/>
           </a:xfrm>
           <a:prstGeom prst="rect">
             <a:avLst/>
@@ -3341,7 +4304,7 @@
                 <a:ea typeface="JetBrains Mono" pitchFamily="34" charset="-122"/>
                 <a:cs typeface="JetBrains Mono" pitchFamily="34" charset="-120"/>
               </a:rPr>
-              <a:t>ORDER BY prix ASC;  -- croissant (par défaut)</a:t>
+              <a:t>ORDER BY prix ASC; — croissant (defaut)</a:t>
             </a:r>
             <a:endParaRPr lang="en-US" sz="1000" dirty="0"/>
           </a:p>
@@ -3355,8 +4318,8 @@
         </p:nvSpPr>
         <p:spPr>
           <a:xfrm>
-            <a:off x="457200" y="1463040"/>
-            <a:ext cx="8229600" cy="521208"/>
+            <a:off x="457200" y="1371600"/>
+            <a:ext cx="8229600" cy="475488"/>
           </a:xfrm>
           <a:prstGeom prst="rect">
             <a:avLst/>
@@ -3365,13 +4328,6 @@
             <a:srgbClr val="E3F2FD"/>
           </a:solidFill>
           <a:ln/>
-          <a:effectLst>
-            <a:outerShdw sx="100000" sy="100000" kx="0" ky="0" algn="bl" rotWithShape="0" blurRad="50800" dist="25400" dir="8100000">
-              <a:srgbClr val="000000">
-                <a:alpha val="12000"/>
-              </a:srgbClr>
-            </a:outerShdw>
-          </a:effectLst>
         </p:spPr>
       </p:sp>
       <p:sp>
@@ -3382,8 +4338,8 @@
         </p:nvSpPr>
         <p:spPr>
           <a:xfrm>
-            <a:off x="457200" y="1463040"/>
-            <a:ext cx="45720" cy="521208"/>
+            <a:off x="457200" y="1371600"/>
+            <a:ext cx="45720" cy="475488"/>
           </a:xfrm>
           <a:prstGeom prst="rect">
             <a:avLst/>
@@ -3402,8 +4358,8 @@
         </p:nvSpPr>
         <p:spPr>
           <a:xfrm>
-            <a:off x="685800" y="1463040"/>
-            <a:ext cx="7818120" cy="521208"/>
+            <a:off x="640080" y="1371600"/>
+            <a:ext cx="7863840" cy="475488"/>
           </a:xfrm>
           <a:prstGeom prst="rect">
             <a:avLst/>
@@ -3427,7 +4383,7 @@
                 <a:ea typeface="JetBrains Mono" pitchFamily="34" charset="-122"/>
                 <a:cs typeface="JetBrains Mono" pitchFamily="34" charset="-120"/>
               </a:rPr>
-              <a:t>ORDER BY prix DESC;  -- décroissant</a:t>
+              <a:t>ORDER BY prix DESC; — decroissant</a:t>
             </a:r>
             <a:endParaRPr lang="en-US" sz="1000" dirty="0"/>
           </a:p>
@@ -3441,8 +4397,8 @@
         </p:nvSpPr>
         <p:spPr>
           <a:xfrm>
-            <a:off x="457200" y="2011680"/>
-            <a:ext cx="8229600" cy="521208"/>
+            <a:off x="457200" y="1874520"/>
+            <a:ext cx="8229600" cy="475488"/>
           </a:xfrm>
           <a:prstGeom prst="rect">
             <a:avLst/>
@@ -3451,13 +4407,6 @@
             <a:srgbClr val="FFFFFF"/>
           </a:solidFill>
           <a:ln/>
-          <a:effectLst>
-            <a:outerShdw sx="100000" sy="100000" kx="0" ky="0" algn="bl" rotWithShape="0" blurRad="50800" dist="25400" dir="8100000">
-              <a:srgbClr val="000000">
-                <a:alpha val="12000"/>
-              </a:srgbClr>
-            </a:outerShdw>
-          </a:effectLst>
         </p:spPr>
       </p:sp>
       <p:sp>
@@ -3468,8 +4417,8 @@
         </p:nvSpPr>
         <p:spPr>
           <a:xfrm>
-            <a:off x="457200" y="2011680"/>
-            <a:ext cx="45720" cy="521208"/>
+            <a:off x="457200" y="1874520"/>
+            <a:ext cx="45720" cy="475488"/>
           </a:xfrm>
           <a:prstGeom prst="rect">
             <a:avLst/>
@@ -3488,8 +4437,8 @@
         </p:nvSpPr>
         <p:spPr>
           <a:xfrm>
-            <a:off x="685800" y="2011680"/>
-            <a:ext cx="7818120" cy="521208"/>
+            <a:off x="640080" y="1874520"/>
+            <a:ext cx="7863840" cy="475488"/>
           </a:xfrm>
           <a:prstGeom prst="rect">
             <a:avLst/>
@@ -3513,7 +4462,7 @@
                 <a:ea typeface="JetBrains Mono" pitchFamily="34" charset="-122"/>
                 <a:cs typeface="JetBrains Mono" pitchFamily="34" charset="-120"/>
               </a:rPr>
-              <a:t>ORDER BY nom ASC, prenom ASC;  -- tri multi-colonnes</a:t>
+              <a:t>ORDER BY nom ASC, prenom ASC; — multi-colonnes</a:t>
             </a:r>
             <a:endParaRPr lang="en-US" sz="1000" dirty="0"/>
           </a:p>
@@ -3527,8 +4476,8 @@
         </p:nvSpPr>
         <p:spPr>
           <a:xfrm>
-            <a:off x="457200" y="2560320"/>
-            <a:ext cx="8229600" cy="521208"/>
+            <a:off x="457200" y="2377440"/>
+            <a:ext cx="8229600" cy="475488"/>
           </a:xfrm>
           <a:prstGeom prst="rect">
             <a:avLst/>
@@ -3537,13 +4486,6 @@
             <a:srgbClr val="E3F2FD"/>
           </a:solidFill>
           <a:ln/>
-          <a:effectLst>
-            <a:outerShdw sx="100000" sy="100000" kx="0" ky="0" algn="bl" rotWithShape="0" blurRad="50800" dist="25400" dir="8100000">
-              <a:srgbClr val="000000">
-                <a:alpha val="12000"/>
-              </a:srgbClr>
-            </a:outerShdw>
-          </a:effectLst>
         </p:spPr>
       </p:sp>
       <p:sp>
@@ -3554,8 +4496,8 @@
         </p:nvSpPr>
         <p:spPr>
           <a:xfrm>
-            <a:off x="457200" y="2560320"/>
-            <a:ext cx="45720" cy="521208"/>
+            <a:off x="457200" y="2377440"/>
+            <a:ext cx="45720" cy="475488"/>
           </a:xfrm>
           <a:prstGeom prst="rect">
             <a:avLst/>
@@ -3574,8 +4516,8 @@
         </p:nvSpPr>
         <p:spPr>
           <a:xfrm>
-            <a:off x="685800" y="2560320"/>
-            <a:ext cx="7818120" cy="521208"/>
+            <a:off x="640080" y="2377440"/>
+            <a:ext cx="7863840" cy="475488"/>
           </a:xfrm>
           <a:prstGeom prst="rect">
             <a:avLst/>
@@ -3599,7 +4541,7 @@
                 <a:ea typeface="JetBrains Mono" pitchFamily="34" charset="-122"/>
                 <a:cs typeface="JetBrains Mono" pitchFamily="34" charset="-120"/>
               </a:rPr>
-              <a:t>LIMIT 5;  -- les 5 premières lignes</a:t>
+              <a:t>LIMIT 5; — 5 premieres lignes</a:t>
             </a:r>
             <a:endParaRPr lang="en-US" sz="1000" dirty="0"/>
           </a:p>
@@ -3613,8 +4555,8 @@
         </p:nvSpPr>
         <p:spPr>
           <a:xfrm>
-            <a:off x="457200" y="3108960"/>
-            <a:ext cx="8229600" cy="521208"/>
+            <a:off x="457200" y="2880360"/>
+            <a:ext cx="8229600" cy="475488"/>
           </a:xfrm>
           <a:prstGeom prst="rect">
             <a:avLst/>
@@ -3623,13 +4565,6 @@
             <a:srgbClr val="FFFFFF"/>
           </a:solidFill>
           <a:ln/>
-          <a:effectLst>
-            <a:outerShdw sx="100000" sy="100000" kx="0" ky="0" algn="bl" rotWithShape="0" blurRad="50800" dist="25400" dir="8100000">
-              <a:srgbClr val="000000">
-                <a:alpha val="12000"/>
-              </a:srgbClr>
-            </a:outerShdw>
-          </a:effectLst>
         </p:spPr>
       </p:sp>
       <p:sp>
@@ -3640,8 +4575,8 @@
         </p:nvSpPr>
         <p:spPr>
           <a:xfrm>
-            <a:off x="457200" y="3108960"/>
-            <a:ext cx="45720" cy="521208"/>
+            <a:off x="457200" y="2880360"/>
+            <a:ext cx="45720" cy="475488"/>
           </a:xfrm>
           <a:prstGeom prst="rect">
             <a:avLst/>
@@ -3660,8 +4595,8 @@
         </p:nvSpPr>
         <p:spPr>
           <a:xfrm>
-            <a:off x="685800" y="3108960"/>
-            <a:ext cx="7818120" cy="521208"/>
+            <a:off x="640080" y="2880360"/>
+            <a:ext cx="7863840" cy="475488"/>
           </a:xfrm>
           <a:prstGeom prst="rect">
             <a:avLst/>
@@ -3685,7 +4620,7 @@
                 <a:ea typeface="JetBrains Mono" pitchFamily="34" charset="-122"/>
                 <a:cs typeface="JetBrains Mono" pitchFamily="34" charset="-120"/>
               </a:rPr>
-              <a:t>LIMIT 5 OFFSET 10;  -- 5 lignes à partir de la 11ème (pagination)</a:t>
+              <a:t>LIMIT 5 OFFSET 10; — pagination (lignes 11-15)</a:t>
             </a:r>
             <a:endParaRPr lang="en-US" sz="1000" dirty="0"/>
           </a:p>
@@ -3699,8 +4634,8 @@
         </p:nvSpPr>
         <p:spPr>
           <a:xfrm>
-            <a:off x="457200" y="3657600"/>
-            <a:ext cx="8229600" cy="521208"/>
+            <a:off x="457200" y="3383280"/>
+            <a:ext cx="8229600" cy="475488"/>
           </a:xfrm>
           <a:prstGeom prst="rect">
             <a:avLst/>
@@ -3709,13 +4644,6 @@
             <a:srgbClr val="E3F2FD"/>
           </a:solidFill>
           <a:ln/>
-          <a:effectLst>
-            <a:outerShdw sx="100000" sy="100000" kx="0" ky="0" algn="bl" rotWithShape="0" blurRad="50800" dist="25400" dir="8100000">
-              <a:srgbClr val="000000">
-                <a:alpha val="12000"/>
-              </a:srgbClr>
-            </a:outerShdw>
-          </a:effectLst>
         </p:spPr>
       </p:sp>
       <p:sp>
@@ -3726,8 +4654,8 @@
         </p:nvSpPr>
         <p:spPr>
           <a:xfrm>
-            <a:off x="457200" y="3657600"/>
-            <a:ext cx="45720" cy="521208"/>
+            <a:off x="457200" y="3383280"/>
+            <a:ext cx="45720" cy="475488"/>
           </a:xfrm>
           <a:prstGeom prst="rect">
             <a:avLst/>
@@ -3746,8 +4674,8 @@
         </p:nvSpPr>
         <p:spPr>
           <a:xfrm>
-            <a:off x="685800" y="3657600"/>
-            <a:ext cx="7818120" cy="521208"/>
+            <a:off x="640080" y="3383280"/>
+            <a:ext cx="7863840" cy="475488"/>
           </a:xfrm>
           <a:prstGeom prst="rect">
             <a:avLst/>
@@ -3763,7 +4691,7 @@
               <a:buNone/>
             </a:pPr>
             <a:r>
-              <a:rPr lang="en-US" sz="1200" dirty="0">
+              <a:rPr lang="en-US" sz="1100" dirty="0">
                 <a:solidFill>
                   <a:srgbClr val="1A1A2E"/>
                 </a:solidFill>
@@ -3771,9 +4699,9 @@
                 <a:ea typeface="Calibri" pitchFamily="34" charset="-122"/>
                 <a:cs typeface="Calibri" pitchFamily="34" charset="-120"/>
               </a:rPr>
-              <a:t>Combinaison : ORDER BY prix DESC LIMIT 3;  -- top 3 plus chers</a:t>
-            </a:r>
-            <a:endParaRPr lang="en-US" sz="1200" dirty="0"/>
+              <a:t>Combinaison : ORDER BY prix DESC LIMIT 3; — top 3</a:t>
+            </a:r>
+            <a:endParaRPr lang="en-US" sz="1100" dirty="0"/>
           </a:p>
         </p:txBody>
       </p:sp>
@@ -3785,8 +4713,8 @@
         </p:nvSpPr>
         <p:spPr>
           <a:xfrm>
-            <a:off x="457200" y="4206240"/>
-            <a:ext cx="8229600" cy="521208"/>
+            <a:off x="457200" y="3886200"/>
+            <a:ext cx="8229600" cy="475488"/>
           </a:xfrm>
           <a:prstGeom prst="rect">
             <a:avLst/>
@@ -3795,13 +4723,6 @@
             <a:srgbClr val="FFFFFF"/>
           </a:solidFill>
           <a:ln/>
-          <a:effectLst>
-            <a:outerShdw sx="100000" sy="100000" kx="0" ky="0" algn="bl" rotWithShape="0" blurRad="50800" dist="25400" dir="8100000">
-              <a:srgbClr val="000000">
-                <a:alpha val="12000"/>
-              </a:srgbClr>
-            </a:outerShdw>
-          </a:effectLst>
         </p:spPr>
       </p:sp>
       <p:sp>
@@ -3812,8 +4733,8 @@
         </p:nvSpPr>
         <p:spPr>
           <a:xfrm>
-            <a:off x="457200" y="4206240"/>
-            <a:ext cx="45720" cy="521208"/>
+            <a:off x="457200" y="3886200"/>
+            <a:ext cx="45720" cy="475488"/>
           </a:xfrm>
           <a:prstGeom prst="rect">
             <a:avLst/>
@@ -3832,8 +4753,8 @@
         </p:nvSpPr>
         <p:spPr>
           <a:xfrm>
-            <a:off x="685800" y="4206240"/>
-            <a:ext cx="7818120" cy="521208"/>
+            <a:off x="640080" y="3886200"/>
+            <a:ext cx="7863840" cy="475488"/>
           </a:xfrm>
           <a:prstGeom prst="rect">
             <a:avLst/>
@@ -3849,7 +4770,7 @@
               <a:buNone/>
             </a:pPr>
             <a:r>
-              <a:rPr lang="en-US" sz="1200" dirty="0">
+              <a:rPr lang="en-US" sz="1100" dirty="0">
                 <a:solidFill>
                   <a:srgbClr val="1A1A2E"/>
                 </a:solidFill>
@@ -3857,9 +4778,9 @@
                 <a:ea typeface="Calibri" pitchFamily="34" charset="-122"/>
                 <a:cs typeface="Calibri" pitchFamily="34" charset="-120"/>
               </a:rPr>
-              <a:t>Utile pour : pagination web, classements, top N</a:t>
-            </a:r>
-            <a:endParaRPr lang="en-US" sz="1200" dirty="0"/>
+              <a:t>Utile : pagination web, classements, top N</a:t>
+            </a:r>
+            <a:endParaRPr lang="en-US" sz="1100" dirty="0"/>
           </a:p>
         </p:txBody>
       </p:sp>
@@ -3924,7 +4845,7 @@
         <p:spPr>
           <a:xfrm>
             <a:off x="457200" y="182880"/>
-            <a:ext cx="8229600" cy="594360"/>
+            <a:ext cx="8229600" cy="548640"/>
           </a:xfrm>
           <a:prstGeom prst="rect">
             <a:avLst/>
@@ -3940,7 +4861,7 @@
               <a:buNone/>
             </a:pPr>
             <a:r>
-              <a:rPr lang="en-US" sz="2400" b="1" dirty="0">
+              <a:rPr lang="en-US" sz="2200" b="1" dirty="0">
                 <a:solidFill>
                   <a:srgbClr val="0D47A1"/>
                 </a:solidFill>
@@ -3948,9 +4869,9 @@
                 <a:ea typeface="Trebuchet MS" pitchFamily="34" charset="-122"/>
                 <a:cs typeface="Trebuchet MS" pitchFamily="34" charset="-120"/>
               </a:rPr>
-              <a:t>20 requêtes progressives SwissSound</a:t>
-            </a:r>
-            <a:endParaRPr lang="en-US" sz="2400" dirty="0"/>
+              <a:t>AND, OR, NOT — conditions complexes</a:t>
+            </a:r>
+            <a:endParaRPr lang="en-US" sz="2200" dirty="0"/>
           </a:p>
         </p:txBody>
       </p:sp>
@@ -3962,8 +4883,8 @@
         </p:nvSpPr>
         <p:spPr>
           <a:xfrm>
-            <a:off x="457200" y="914400"/>
-            <a:ext cx="8229600" cy="521208"/>
+            <a:off x="457200" y="868680"/>
+            <a:ext cx="8229600" cy="475488"/>
           </a:xfrm>
           <a:prstGeom prst="rect">
             <a:avLst/>
@@ -3972,13 +4893,6 @@
             <a:srgbClr val="FFFFFF"/>
           </a:solidFill>
           <a:ln/>
-          <a:effectLst>
-            <a:outerShdw sx="100000" sy="100000" kx="0" ky="0" algn="bl" rotWithShape="0" blurRad="50800" dist="25400" dir="8100000">
-              <a:srgbClr val="000000">
-                <a:alpha val="12000"/>
-              </a:srgbClr>
-            </a:outerShdw>
-          </a:effectLst>
         </p:spPr>
       </p:sp>
       <p:sp>
@@ -3989,8 +4903,8 @@
         </p:nvSpPr>
         <p:spPr>
           <a:xfrm>
-            <a:off x="457200" y="914400"/>
-            <a:ext cx="45720" cy="521208"/>
+            <a:off x="457200" y="868680"/>
+            <a:ext cx="45720" cy="475488"/>
           </a:xfrm>
           <a:prstGeom prst="rect">
             <a:avLst/>
@@ -4009,8 +4923,8 @@
         </p:nvSpPr>
         <p:spPr>
           <a:xfrm>
-            <a:off x="685800" y="914400"/>
-            <a:ext cx="7818120" cy="521208"/>
+            <a:off x="640080" y="868680"/>
+            <a:ext cx="7863840" cy="475488"/>
           </a:xfrm>
           <a:prstGeom prst="rect">
             <a:avLst/>
@@ -4026,7 +4940,7 @@
               <a:buNone/>
             </a:pPr>
             <a:r>
-              <a:rPr lang="en-US" sz="1200" dirty="0">
+              <a:rPr lang="en-US" sz="1100" dirty="0">
                 <a:solidFill>
                   <a:srgbClr val="1A1A2E"/>
                 </a:solidFill>
@@ -4034,9 +4948,9 @@
                 <a:ea typeface="Calibri" pitchFamily="34" charset="-122"/>
                 <a:cs typeface="Calibri" pitchFamily="34" charset="-120"/>
               </a:rPr>
-              <a:t>Niveau 1 : SELECT * FROM artiste WHERE actif = TRUE;</a:t>
-            </a:r>
-            <a:endParaRPr lang="en-US" sz="1200" dirty="0"/>
+              <a:t>AND : les DEUX conditions doivent etre vraies</a:t>
+            </a:r>
+            <a:endParaRPr lang="en-US" sz="1100" dirty="0"/>
           </a:p>
         </p:txBody>
       </p:sp>
@@ -4048,8 +4962,8 @@
         </p:nvSpPr>
         <p:spPr>
           <a:xfrm>
-            <a:off x="457200" y="1463040"/>
-            <a:ext cx="8229600" cy="521208"/>
+            <a:off x="457200" y="1371600"/>
+            <a:ext cx="8229600" cy="475488"/>
           </a:xfrm>
           <a:prstGeom prst="rect">
             <a:avLst/>
@@ -4058,13 +4972,6 @@
             <a:srgbClr val="E3F2FD"/>
           </a:solidFill>
           <a:ln/>
-          <a:effectLst>
-            <a:outerShdw sx="100000" sy="100000" kx="0" ky="0" algn="bl" rotWithShape="0" blurRad="50800" dist="25400" dir="8100000">
-              <a:srgbClr val="000000">
-                <a:alpha val="12000"/>
-              </a:srgbClr>
-            </a:outerShdw>
-          </a:effectLst>
         </p:spPr>
       </p:sp>
       <p:sp>
@@ -4075,8 +4982,8 @@
         </p:nvSpPr>
         <p:spPr>
           <a:xfrm>
-            <a:off x="457200" y="1463040"/>
-            <a:ext cx="45720" cy="521208"/>
+            <a:off x="457200" y="1371600"/>
+            <a:ext cx="45720" cy="475488"/>
           </a:xfrm>
           <a:prstGeom prst="rect">
             <a:avLst/>
@@ -4095,8 +5002,8 @@
         </p:nvSpPr>
         <p:spPr>
           <a:xfrm>
-            <a:off x="685800" y="1463040"/>
-            <a:ext cx="7818120" cy="521208"/>
+            <a:off x="640080" y="1371600"/>
+            <a:ext cx="7863840" cy="475488"/>
           </a:xfrm>
           <a:prstGeom prst="rect">
             <a:avLst/>
@@ -4112,7 +5019,7 @@
               <a:buNone/>
             </a:pPr>
             <a:r>
-              <a:rPr lang="en-US" sz="1200" dirty="0">
+              <a:rPr lang="en-US" sz="1100" dirty="0">
                 <a:solidFill>
                   <a:srgbClr val="1A1A2E"/>
                 </a:solidFill>
@@ -4120,9 +5027,9 @@
                 <a:ea typeface="Calibri" pitchFamily="34" charset="-122"/>
                 <a:cs typeface="Calibri" pitchFamily="34" charset="-120"/>
               </a:rPr>
-              <a:t>Niveau 2 : SELECT titre, prix FROM album WHERE prix &gt; 25 ORDER BY prix;</a:t>
-            </a:r>
-            <a:endParaRPr lang="en-US" sz="1200" dirty="0"/>
+              <a:t>OR : au MOINS une condition vraie</a:t>
+            </a:r>
+            <a:endParaRPr lang="en-US" sz="1100" dirty="0"/>
           </a:p>
         </p:txBody>
       </p:sp>
@@ -4134,8 +5041,8 @@
         </p:nvSpPr>
         <p:spPr>
           <a:xfrm>
-            <a:off x="457200" y="2011680"/>
-            <a:ext cx="8229600" cy="521208"/>
+            <a:off x="457200" y="1874520"/>
+            <a:ext cx="8229600" cy="475488"/>
           </a:xfrm>
           <a:prstGeom prst="rect">
             <a:avLst/>
@@ -4144,13 +5051,6 @@
             <a:srgbClr val="FFFFFF"/>
           </a:solidFill>
           <a:ln/>
-          <a:effectLst>
-            <a:outerShdw sx="100000" sy="100000" kx="0" ky="0" algn="bl" rotWithShape="0" blurRad="50800" dist="25400" dir="8100000">
-              <a:srgbClr val="000000">
-                <a:alpha val="12000"/>
-              </a:srgbClr>
-            </a:outerShdw>
-          </a:effectLst>
         </p:spPr>
       </p:sp>
       <p:sp>
@@ -4161,8 +5061,8 @@
         </p:nvSpPr>
         <p:spPr>
           <a:xfrm>
-            <a:off x="457200" y="2011680"/>
-            <a:ext cx="45720" cy="521208"/>
+            <a:off x="457200" y="1874520"/>
+            <a:ext cx="45720" cy="475488"/>
           </a:xfrm>
           <a:prstGeom prst="rect">
             <a:avLst/>
@@ -4181,8 +5081,8 @@
         </p:nvSpPr>
         <p:spPr>
           <a:xfrm>
-            <a:off x="685800" y="2011680"/>
-            <a:ext cx="7818120" cy="521208"/>
+            <a:off x="640080" y="1874520"/>
+            <a:ext cx="7863840" cy="475488"/>
           </a:xfrm>
           <a:prstGeom prst="rect">
             <a:avLst/>
@@ -4198,7 +5098,7 @@
               <a:buNone/>
             </a:pPr>
             <a:r>
-              <a:rPr lang="en-US" sz="1200" dirty="0">
+              <a:rPr lang="en-US" sz="1100" dirty="0">
                 <a:solidFill>
                   <a:srgbClr val="1A1A2E"/>
                 </a:solidFill>
@@ -4206,9 +5106,9 @@
                 <a:ea typeface="Calibri" pitchFamily="34" charset="-122"/>
                 <a:cs typeface="Calibri" pitchFamily="34" charset="-120"/>
               </a:rPr>
-              <a:t>Niveau 3 : SELECT * FROM artiste WHERE nom LIKE 'M%' AND actif = TRUE;</a:t>
-            </a:r>
-            <a:endParaRPr lang="en-US" sz="1200" dirty="0"/>
+              <a:t>NOT : inverse le resultat</a:t>
+            </a:r>
+            <a:endParaRPr lang="en-US" sz="1100" dirty="0"/>
           </a:p>
         </p:txBody>
       </p:sp>
@@ -4220,8 +5120,8 @@
         </p:nvSpPr>
         <p:spPr>
           <a:xfrm>
-            <a:off x="457200" y="2560320"/>
-            <a:ext cx="8229600" cy="521208"/>
+            <a:off x="457200" y="2377440"/>
+            <a:ext cx="8229600" cy="475488"/>
           </a:xfrm>
           <a:prstGeom prst="rect">
             <a:avLst/>
@@ -4230,13 +5130,6 @@
             <a:srgbClr val="E3F2FD"/>
           </a:solidFill>
           <a:ln/>
-          <a:effectLst>
-            <a:outerShdw sx="100000" sy="100000" kx="0" ky="0" algn="bl" rotWithShape="0" blurRad="50800" dist="25400" dir="8100000">
-              <a:srgbClr val="000000">
-                <a:alpha val="12000"/>
-              </a:srgbClr>
-            </a:outerShdw>
-          </a:effectLst>
         </p:spPr>
       </p:sp>
       <p:sp>
@@ -4247,8 +5140,8 @@
         </p:nvSpPr>
         <p:spPr>
           <a:xfrm>
-            <a:off x="457200" y="2560320"/>
-            <a:ext cx="45720" cy="521208"/>
+            <a:off x="457200" y="2377440"/>
+            <a:ext cx="45720" cy="475488"/>
           </a:xfrm>
           <a:prstGeom prst="rect">
             <a:avLst/>
@@ -4267,8 +5160,8 @@
         </p:nvSpPr>
         <p:spPr>
           <a:xfrm>
-            <a:off x="685800" y="2560320"/>
-            <a:ext cx="7818120" cy="521208"/>
+            <a:off x="640080" y="2377440"/>
+            <a:ext cx="7863840" cy="475488"/>
           </a:xfrm>
           <a:prstGeom prst="rect">
             <a:avLst/>
@@ -4284,7 +5177,7 @@
               <a:buNone/>
             </a:pPr>
             <a:r>
-              <a:rPr lang="en-US" sz="1200" dirty="0">
+              <a:rPr lang="en-US" sz="1100" dirty="0">
                 <a:solidFill>
                   <a:srgbClr val="1A1A2E"/>
                 </a:solidFill>
@@ -4292,9 +5185,9 @@
                 <a:ea typeface="Calibri" pitchFamily="34" charset="-122"/>
                 <a:cs typeface="Calibri" pitchFamily="34" charset="-120"/>
               </a:rPr>
-              <a:t>Niveau 4 : SELECT nom, email FROM artiste WHERE prenom IS NULL;</a:t>
-            </a:r>
-            <a:endParaRPr lang="en-US" sz="1200" dirty="0"/>
+              <a:t>ATTENTION : AND est prioritaire sur OR !</a:t>
+            </a:r>
+            <a:endParaRPr lang="en-US" sz="1100" dirty="0"/>
           </a:p>
         </p:txBody>
       </p:sp>
@@ -4306,8 +5199,8 @@
         </p:nvSpPr>
         <p:spPr>
           <a:xfrm>
-            <a:off x="457200" y="3108960"/>
-            <a:ext cx="8229600" cy="521208"/>
+            <a:off x="457200" y="2880360"/>
+            <a:ext cx="8229600" cy="475488"/>
           </a:xfrm>
           <a:prstGeom prst="rect">
             <a:avLst/>
@@ -4316,13 +5209,6 @@
             <a:srgbClr val="FFFFFF"/>
           </a:solidFill>
           <a:ln/>
-          <a:effectLst>
-            <a:outerShdw sx="100000" sy="100000" kx="0" ky="0" algn="bl" rotWithShape="0" blurRad="50800" dist="25400" dir="8100000">
-              <a:srgbClr val="000000">
-                <a:alpha val="12000"/>
-              </a:srgbClr>
-            </a:outerShdw>
-          </a:effectLst>
         </p:spPr>
       </p:sp>
       <p:sp>
@@ -4333,8 +5219,8 @@
         </p:nvSpPr>
         <p:spPr>
           <a:xfrm>
-            <a:off x="457200" y="3108960"/>
-            <a:ext cx="45720" cy="521208"/>
+            <a:off x="457200" y="2880360"/>
+            <a:ext cx="45720" cy="475488"/>
           </a:xfrm>
           <a:prstGeom prst="rect">
             <a:avLst/>
@@ -4353,8 +5239,8 @@
         </p:nvSpPr>
         <p:spPr>
           <a:xfrm>
-            <a:off x="685800" y="3108960"/>
-            <a:ext cx="7818120" cy="521208"/>
+            <a:off x="640080" y="2880360"/>
+            <a:ext cx="7863840" cy="475488"/>
           </a:xfrm>
           <a:prstGeom prst="rect">
             <a:avLst/>
@@ -4370,7 +5256,7 @@
               <a:buNone/>
             </a:pPr>
             <a:r>
-              <a:rPr lang="en-US" sz="1200" dirty="0">
+              <a:rPr lang="en-US" sz="1100" dirty="0">
                 <a:solidFill>
                   <a:srgbClr val="1A1A2E"/>
                 </a:solidFill>
@@ -4378,9 +5264,9 @@
                 <a:ea typeface="Calibri" pitchFamily="34" charset="-122"/>
                 <a:cs typeface="Calibri" pitchFamily="34" charset="-120"/>
               </a:rPr>
-              <a:t>Niveau 5 : SELECT titre, prix FROM album ORDER BY prix DESC LIMIT 5;</a:t>
-            </a:r>
-            <a:endParaRPr lang="en-US" sz="1200" dirty="0"/>
+              <a:t>Sans parentheses : A AND B OR C = (A AND B) OR C</a:t>
+            </a:r>
+            <a:endParaRPr lang="en-US" sz="1100" dirty="0"/>
           </a:p>
         </p:txBody>
       </p:sp>
@@ -4392,8 +5278,8 @@
         </p:nvSpPr>
         <p:spPr>
           <a:xfrm>
-            <a:off x="457200" y="3657600"/>
-            <a:ext cx="8229600" cy="521208"/>
+            <a:off x="457200" y="3383280"/>
+            <a:ext cx="8229600" cy="475488"/>
           </a:xfrm>
           <a:prstGeom prst="rect">
             <a:avLst/>
@@ -4402,13 +5288,6 @@
             <a:srgbClr val="E3F2FD"/>
           </a:solidFill>
           <a:ln/>
-          <a:effectLst>
-            <a:outerShdw sx="100000" sy="100000" kx="0" ky="0" algn="bl" rotWithShape="0" blurRad="50800" dist="25400" dir="8100000">
-              <a:srgbClr val="000000">
-                <a:alpha val="12000"/>
-              </a:srgbClr>
-            </a:outerShdw>
-          </a:effectLst>
         </p:spPr>
       </p:sp>
       <p:sp>
@@ -4419,8 +5298,8 @@
         </p:nvSpPr>
         <p:spPr>
           <a:xfrm>
-            <a:off x="457200" y="3657600"/>
-            <a:ext cx="45720" cy="521208"/>
+            <a:off x="457200" y="3383280"/>
+            <a:ext cx="45720" cy="475488"/>
           </a:xfrm>
           <a:prstGeom prst="rect">
             <a:avLst/>
@@ -4439,8 +5318,8 @@
         </p:nvSpPr>
         <p:spPr>
           <a:xfrm>
-            <a:off x="685800" y="3657600"/>
-            <a:ext cx="7818120" cy="521208"/>
+            <a:off x="640080" y="3383280"/>
+            <a:ext cx="7863840" cy="475488"/>
           </a:xfrm>
           <a:prstGeom prst="rect">
             <a:avLst/>
@@ -4456,7 +5335,7 @@
               <a:buNone/>
             </a:pPr>
             <a:r>
-              <a:rPr lang="en-US" sz="1200" dirty="0">
+              <a:rPr lang="en-US" sz="1100" dirty="0">
                 <a:solidFill>
                   <a:srgbClr val="1A1A2E"/>
                 </a:solidFill>
@@ -4464,9 +5343,9 @@
                 <a:ea typeface="Calibri" pitchFamily="34" charset="-122"/>
                 <a:cs typeface="Calibri" pitchFamily="34" charset="-120"/>
               </a:rPr>
-              <a:t>Niveau 6 : SELECT * FROM salle WHERE equipee_isolation = TRUE AND capacite &gt;= 5;</a:t>
-            </a:r>
-            <a:endParaRPr lang="en-US" sz="1200" dirty="0"/>
+              <a:t>Avec parentheses : A AND (B OR C) — sens different !</a:t>
+            </a:r>
+            <a:endParaRPr lang="en-US" sz="1100" dirty="0"/>
           </a:p>
         </p:txBody>
       </p:sp>
@@ -4478,8 +5357,8 @@
         </p:nvSpPr>
         <p:spPr>
           <a:xfrm>
-            <a:off x="457200" y="4206240"/>
-            <a:ext cx="8229600" cy="521208"/>
+            <a:off x="457200" y="3886200"/>
+            <a:ext cx="8229600" cy="475488"/>
           </a:xfrm>
           <a:prstGeom prst="rect">
             <a:avLst/>
@@ -4488,13 +5367,6 @@
             <a:srgbClr val="FFFFFF"/>
           </a:solidFill>
           <a:ln/>
-          <a:effectLst>
-            <a:outerShdw sx="100000" sy="100000" kx="0" ky="0" algn="bl" rotWithShape="0" blurRad="50800" dist="25400" dir="8100000">
-              <a:srgbClr val="000000">
-                <a:alpha val="12000"/>
-              </a:srgbClr>
-            </a:outerShdw>
-          </a:effectLst>
         </p:spPr>
       </p:sp>
       <p:sp>
@@ -4505,8 +5377,8 @@
         </p:nvSpPr>
         <p:spPr>
           <a:xfrm>
-            <a:off x="457200" y="4206240"/>
-            <a:ext cx="45720" cy="521208"/>
+            <a:off x="457200" y="3886200"/>
+            <a:ext cx="45720" cy="475488"/>
           </a:xfrm>
           <a:prstGeom prst="rect">
             <a:avLst/>
@@ -4525,8 +5397,8 @@
         </p:nvSpPr>
         <p:spPr>
           <a:xfrm>
-            <a:off x="685800" y="4206240"/>
-            <a:ext cx="7818120" cy="521208"/>
+            <a:off x="640080" y="3886200"/>
+            <a:ext cx="7863840" cy="475488"/>
           </a:xfrm>
           <a:prstGeom prst="rect">
             <a:avLst/>
@@ -4542,7 +5414,7 @@
               <a:buNone/>
             </a:pPr>
             <a:r>
-              <a:rPr lang="en-US" sz="1200" dirty="0">
+              <a:rPr lang="en-US" sz="1100" dirty="0">
                 <a:solidFill>
                   <a:srgbClr val="1A1A2E"/>
                 </a:solidFill>
@@ -4550,9 +5422,9 @@
                 <a:ea typeface="Calibri" pitchFamily="34" charset="-122"/>
                 <a:cs typeface="Calibri" pitchFamily="34" charset="-120"/>
               </a:rPr>
-              <a:t>Voir sql/02_queries.sql pour les 30 requêtes complètes</a:t>
-            </a:r>
-            <a:endParaRPr lang="en-US" sz="1200" dirty="0"/>
+              <a:t>Toujours mettre des PARENTHESES quand on melange AND et OR</a:t>
+            </a:r>
+            <a:endParaRPr lang="en-US" sz="1100" dirty="0"/>
           </a:p>
         </p:txBody>
       </p:sp>
@@ -4617,7 +5489,7 @@
         <p:spPr>
           <a:xfrm>
             <a:off x="457200" y="182880"/>
-            <a:ext cx="8229600" cy="594360"/>
+            <a:ext cx="8229600" cy="548640"/>
           </a:xfrm>
           <a:prstGeom prst="rect">
             <a:avLst/>
@@ -4633,7 +5505,7 @@
               <a:buNone/>
             </a:pPr>
             <a:r>
-              <a:rPr lang="en-US" sz="2400" b="1" dirty="0">
+              <a:rPr lang="en-US" sz="2200" b="1" dirty="0">
                 <a:solidFill>
                   <a:srgbClr val="0D47A1"/>
                 </a:solidFill>
@@ -4641,9 +5513,9 @@
                 <a:ea typeface="Trebuchet MS" pitchFamily="34" charset="-122"/>
                 <a:cs typeface="Trebuchet MS" pitchFamily="34" charset="-120"/>
               </a:rPr>
-              <a:t>Exercice Module 12</a:t>
-            </a:r>
-            <a:endParaRPr lang="en-US" sz="2400" dirty="0"/>
+              <a:t>BETWEEN, IN, LIKE — raccourcis puissants</a:t>
+            </a:r>
+            <a:endParaRPr lang="en-US" sz="2200" dirty="0"/>
           </a:p>
         </p:txBody>
       </p:sp>
@@ -4655,8 +5527,8 @@
         </p:nvSpPr>
         <p:spPr>
           <a:xfrm>
-            <a:off x="457200" y="914400"/>
-            <a:ext cx="8229600" cy="521208"/>
+            <a:off x="457200" y="868680"/>
+            <a:ext cx="8229600" cy="475488"/>
           </a:xfrm>
           <a:prstGeom prst="rect">
             <a:avLst/>
@@ -4665,13 +5537,6 @@
             <a:srgbClr val="FFFFFF"/>
           </a:solidFill>
           <a:ln/>
-          <a:effectLst>
-            <a:outerShdw sx="100000" sy="100000" kx="0" ky="0" algn="bl" rotWithShape="0" blurRad="50800" dist="25400" dir="8100000">
-              <a:srgbClr val="000000">
-                <a:alpha val="12000"/>
-              </a:srgbClr>
-            </a:outerShdw>
-          </a:effectLst>
         </p:spPr>
       </p:sp>
       <p:sp>
@@ -4682,8 +5547,8 @@
         </p:nvSpPr>
         <p:spPr>
           <a:xfrm>
-            <a:off x="457200" y="914400"/>
-            <a:ext cx="45720" cy="521208"/>
+            <a:off x="457200" y="868680"/>
+            <a:ext cx="45720" cy="475488"/>
           </a:xfrm>
           <a:prstGeom prst="rect">
             <a:avLst/>
@@ -4702,8 +5567,8 @@
         </p:nvSpPr>
         <p:spPr>
           <a:xfrm>
-            <a:off x="685800" y="914400"/>
-            <a:ext cx="7818120" cy="521208"/>
+            <a:off x="640080" y="868680"/>
+            <a:ext cx="7863840" cy="475488"/>
           </a:xfrm>
           <a:prstGeom prst="rect">
             <a:avLst/>
@@ -4719,7 +5584,7 @@
               <a:buNone/>
             </a:pPr>
             <a:r>
-              <a:rPr lang="en-US" sz="1200" dirty="0">
+              <a:rPr lang="en-US" sz="1100" dirty="0">
                 <a:solidFill>
                   <a:srgbClr val="1A1A2E"/>
                 </a:solidFill>
@@ -4727,9 +5592,9 @@
                 <a:ea typeface="Calibri" pitchFamily="34" charset="-122"/>
                 <a:cs typeface="Calibri" pitchFamily="34" charset="-120"/>
               </a:rPr>
-              <a:t>Écrire 10 requêtes SELECT avec des critères précis (voir feuille d'exercice)</a:t>
-            </a:r>
-            <a:endParaRPr lang="en-US" sz="1200" dirty="0"/>
+              <a:t>BETWEEN 20 AND 30 = &gt;= 20 AND &lt;= 30 (inclusif)</a:t>
+            </a:r>
+            <a:endParaRPr lang="en-US" sz="1100" dirty="0"/>
           </a:p>
         </p:txBody>
       </p:sp>
@@ -4741,8 +5606,8 @@
         </p:nvSpPr>
         <p:spPr>
           <a:xfrm>
-            <a:off x="457200" y="1463040"/>
-            <a:ext cx="8229600" cy="521208"/>
+            <a:off x="457200" y="1371600"/>
+            <a:ext cx="8229600" cy="475488"/>
           </a:xfrm>
           <a:prstGeom prst="rect">
             <a:avLst/>
@@ -4751,13 +5616,6 @@
             <a:srgbClr val="E3F2FD"/>
           </a:solidFill>
           <a:ln/>
-          <a:effectLst>
-            <a:outerShdw sx="100000" sy="100000" kx="0" ky="0" algn="bl" rotWithShape="0" blurRad="50800" dist="25400" dir="8100000">
-              <a:srgbClr val="000000">
-                <a:alpha val="12000"/>
-              </a:srgbClr>
-            </a:outerShdw>
-          </a:effectLst>
         </p:spPr>
       </p:sp>
       <p:sp>
@@ -4768,8 +5626,8 @@
         </p:nvSpPr>
         <p:spPr>
           <a:xfrm>
-            <a:off x="457200" y="1463040"/>
-            <a:ext cx="45720" cy="521208"/>
+            <a:off x="457200" y="1371600"/>
+            <a:ext cx="45720" cy="475488"/>
           </a:xfrm>
           <a:prstGeom prst="rect">
             <a:avLst/>
@@ -4788,8 +5646,8 @@
         </p:nvSpPr>
         <p:spPr>
           <a:xfrm>
-            <a:off x="685800" y="1463040"/>
-            <a:ext cx="7818120" cy="521208"/>
+            <a:off x="640080" y="1371600"/>
+            <a:ext cx="7863840" cy="475488"/>
           </a:xfrm>
           <a:prstGeom prst="rect">
             <a:avLst/>
@@ -4805,7 +5663,7 @@
               <a:buNone/>
             </a:pPr>
             <a:r>
-              <a:rPr lang="en-US" sz="1200" dirty="0">
+              <a:rPr lang="en-US" sz="1100" dirty="0">
                 <a:solidFill>
                   <a:srgbClr val="1A1A2E"/>
                 </a:solidFill>
@@ -4813,9 +5671,9 @@
                 <a:ea typeface="Calibri" pitchFamily="34" charset="-122"/>
                 <a:cs typeface="Calibri" pitchFamily="34" charset="-120"/>
               </a:rPr>
-              <a:t>Utiliser au moins : LIKE, IN, BETWEEN, IS NULL, ORDER BY, LIMIT</a:t>
-            </a:r>
-            <a:endParaRPr lang="en-US" sz="1200" dirty="0"/>
+              <a:t>IN ('a', 'b', 'c') = OR a OR b OR c (liste de valeurs)</a:t>
+            </a:r>
+            <a:endParaRPr lang="en-US" sz="1100" dirty="0"/>
           </a:p>
         </p:txBody>
       </p:sp>
@@ -4827,8 +5685,8 @@
         </p:nvSpPr>
         <p:spPr>
           <a:xfrm>
-            <a:off x="457200" y="2011680"/>
-            <a:ext cx="8229600" cy="521208"/>
+            <a:off x="457200" y="1874520"/>
+            <a:ext cx="8229600" cy="475488"/>
           </a:xfrm>
           <a:prstGeom prst="rect">
             <a:avLst/>
@@ -4837,13 +5695,6 @@
             <a:srgbClr val="FFFFFF"/>
           </a:solidFill>
           <a:ln/>
-          <a:effectLst>
-            <a:outerShdw sx="100000" sy="100000" kx="0" ky="0" algn="bl" rotWithShape="0" blurRad="50800" dist="25400" dir="8100000">
-              <a:srgbClr val="000000">
-                <a:alpha val="12000"/>
-              </a:srgbClr>
-            </a:outerShdw>
-          </a:effectLst>
         </p:spPr>
       </p:sp>
       <p:sp>
@@ -4854,8 +5705,8 @@
         </p:nvSpPr>
         <p:spPr>
           <a:xfrm>
-            <a:off x="457200" y="2011680"/>
-            <a:ext cx="45720" cy="521208"/>
+            <a:off x="457200" y="1874520"/>
+            <a:ext cx="45720" cy="475488"/>
           </a:xfrm>
           <a:prstGeom prst="rect">
             <a:avLst/>
@@ -4874,8 +5725,8 @@
         </p:nvSpPr>
         <p:spPr>
           <a:xfrm>
-            <a:off x="685800" y="2011680"/>
-            <a:ext cx="7818120" cy="521208"/>
+            <a:off x="640080" y="1874520"/>
+            <a:ext cx="7863840" cy="475488"/>
           </a:xfrm>
           <a:prstGeom prst="rect">
             <a:avLst/>
@@ -4891,7 +5742,7 @@
               <a:buNone/>
             </a:pPr>
             <a:r>
-              <a:rPr lang="en-US" sz="1200" dirty="0">
+              <a:rPr lang="en-US" sz="1100" dirty="0">
                 <a:solidFill>
                   <a:srgbClr val="1A1A2E"/>
                 </a:solidFill>
@@ -4899,9 +5750,9 @@
                 <a:ea typeface="Calibri" pitchFamily="34" charset="-122"/>
                 <a:cs typeface="Calibri" pitchFamily="34" charset="-120"/>
               </a:rPr>
-              <a:t>Combiner des conditions avec AND et OR</a:t>
-            </a:r>
-            <a:endParaRPr lang="en-US" sz="1200" dirty="0"/>
+              <a:t>NOT IN exclut les valeurs de la liste</a:t>
+            </a:r>
+            <a:endParaRPr lang="en-US" sz="1100" dirty="0"/>
           </a:p>
         </p:txBody>
       </p:sp>
@@ -4913,8 +5764,8 @@
         </p:nvSpPr>
         <p:spPr>
           <a:xfrm>
-            <a:off x="457200" y="2560320"/>
-            <a:ext cx="8229600" cy="521208"/>
+            <a:off x="457200" y="2377440"/>
+            <a:ext cx="8229600" cy="475488"/>
           </a:xfrm>
           <a:prstGeom prst="rect">
             <a:avLst/>
@@ -4923,13 +5774,6 @@
             <a:srgbClr val="E3F2FD"/>
           </a:solidFill>
           <a:ln/>
-          <a:effectLst>
-            <a:outerShdw sx="100000" sy="100000" kx="0" ky="0" algn="bl" rotWithShape="0" blurRad="50800" dist="25400" dir="8100000">
-              <a:srgbClr val="000000">
-                <a:alpha val="12000"/>
-              </a:srgbClr>
-            </a:outerShdw>
-          </a:effectLst>
         </p:spPr>
       </p:sp>
       <p:sp>
@@ -4940,8 +5784,8 @@
         </p:nvSpPr>
         <p:spPr>
           <a:xfrm>
-            <a:off x="457200" y="2560320"/>
-            <a:ext cx="45720" cy="521208"/>
+            <a:off x="457200" y="2377440"/>
+            <a:ext cx="45720" cy="475488"/>
           </a:xfrm>
           <a:prstGeom prst="rect">
             <a:avLst/>
@@ -4960,8 +5804,8 @@
         </p:nvSpPr>
         <p:spPr>
           <a:xfrm>
-            <a:off x="685800" y="2560320"/>
-            <a:ext cx="7818120" cy="521208"/>
+            <a:off x="640080" y="2377440"/>
+            <a:ext cx="7863840" cy="475488"/>
           </a:xfrm>
           <a:prstGeom prst="rect">
             <a:avLst/>
@@ -4977,7 +5821,7 @@
               <a:buNone/>
             </a:pPr>
             <a:r>
-              <a:rPr lang="en-US" sz="1200" dirty="0">
+              <a:rPr lang="en-US" sz="1100" dirty="0">
                 <a:solidFill>
                   <a:srgbClr val="1A1A2E"/>
                 </a:solidFill>
@@ -4985,9 +5829,9 @@
                 <a:ea typeface="Calibri" pitchFamily="34" charset="-122"/>
                 <a:cs typeface="Calibri" pitchFamily="34" charset="-120"/>
               </a:rPr>
-              <a:t>Utiliser des alias pour renommer les colonnes</a:t>
-            </a:r>
-            <a:endParaRPr lang="en-US" sz="1200" dirty="0"/>
+              <a:t>LIKE patterns : % = n'importe quoi, _ = 1 caractere</a:t>
+            </a:r>
+            <a:endParaRPr lang="en-US" sz="1100" dirty="0"/>
           </a:p>
         </p:txBody>
       </p:sp>
@@ -4999,8 +5843,8 @@
         </p:nvSpPr>
         <p:spPr>
           <a:xfrm>
-            <a:off x="457200" y="3108960"/>
-            <a:ext cx="8229600" cy="521208"/>
+            <a:off x="457200" y="2880360"/>
+            <a:ext cx="8229600" cy="475488"/>
           </a:xfrm>
           <a:prstGeom prst="rect">
             <a:avLst/>
@@ -5009,13 +5853,6 @@
             <a:srgbClr val="FFFFFF"/>
           </a:solidFill>
           <a:ln/>
-          <a:effectLst>
-            <a:outerShdw sx="100000" sy="100000" kx="0" ky="0" algn="bl" rotWithShape="0" blurRad="50800" dist="25400" dir="8100000">
-              <a:srgbClr val="000000">
-                <a:alpha val="12000"/>
-              </a:srgbClr>
-            </a:outerShdw>
-          </a:effectLst>
         </p:spPr>
       </p:sp>
       <p:sp>
@@ -5026,8 +5863,8 @@
         </p:nvSpPr>
         <p:spPr>
           <a:xfrm>
-            <a:off x="457200" y="3108960"/>
-            <a:ext cx="45720" cy="521208"/>
+            <a:off x="457200" y="2880360"/>
+            <a:ext cx="45720" cy="475488"/>
           </a:xfrm>
           <a:prstGeom prst="rect">
             <a:avLst/>
@@ -5046,8 +5883,8 @@
         </p:nvSpPr>
         <p:spPr>
           <a:xfrm>
-            <a:off x="685800" y="3108960"/>
-            <a:ext cx="7818120" cy="521208"/>
+            <a:off x="640080" y="2880360"/>
+            <a:ext cx="7863840" cy="475488"/>
           </a:xfrm>
           <a:prstGeom prst="rect">
             <a:avLst/>
@@ -5063,7 +5900,7 @@
               <a:buNone/>
             </a:pPr>
             <a:r>
-              <a:rPr lang="en-US" sz="1200" dirty="0">
+              <a:rPr lang="en-US" sz="1100" dirty="0">
                 <a:solidFill>
                   <a:srgbClr val="1A1A2E"/>
                 </a:solidFill>
@@ -5071,9 +5908,9 @@
                 <a:ea typeface="Calibri" pitchFamily="34" charset="-122"/>
                 <a:cs typeface="Calibri" pitchFamily="34" charset="-120"/>
               </a:rPr>
-              <a:t>Vérifier chaque résultat dans HeidiSQL</a:t>
-            </a:r>
-            <a:endParaRPr lang="en-US" sz="1200" dirty="0"/>
+              <a:t>'A%' = commence par A | '%A' = finit par A | '%A%' = contient A</a:t>
+            </a:r>
+            <a:endParaRPr lang="en-US" sz="1100" dirty="0"/>
           </a:p>
         </p:txBody>
       </p:sp>
@@ -5085,8 +5922,8 @@
         </p:nvSpPr>
         <p:spPr>
           <a:xfrm>
-            <a:off x="457200" y="3657600"/>
-            <a:ext cx="8229600" cy="521208"/>
+            <a:off x="457200" y="3383280"/>
+            <a:ext cx="8229600" cy="475488"/>
           </a:xfrm>
           <a:prstGeom prst="rect">
             <a:avLst/>
@@ -5095,13 +5932,6 @@
             <a:srgbClr val="E3F2FD"/>
           </a:solidFill>
           <a:ln/>
-          <a:effectLst>
-            <a:outerShdw sx="100000" sy="100000" kx="0" ky="0" algn="bl" rotWithShape="0" blurRad="50800" dist="25400" dir="8100000">
-              <a:srgbClr val="000000">
-                <a:alpha val="12000"/>
-              </a:srgbClr>
-            </a:outerShdw>
-          </a:effectLst>
         </p:spPr>
       </p:sp>
       <p:sp>
@@ -5112,8 +5942,8 @@
         </p:nvSpPr>
         <p:spPr>
           <a:xfrm>
-            <a:off x="457200" y="3657600"/>
-            <a:ext cx="45720" cy="521208"/>
+            <a:off x="457200" y="3383280"/>
+            <a:ext cx="45720" cy="475488"/>
           </a:xfrm>
           <a:prstGeom prst="rect">
             <a:avLst/>
@@ -5132,8 +5962,8 @@
         </p:nvSpPr>
         <p:spPr>
           <a:xfrm>
-            <a:off x="685800" y="3657600"/>
-            <a:ext cx="7818120" cy="521208"/>
+            <a:off x="640080" y="3383280"/>
+            <a:ext cx="7863840" cy="475488"/>
           </a:xfrm>
           <a:prstGeom prst="rect">
             <a:avLst/>
@@ -5149,7 +5979,7 @@
               <a:buNone/>
             </a:pPr>
             <a:r>
-              <a:rPr lang="en-US" sz="1200" dirty="0">
+              <a:rPr lang="en-US" sz="1100" dirty="0">
                 <a:solidFill>
                   <a:srgbClr val="1A1A2E"/>
                 </a:solidFill>
@@ -5157,9 +5987,88 @@
                 <a:ea typeface="Calibri" pitchFamily="34" charset="-122"/>
                 <a:cs typeface="Calibri" pitchFamily="34" charset="-120"/>
               </a:rPr>
-              <a:t>DÉFI : une seule requête combinant WHERE + IN + LIKE + ORDER BY + LIMIT + alias</a:t>
-            </a:r>
-            <a:endParaRPr lang="en-US" sz="1200" dirty="0"/>
+              <a:t>'_A%' = 2e caractere est A | '__' = exactement 2 caracteres</a:t>
+            </a:r>
+            <a:endParaRPr lang="en-US" sz="1100" dirty="0"/>
+          </a:p>
+        </p:txBody>
+      </p:sp>
+      <p:sp>
+        <p:nvSpPr>
+          <p:cNvPr id="22" name="Shape 20"/>
+          <p:cNvSpPr/>
+          <p:nvPr/>
+        </p:nvSpPr>
+        <p:spPr>
+          <a:xfrm>
+            <a:off x="457200" y="3886200"/>
+            <a:ext cx="8229600" cy="475488"/>
+          </a:xfrm>
+          <a:prstGeom prst="rect">
+            <a:avLst/>
+          </a:prstGeom>
+          <a:solidFill>
+            <a:srgbClr val="FFFFFF"/>
+          </a:solidFill>
+          <a:ln/>
+        </p:spPr>
+      </p:sp>
+      <p:sp>
+        <p:nvSpPr>
+          <p:cNvPr id="23" name="Shape 21"/>
+          <p:cNvSpPr/>
+          <p:nvPr/>
+        </p:nvSpPr>
+        <p:spPr>
+          <a:xfrm>
+            <a:off x="457200" y="3886200"/>
+            <a:ext cx="45720" cy="475488"/>
+          </a:xfrm>
+          <a:prstGeom prst="rect">
+            <a:avLst/>
+          </a:prstGeom>
+          <a:solidFill>
+            <a:srgbClr val="1565C0"/>
+          </a:solidFill>
+          <a:ln/>
+        </p:spPr>
+      </p:sp>
+      <p:sp>
+        <p:nvSpPr>
+          <p:cNvPr id="24" name="Text 22"/>
+          <p:cNvSpPr/>
+          <p:nvPr/>
+        </p:nvSpPr>
+        <p:spPr>
+          <a:xfrm>
+            <a:off x="640080" y="3886200"/>
+            <a:ext cx="7863840" cy="475488"/>
+          </a:xfrm>
+          <a:prstGeom prst="rect">
+            <a:avLst/>
+          </a:prstGeom>
+          <a:noFill/>
+          <a:ln/>
+        </p:spPr>
+        <p:txBody>
+          <a:bodyPr wrap="square" lIns="0" tIns="0" rIns="0" bIns="0" rtlCol="0" anchor="ctr"/>
+          <a:lstStyle/>
+          <a:p>
+            <a:pPr indent="0" marL="0">
+              <a:buNone/>
+            </a:pPr>
+            <a:r>
+              <a:rPr lang="en-US" sz="1100" dirty="0">
+                <a:solidFill>
+                  <a:srgbClr val="1A1A2E"/>
+                </a:solidFill>
+                <a:latin typeface="Calibri" pitchFamily="34" charset="0"/>
+                <a:ea typeface="Calibri" pitchFamily="34" charset="-122"/>
+                <a:cs typeface="Calibri" pitchFamily="34" charset="-120"/>
+              </a:rPr>
+              <a:t>LIKE est insensible a la casse en MySQL (sauf BINARY)</a:t>
+            </a:r>
+            <a:endParaRPr lang="en-US" sz="1100" dirty="0"/>
           </a:p>
         </p:txBody>
       </p:sp>
@@ -5177,7 +6086,7 @@
     <p:bg>
       <p:bgPr>
         <a:solidFill>
-          <a:srgbClr val="0D47A1"/>
+          <a:srgbClr val="F5F7FA"/>
         </a:solidFill>
       </p:bgPr>
     </p:bg>
@@ -5197,14 +6106,34 @@
       </p:grpSpPr>
       <p:sp>
         <p:nvSpPr>
-          <p:cNvPr id="2" name="Text 0"/>
-          <p:cNvSpPr/>
-          <p:nvPr/>
-        </p:nvSpPr>
-        <p:spPr>
-          <a:xfrm>
-            <a:off x="3840480" y="457200"/>
-            <a:ext cx="1463040" cy="1097280"/>
+          <p:cNvPr id="2" name="Shape 0"/>
+          <p:cNvSpPr/>
+          <p:nvPr/>
+        </p:nvSpPr>
+        <p:spPr>
+          <a:xfrm>
+            <a:off x="0" y="0"/>
+            <a:ext cx="9144000" cy="54864"/>
+          </a:xfrm>
+          <a:prstGeom prst="rect">
+            <a:avLst/>
+          </a:prstGeom>
+          <a:solidFill>
+            <a:srgbClr val="1565C0"/>
+          </a:solidFill>
+          <a:ln/>
+        </p:spPr>
+      </p:sp>
+      <p:sp>
+        <p:nvSpPr>
+          <p:cNvPr id="3" name="Text 1"/>
+          <p:cNvSpPr/>
+          <p:nvPr/>
+        </p:nvSpPr>
+        <p:spPr>
+          <a:xfrm>
+            <a:off x="457200" y="182880"/>
+            <a:ext cx="8229600" cy="548640"/>
           </a:xfrm>
           <a:prstGeom prst="rect">
             <a:avLst/>
@@ -5216,70 +6145,74 @@
           <a:bodyPr wrap="square" lIns="0" tIns="0" rIns="0" bIns="0" rtlCol="0" anchor="ctr"/>
           <a:lstStyle/>
           <a:p>
-            <a:pPr algn="ctr" indent="0" marL="0">
+            <a:pPr indent="0" marL="0">
               <a:buNone/>
             </a:pPr>
             <a:r>
-              <a:rPr lang="en-US" sz="6000" dirty="0">
+              <a:rPr lang="en-US" sz="2200" b="1" dirty="0">
                 <a:solidFill>
-                  <a:srgbClr val="000000"/>
-                </a:solidFill>
-              </a:rPr>
-              <a:t>🎮</a:t>
-            </a:r>
-            <a:endParaRPr lang="en-US" sz="6000" dirty="0"/>
-          </a:p>
-        </p:txBody>
-      </p:sp>
-      <p:sp>
-        <p:nvSpPr>
-          <p:cNvPr id="3" name="Text 1"/>
-          <p:cNvSpPr/>
-          <p:nvPr/>
-        </p:nvSpPr>
-        <p:spPr>
-          <a:xfrm>
-            <a:off x="457200" y="1645920"/>
-            <a:ext cx="8229600" cy="548640"/>
-          </a:xfrm>
-          <a:prstGeom prst="rect">
-            <a:avLst/>
-          </a:prstGeom>
-          <a:noFill/>
-          <a:ln/>
-        </p:spPr>
-        <p:txBody>
-          <a:bodyPr wrap="square" lIns="0" tIns="0" rIns="0" bIns="0" rtlCol="0" anchor="ctr"/>
-          <a:lstStyle/>
-          <a:p>
-            <a:pPr algn="ctr" indent="0" marL="0">
-              <a:buNone/>
-            </a:pPr>
-            <a:r>
-              <a:rPr lang="en-US" sz="2600" b="1" dirty="0">
-                <a:solidFill>
-                  <a:srgbClr val="FFFFFF"/>
+                  <a:srgbClr val="0D47A1"/>
                 </a:solidFill>
                 <a:latin typeface="Trebuchet MS" pitchFamily="34" charset="0"/>
                 <a:ea typeface="Trebuchet MS" pitchFamily="34" charset="-122"/>
                 <a:cs typeface="Trebuchet MS" pitchFamily="34" charset="-120"/>
               </a:rPr>
-              <a:t>Mini-jeu : Le Détective de Données</a:t>
-            </a:r>
-            <a:endParaRPr lang="en-US" sz="2600" dirty="0"/>
-          </a:p>
-        </p:txBody>
-      </p:sp>
-      <p:sp>
-        <p:nvSpPr>
-          <p:cNvPr id="4" name="Text 2"/>
-          <p:cNvSpPr/>
-          <p:nvPr/>
-        </p:nvSpPr>
-        <p:spPr>
-          <a:xfrm>
-            <a:off x="1371600" y="2286000"/>
-            <a:ext cx="6400800" cy="731520"/>
+              <a:t>Exercices GESCOM sur le sandbox (Exercices 1-21)</a:t>
+            </a:r>
+            <a:endParaRPr lang="en-US" sz="2200" dirty="0"/>
+          </a:p>
+        </p:txBody>
+      </p:sp>
+      <p:sp>
+        <p:nvSpPr>
+          <p:cNvPr id="4" name="Shape 2"/>
+          <p:cNvSpPr/>
+          <p:nvPr/>
+        </p:nvSpPr>
+        <p:spPr>
+          <a:xfrm>
+            <a:off x="457200" y="868680"/>
+            <a:ext cx="8229600" cy="475488"/>
+          </a:xfrm>
+          <a:prstGeom prst="rect">
+            <a:avLst/>
+          </a:prstGeom>
+          <a:solidFill>
+            <a:srgbClr val="FFFFFF"/>
+          </a:solidFill>
+          <a:ln/>
+        </p:spPr>
+      </p:sp>
+      <p:sp>
+        <p:nvSpPr>
+          <p:cNvPr id="5" name="Shape 3"/>
+          <p:cNvSpPr/>
+          <p:nvPr/>
+        </p:nvSpPr>
+        <p:spPr>
+          <a:xfrm>
+            <a:off x="457200" y="868680"/>
+            <a:ext cx="45720" cy="475488"/>
+          </a:xfrm>
+          <a:prstGeom prst="rect">
+            <a:avLst/>
+          </a:prstGeom>
+          <a:solidFill>
+            <a:srgbClr val="1565C0"/>
+          </a:solidFill>
+          <a:ln/>
+        </p:spPr>
+      </p:sp>
+      <p:sp>
+        <p:nvSpPr>
+          <p:cNvPr id="6" name="Text 4"/>
+          <p:cNvSpPr/>
+          <p:nvPr/>
+        </p:nvSpPr>
+        <p:spPr>
+          <a:xfrm>
+            <a:off x="640080" y="868680"/>
+            <a:ext cx="7863840" cy="475488"/>
           </a:xfrm>
           <a:prstGeom prst="rect">
             <a:avLst/>
@@ -5291,54 +6224,74 @@
           <a:bodyPr wrap="square" lIns="0" tIns="0" rIns="0" bIns="0" rtlCol="0" anchor="ctr"/>
           <a:lstStyle/>
           <a:p>
-            <a:pPr algn="ctr" indent="0" marL="0">
+            <a:pPr indent="0" marL="0">
               <a:buNone/>
             </a:pPr>
             <a:r>
-              <a:rPr lang="en-US" sz="1400" dirty="0">
+              <a:rPr lang="en-US" sz="1100" dirty="0">
                 <a:solidFill>
-                  <a:srgbClr val="CCCCCC"/>
+                  <a:srgbClr val="1A1A2E"/>
                 </a:solidFill>
                 <a:latin typeface="Calibri" pitchFamily="34" charset="0"/>
                 <a:ea typeface="Calibri" pitchFamily="34" charset="-122"/>
                 <a:cs typeface="Calibri" pitchFamily="34" charset="-120"/>
               </a:rPr>
-              <a:t>Résolvez les énigmes avec les bonnes requêtes SELECT !</a:t>
-            </a:r>
-            <a:endParaRPr lang="en-US" sz="1400" dirty="0"/>
-          </a:p>
-        </p:txBody>
-      </p:sp>
-      <p:sp>
-        <p:nvSpPr>
-          <p:cNvPr id="5" name="Shape 3"/>
-          <p:cNvSpPr/>
-          <p:nvPr/>
-        </p:nvSpPr>
-        <p:spPr>
-          <a:xfrm>
-            <a:off x="2286000" y="3291840"/>
-            <a:ext cx="4572000" cy="548640"/>
-          </a:xfrm>
-          <a:prstGeom prst="rect">
-            <a:avLst/>
-          </a:prstGeom>
-          <a:solidFill>
-            <a:srgbClr val="FF6F00"/>
-          </a:solidFill>
-          <a:ln/>
-        </p:spPr>
-      </p:sp>
-      <p:sp>
-        <p:nvSpPr>
-          <p:cNvPr id="6" name="Text 4"/>
-          <p:cNvSpPr/>
-          <p:nvPr/>
-        </p:nvSpPr>
-        <p:spPr>
-          <a:xfrm>
-            <a:off x="2286000" y="3291840"/>
-            <a:ext cx="4572000" cy="548640"/>
+              <a:t>Les 29 exercices GESCOM sont disponibles sur le site</a:t>
+            </a:r>
+            <a:endParaRPr lang="en-US" sz="1100" dirty="0"/>
+          </a:p>
+        </p:txBody>
+      </p:sp>
+      <p:sp>
+        <p:nvSpPr>
+          <p:cNvPr id="7" name="Shape 5"/>
+          <p:cNvSpPr/>
+          <p:nvPr/>
+        </p:nvSpPr>
+        <p:spPr>
+          <a:xfrm>
+            <a:off x="457200" y="1371600"/>
+            <a:ext cx="8229600" cy="475488"/>
+          </a:xfrm>
+          <a:prstGeom prst="rect">
+            <a:avLst/>
+          </a:prstGeom>
+          <a:solidFill>
+            <a:srgbClr val="E3F2FD"/>
+          </a:solidFill>
+          <a:ln/>
+        </p:spPr>
+      </p:sp>
+      <p:sp>
+        <p:nvSpPr>
+          <p:cNvPr id="8" name="Shape 6"/>
+          <p:cNvSpPr/>
+          <p:nvPr/>
+        </p:nvSpPr>
+        <p:spPr>
+          <a:xfrm>
+            <a:off x="457200" y="1371600"/>
+            <a:ext cx="45720" cy="475488"/>
+          </a:xfrm>
+          <a:prstGeom prst="rect">
+            <a:avLst/>
+          </a:prstGeom>
+          <a:solidFill>
+            <a:srgbClr val="1565C0"/>
+          </a:solidFill>
+          <a:ln/>
+        </p:spPr>
+      </p:sp>
+      <p:sp>
+        <p:nvSpPr>
+          <p:cNvPr id="9" name="Text 7"/>
+          <p:cNvSpPr/>
+          <p:nvPr/>
+        </p:nvSpPr>
+        <p:spPr>
+          <a:xfrm>
+            <a:off x="640080" y="1371600"/>
+            <a:ext cx="7863840" cy="475488"/>
           </a:xfrm>
           <a:prstGeom prst="rect">
             <a:avLst/>
@@ -5350,21 +6303,416 @@
           <a:bodyPr wrap="square" lIns="0" tIns="0" rIns="0" bIns="0" rtlCol="0" anchor="ctr"/>
           <a:lstStyle/>
           <a:p>
-            <a:pPr algn="ctr" indent="0" marL="0">
+            <a:pPr indent="0" marL="0">
               <a:buNone/>
             </a:pPr>
             <a:r>
-              <a:rPr lang="en-US" sz="1800" b="1" dirty="0">
+              <a:rPr lang="en-US" sz="1100" dirty="0">
                 <a:solidFill>
-                  <a:srgbClr val="FFFFFF"/>
+                  <a:srgbClr val="1A1A2E"/>
                 </a:solidFill>
-                <a:latin typeface="Trebuchet MS" pitchFamily="34" charset="0"/>
-                <a:ea typeface="Trebuchet MS" pitchFamily="34" charset="-122"/>
-                <a:cs typeface="Trebuchet MS" pitchFamily="34" charset="-120"/>
+                <a:latin typeface="Calibri" pitchFamily="34" charset="0"/>
+                <a:ea typeface="Calibri" pitchFamily="34" charset="-122"/>
+                <a:cs typeface="Calibri" pitchFamily="34" charset="-120"/>
               </a:rPr>
-              <a:t>▶  Lancer le jeu</a:t>
-            </a:r>
-            <a:endParaRPr lang="en-US" sz="1800" dirty="0"/>
+              <a:t>Exercices 1-3 : SELECT FROM + ORDER BY</a:t>
+            </a:r>
+            <a:endParaRPr lang="en-US" sz="1100" dirty="0"/>
+          </a:p>
+        </p:txBody>
+      </p:sp>
+      <p:sp>
+        <p:nvSpPr>
+          <p:cNvPr id="10" name="Shape 8"/>
+          <p:cNvSpPr/>
+          <p:nvPr/>
+        </p:nvSpPr>
+        <p:spPr>
+          <a:xfrm>
+            <a:off x="457200" y="1874520"/>
+            <a:ext cx="8229600" cy="475488"/>
+          </a:xfrm>
+          <a:prstGeom prst="rect">
+            <a:avLst/>
+          </a:prstGeom>
+          <a:solidFill>
+            <a:srgbClr val="FFFFFF"/>
+          </a:solidFill>
+          <a:ln/>
+        </p:spPr>
+      </p:sp>
+      <p:sp>
+        <p:nvSpPr>
+          <p:cNvPr id="11" name="Shape 9"/>
+          <p:cNvSpPr/>
+          <p:nvPr/>
+        </p:nvSpPr>
+        <p:spPr>
+          <a:xfrm>
+            <a:off x="457200" y="1874520"/>
+            <a:ext cx="45720" cy="475488"/>
+          </a:xfrm>
+          <a:prstGeom prst="rect">
+            <a:avLst/>
+          </a:prstGeom>
+          <a:solidFill>
+            <a:srgbClr val="1565C0"/>
+          </a:solidFill>
+          <a:ln/>
+        </p:spPr>
+      </p:sp>
+      <p:sp>
+        <p:nvSpPr>
+          <p:cNvPr id="12" name="Text 10"/>
+          <p:cNvSpPr/>
+          <p:nvPr/>
+        </p:nvSpPr>
+        <p:spPr>
+          <a:xfrm>
+            <a:off x="640080" y="1874520"/>
+            <a:ext cx="7863840" cy="475488"/>
+          </a:xfrm>
+          <a:prstGeom prst="rect">
+            <a:avLst/>
+          </a:prstGeom>
+          <a:noFill/>
+          <a:ln/>
+        </p:spPr>
+        <p:txBody>
+          <a:bodyPr wrap="square" lIns="0" tIns="0" rIns="0" bIns="0" rtlCol="0" anchor="ctr"/>
+          <a:lstStyle/>
+          <a:p>
+            <a:pPr indent="0" marL="0">
+              <a:buNone/>
+            </a:pPr>
+            <a:r>
+              <a:rPr lang="en-US" sz="1100" dirty="0">
+                <a:solidFill>
+                  <a:srgbClr val="1A1A2E"/>
+                </a:solidFill>
+                <a:latin typeface="Calibri" pitchFamily="34" charset="0"/>
+                <a:ea typeface="Calibri" pitchFamily="34" charset="-122"/>
+                <a:cs typeface="Calibri" pitchFamily="34" charset="-120"/>
+              </a:rPr>
+              <a:t>Exercices 4-7 : WHERE (comparaisons, &lt;, &gt;, &lt;&gt;)</a:t>
+            </a:r>
+            <a:endParaRPr lang="en-US" sz="1100" dirty="0"/>
+          </a:p>
+        </p:txBody>
+      </p:sp>
+      <p:sp>
+        <p:nvSpPr>
+          <p:cNvPr id="13" name="Shape 11"/>
+          <p:cNvSpPr/>
+          <p:nvPr/>
+        </p:nvSpPr>
+        <p:spPr>
+          <a:xfrm>
+            <a:off x="457200" y="2377440"/>
+            <a:ext cx="8229600" cy="475488"/>
+          </a:xfrm>
+          <a:prstGeom prst="rect">
+            <a:avLst/>
+          </a:prstGeom>
+          <a:solidFill>
+            <a:srgbClr val="E3F2FD"/>
+          </a:solidFill>
+          <a:ln/>
+        </p:spPr>
+      </p:sp>
+      <p:sp>
+        <p:nvSpPr>
+          <p:cNvPr id="14" name="Shape 12"/>
+          <p:cNvSpPr/>
+          <p:nvPr/>
+        </p:nvSpPr>
+        <p:spPr>
+          <a:xfrm>
+            <a:off x="457200" y="2377440"/>
+            <a:ext cx="45720" cy="475488"/>
+          </a:xfrm>
+          <a:prstGeom prst="rect">
+            <a:avLst/>
+          </a:prstGeom>
+          <a:solidFill>
+            <a:srgbClr val="1565C0"/>
+          </a:solidFill>
+          <a:ln/>
+        </p:spPr>
+      </p:sp>
+      <p:sp>
+        <p:nvSpPr>
+          <p:cNvPr id="15" name="Text 13"/>
+          <p:cNvSpPr/>
+          <p:nvPr/>
+        </p:nvSpPr>
+        <p:spPr>
+          <a:xfrm>
+            <a:off x="640080" y="2377440"/>
+            <a:ext cx="7863840" cy="475488"/>
+          </a:xfrm>
+          <a:prstGeom prst="rect">
+            <a:avLst/>
+          </a:prstGeom>
+          <a:noFill/>
+          <a:ln/>
+        </p:spPr>
+        <p:txBody>
+          <a:bodyPr wrap="square" lIns="0" tIns="0" rIns="0" bIns="0" rtlCol="0" anchor="ctr"/>
+          <a:lstStyle/>
+          <a:p>
+            <a:pPr indent="0" marL="0">
+              <a:buNone/>
+            </a:pPr>
+            <a:r>
+              <a:rPr lang="en-US" sz="1100" dirty="0">
+                <a:solidFill>
+                  <a:srgbClr val="1A1A2E"/>
+                </a:solidFill>
+                <a:latin typeface="Calibri" pitchFamily="34" charset="0"/>
+                <a:ea typeface="Calibri" pitchFamily="34" charset="-122"/>
+                <a:cs typeface="Calibri" pitchFamily="34" charset="-120"/>
+              </a:rPr>
+              <a:t>Exercices 8-14 : AND, OR, NOT (combinaisons)</a:t>
+            </a:r>
+            <a:endParaRPr lang="en-US" sz="1100" dirty="0"/>
+          </a:p>
+        </p:txBody>
+      </p:sp>
+      <p:sp>
+        <p:nvSpPr>
+          <p:cNvPr id="16" name="Shape 14"/>
+          <p:cNvSpPr/>
+          <p:nvPr/>
+        </p:nvSpPr>
+        <p:spPr>
+          <a:xfrm>
+            <a:off x="457200" y="2880360"/>
+            <a:ext cx="8229600" cy="475488"/>
+          </a:xfrm>
+          <a:prstGeom prst="rect">
+            <a:avLst/>
+          </a:prstGeom>
+          <a:solidFill>
+            <a:srgbClr val="FFFFFF"/>
+          </a:solidFill>
+          <a:ln/>
+        </p:spPr>
+      </p:sp>
+      <p:sp>
+        <p:nvSpPr>
+          <p:cNvPr id="17" name="Shape 15"/>
+          <p:cNvSpPr/>
+          <p:nvPr/>
+        </p:nvSpPr>
+        <p:spPr>
+          <a:xfrm>
+            <a:off x="457200" y="2880360"/>
+            <a:ext cx="45720" cy="475488"/>
+          </a:xfrm>
+          <a:prstGeom prst="rect">
+            <a:avLst/>
+          </a:prstGeom>
+          <a:solidFill>
+            <a:srgbClr val="1565C0"/>
+          </a:solidFill>
+          <a:ln/>
+        </p:spPr>
+      </p:sp>
+      <p:sp>
+        <p:nvSpPr>
+          <p:cNvPr id="18" name="Text 16"/>
+          <p:cNvSpPr/>
+          <p:nvPr/>
+        </p:nvSpPr>
+        <p:spPr>
+          <a:xfrm>
+            <a:off x="640080" y="2880360"/>
+            <a:ext cx="7863840" cy="475488"/>
+          </a:xfrm>
+          <a:prstGeom prst="rect">
+            <a:avLst/>
+          </a:prstGeom>
+          <a:noFill/>
+          <a:ln/>
+        </p:spPr>
+        <p:txBody>
+          <a:bodyPr wrap="square" lIns="0" tIns="0" rIns="0" bIns="0" rtlCol="0" anchor="ctr"/>
+          <a:lstStyle/>
+          <a:p>
+            <a:pPr indent="0" marL="0">
+              <a:buNone/>
+            </a:pPr>
+            <a:r>
+              <a:rPr lang="en-US" sz="1100" dirty="0">
+                <a:solidFill>
+                  <a:srgbClr val="1A1A2E"/>
+                </a:solidFill>
+                <a:latin typeface="Calibri" pitchFamily="34" charset="0"/>
+                <a:ea typeface="Calibri" pitchFamily="34" charset="-122"/>
+                <a:cs typeface="Calibri" pitchFamily="34" charset="-120"/>
+              </a:rPr>
+              <a:t>Exercices 15-18 : BETWEEN, IN (intervalles, listes)</a:t>
+            </a:r>
+            <a:endParaRPr lang="en-US" sz="1100" dirty="0"/>
+          </a:p>
+        </p:txBody>
+      </p:sp>
+      <p:sp>
+        <p:nvSpPr>
+          <p:cNvPr id="19" name="Shape 17"/>
+          <p:cNvSpPr/>
+          <p:nvPr/>
+        </p:nvSpPr>
+        <p:spPr>
+          <a:xfrm>
+            <a:off x="457200" y="3383280"/>
+            <a:ext cx="8229600" cy="475488"/>
+          </a:xfrm>
+          <a:prstGeom prst="rect">
+            <a:avLst/>
+          </a:prstGeom>
+          <a:solidFill>
+            <a:srgbClr val="E3F2FD"/>
+          </a:solidFill>
+          <a:ln/>
+        </p:spPr>
+      </p:sp>
+      <p:sp>
+        <p:nvSpPr>
+          <p:cNvPr id="20" name="Shape 18"/>
+          <p:cNvSpPr/>
+          <p:nvPr/>
+        </p:nvSpPr>
+        <p:spPr>
+          <a:xfrm>
+            <a:off x="457200" y="3383280"/>
+            <a:ext cx="45720" cy="475488"/>
+          </a:xfrm>
+          <a:prstGeom prst="rect">
+            <a:avLst/>
+          </a:prstGeom>
+          <a:solidFill>
+            <a:srgbClr val="1565C0"/>
+          </a:solidFill>
+          <a:ln/>
+        </p:spPr>
+      </p:sp>
+      <p:sp>
+        <p:nvSpPr>
+          <p:cNvPr id="21" name="Text 19"/>
+          <p:cNvSpPr/>
+          <p:nvPr/>
+        </p:nvSpPr>
+        <p:spPr>
+          <a:xfrm>
+            <a:off x="640080" y="3383280"/>
+            <a:ext cx="7863840" cy="475488"/>
+          </a:xfrm>
+          <a:prstGeom prst="rect">
+            <a:avLst/>
+          </a:prstGeom>
+          <a:noFill/>
+          <a:ln/>
+        </p:spPr>
+        <p:txBody>
+          <a:bodyPr wrap="square" lIns="0" tIns="0" rIns="0" bIns="0" rtlCol="0" anchor="ctr"/>
+          <a:lstStyle/>
+          <a:p>
+            <a:pPr indent="0" marL="0">
+              <a:buNone/>
+            </a:pPr>
+            <a:r>
+              <a:rPr lang="en-US" sz="1100" dirty="0">
+                <a:solidFill>
+                  <a:srgbClr val="1A1A2E"/>
+                </a:solidFill>
+                <a:latin typeface="Calibri" pitchFamily="34" charset="0"/>
+                <a:ea typeface="Calibri" pitchFamily="34" charset="-122"/>
+                <a:cs typeface="Calibri" pitchFamily="34" charset="-120"/>
+              </a:rPr>
+              <a:t>Exercices 19-21 : LIKE, DISTINCT</a:t>
+            </a:r>
+            <a:endParaRPr lang="en-US" sz="1100" dirty="0"/>
+          </a:p>
+        </p:txBody>
+      </p:sp>
+      <p:sp>
+        <p:nvSpPr>
+          <p:cNvPr id="22" name="Shape 20"/>
+          <p:cNvSpPr/>
+          <p:nvPr/>
+        </p:nvSpPr>
+        <p:spPr>
+          <a:xfrm>
+            <a:off x="457200" y="3886200"/>
+            <a:ext cx="8229600" cy="475488"/>
+          </a:xfrm>
+          <a:prstGeom prst="rect">
+            <a:avLst/>
+          </a:prstGeom>
+          <a:solidFill>
+            <a:srgbClr val="FFFFFF"/>
+          </a:solidFill>
+          <a:ln/>
+        </p:spPr>
+      </p:sp>
+      <p:sp>
+        <p:nvSpPr>
+          <p:cNvPr id="23" name="Shape 21"/>
+          <p:cNvSpPr/>
+          <p:nvPr/>
+        </p:nvSpPr>
+        <p:spPr>
+          <a:xfrm>
+            <a:off x="457200" y="3886200"/>
+            <a:ext cx="45720" cy="475488"/>
+          </a:xfrm>
+          <a:prstGeom prst="rect">
+            <a:avLst/>
+          </a:prstGeom>
+          <a:solidFill>
+            <a:srgbClr val="1565C0"/>
+          </a:solidFill>
+          <a:ln/>
+        </p:spPr>
+      </p:sp>
+      <p:sp>
+        <p:nvSpPr>
+          <p:cNvPr id="24" name="Text 22"/>
+          <p:cNvSpPr/>
+          <p:nvPr/>
+        </p:nvSpPr>
+        <p:spPr>
+          <a:xfrm>
+            <a:off x="640080" y="3886200"/>
+            <a:ext cx="7863840" cy="475488"/>
+          </a:xfrm>
+          <a:prstGeom prst="rect">
+            <a:avLst/>
+          </a:prstGeom>
+          <a:noFill/>
+          <a:ln/>
+        </p:spPr>
+        <p:txBody>
+          <a:bodyPr wrap="square" lIns="0" tIns="0" rIns="0" bIns="0" rtlCol="0" anchor="ctr"/>
+          <a:lstStyle/>
+          <a:p>
+            <a:pPr indent="0" marL="0">
+              <a:buNone/>
+            </a:pPr>
+            <a:r>
+              <a:rPr lang="en-US" sz="1100" dirty="0">
+                <a:solidFill>
+                  <a:srgbClr val="1A1A2E"/>
+                </a:solidFill>
+                <a:latin typeface="Calibri" pitchFamily="34" charset="0"/>
+                <a:ea typeface="Calibri" pitchFamily="34" charset="-122"/>
+                <a:cs typeface="Calibri" pitchFamily="34" charset="-120"/>
+              </a:rPr>
+              <a:t>Chaque exercice a un indice + la solution cachee</a:t>
+            </a:r>
+            <a:endParaRPr lang="en-US" sz="1100" dirty="0"/>
           </a:p>
         </p:txBody>
       </p:sp>
@@ -5402,14 +6750,34 @@
       </p:grpSpPr>
       <p:sp>
         <p:nvSpPr>
-          <p:cNvPr id="2" name="Text 0"/>
-          <p:cNvSpPr/>
-          <p:nvPr/>
-        </p:nvSpPr>
-        <p:spPr>
-          <a:xfrm>
-            <a:off x="457200" y="137160"/>
-            <a:ext cx="5486400" cy="411480"/>
+          <p:cNvPr id="2" name="Shape 0"/>
+          <p:cNvSpPr/>
+          <p:nvPr/>
+        </p:nvSpPr>
+        <p:spPr>
+          <a:xfrm>
+            <a:off x="0" y="0"/>
+            <a:ext cx="9144000" cy="54864"/>
+          </a:xfrm>
+          <a:prstGeom prst="rect">
+            <a:avLst/>
+          </a:prstGeom>
+          <a:solidFill>
+            <a:srgbClr val="1565C0"/>
+          </a:solidFill>
+          <a:ln/>
+        </p:spPr>
+      </p:sp>
+      <p:sp>
+        <p:nvSpPr>
+          <p:cNvPr id="3" name="Text 1"/>
+          <p:cNvSpPr/>
+          <p:nvPr/>
+        </p:nvSpPr>
+        <p:spPr>
+          <a:xfrm>
+            <a:off x="457200" y="182880"/>
+            <a:ext cx="8229600" cy="548640"/>
           </a:xfrm>
           <a:prstGeom prst="rect">
             <a:avLst/>
@@ -5425,7 +6793,7 @@
               <a:buNone/>
             </a:pPr>
             <a:r>
-              <a:rPr lang="en-US" sz="1800" b="1" dirty="0">
+              <a:rPr lang="en-US" sz="2200" b="1" dirty="0">
                 <a:solidFill>
                   <a:srgbClr val="0D47A1"/>
                 </a:solidFill>
@@ -5433,42 +6801,62 @@
                 <a:ea typeface="Trebuchet MS" pitchFamily="34" charset="-122"/>
                 <a:cs typeface="Trebuchet MS" pitchFamily="34" charset="-120"/>
               </a:rPr>
-              <a:t>📋 Mémo Module 12</a:t>
-            </a:r>
-            <a:endParaRPr lang="en-US" sz="1800" dirty="0"/>
-          </a:p>
-        </p:txBody>
-      </p:sp>
-      <p:sp>
-        <p:nvSpPr>
-          <p:cNvPr id="3" name="Shape 1"/>
-          <p:cNvSpPr/>
-          <p:nvPr/>
-        </p:nvSpPr>
-        <p:spPr>
-          <a:xfrm>
-            <a:off x="457200" y="548640"/>
-            <a:ext cx="8229600" cy="274320"/>
-          </a:xfrm>
-          <a:prstGeom prst="rect">
-            <a:avLst/>
-          </a:prstGeom>
-          <a:solidFill>
-            <a:srgbClr val="FFF3E0"/>
-          </a:solidFill>
-          <a:ln/>
-        </p:spPr>
-      </p:sp>
-      <p:sp>
-        <p:nvSpPr>
-          <p:cNvPr id="4" name="Text 2"/>
-          <p:cNvSpPr/>
-          <p:nvPr/>
-        </p:nvSpPr>
-        <p:spPr>
-          <a:xfrm>
-            <a:off x="640080" y="548640"/>
-            <a:ext cx="7772400" cy="274320"/>
+              <a:t>Exercice Module 12 — SwissSound</a:t>
+            </a:r>
+            <a:endParaRPr lang="en-US" sz="2200" dirty="0"/>
+          </a:p>
+        </p:txBody>
+      </p:sp>
+      <p:sp>
+        <p:nvSpPr>
+          <p:cNvPr id="4" name="Shape 2"/>
+          <p:cNvSpPr/>
+          <p:nvPr/>
+        </p:nvSpPr>
+        <p:spPr>
+          <a:xfrm>
+            <a:off x="457200" y="868680"/>
+            <a:ext cx="8229600" cy="464058"/>
+          </a:xfrm>
+          <a:prstGeom prst="rect">
+            <a:avLst/>
+          </a:prstGeom>
+          <a:solidFill>
+            <a:srgbClr val="FFFFFF"/>
+          </a:solidFill>
+          <a:ln/>
+        </p:spPr>
+      </p:sp>
+      <p:sp>
+        <p:nvSpPr>
+          <p:cNvPr id="5" name="Shape 3"/>
+          <p:cNvSpPr/>
+          <p:nvPr/>
+        </p:nvSpPr>
+        <p:spPr>
+          <a:xfrm>
+            <a:off x="457200" y="868680"/>
+            <a:ext cx="45720" cy="464058"/>
+          </a:xfrm>
+          <a:prstGeom prst="rect">
+            <a:avLst/>
+          </a:prstGeom>
+          <a:solidFill>
+            <a:srgbClr val="1565C0"/>
+          </a:solidFill>
+          <a:ln/>
+        </p:spPr>
+      </p:sp>
+      <p:sp>
+        <p:nvSpPr>
+          <p:cNvPr id="6" name="Text 4"/>
+          <p:cNvSpPr/>
+          <p:nvPr/>
+        </p:nvSpPr>
+        <p:spPr>
+          <a:xfrm>
+            <a:off x="640080" y="868680"/>
+            <a:ext cx="7863840" cy="464058"/>
           </a:xfrm>
           <a:prstGeom prst="rect">
             <a:avLst/>
@@ -5484,30 +6872,30 @@
               <a:buNone/>
             </a:pPr>
             <a:r>
-              <a:rPr lang="en-US" sz="900" b="1" dirty="0">
+              <a:rPr lang="en-US" sz="1100" dirty="0">
                 <a:solidFill>
-                  <a:srgbClr val="E65100"/>
+                  <a:srgbClr val="1A1A2E"/>
                 </a:solidFill>
                 <a:latin typeface="Calibri" pitchFamily="34" charset="0"/>
                 <a:ea typeface="Calibri" pitchFamily="34" charset="-122"/>
                 <a:cs typeface="Calibri" pitchFamily="34" charset="-120"/>
               </a:rPr>
-              <a:t>🔒 Déblocable après complétion</a:t>
-            </a:r>
-            <a:endParaRPr lang="en-US" sz="900" dirty="0"/>
-          </a:p>
-        </p:txBody>
-      </p:sp>
-      <p:sp>
-        <p:nvSpPr>
-          <p:cNvPr id="5" name="Shape 3"/>
-          <p:cNvSpPr/>
-          <p:nvPr/>
-        </p:nvSpPr>
-        <p:spPr>
-          <a:xfrm>
-            <a:off x="457200" y="960120"/>
-            <a:ext cx="2286000" cy="475488"/>
+              <a:t>1. Artistes actifs inscrits apres le 01/01/2024</a:t>
+            </a:r>
+            <a:endParaRPr lang="en-US" sz="1100" dirty="0"/>
+          </a:p>
+        </p:txBody>
+      </p:sp>
+      <p:sp>
+        <p:nvSpPr>
+          <p:cNvPr id="7" name="Shape 5"/>
+          <p:cNvSpPr/>
+          <p:nvPr/>
+        </p:nvSpPr>
+        <p:spPr>
+          <a:xfrm>
+            <a:off x="457200" y="1360170"/>
+            <a:ext cx="8229600" cy="464058"/>
           </a:xfrm>
           <a:prstGeom prst="rect">
             <a:avLst/>
@@ -5520,14 +6908,34 @@
       </p:sp>
       <p:sp>
         <p:nvSpPr>
-          <p:cNvPr id="6" name="Text 4"/>
-          <p:cNvSpPr/>
-          <p:nvPr/>
-        </p:nvSpPr>
-        <p:spPr>
-          <a:xfrm>
-            <a:off x="548640" y="960120"/>
-            <a:ext cx="2103120" cy="475488"/>
+          <p:cNvPr id="8" name="Shape 6"/>
+          <p:cNvSpPr/>
+          <p:nvPr/>
+        </p:nvSpPr>
+        <p:spPr>
+          <a:xfrm>
+            <a:off x="457200" y="1360170"/>
+            <a:ext cx="45720" cy="464058"/>
+          </a:xfrm>
+          <a:prstGeom prst="rect">
+            <a:avLst/>
+          </a:prstGeom>
+          <a:solidFill>
+            <a:srgbClr val="1565C0"/>
+          </a:solidFill>
+          <a:ln/>
+        </p:spPr>
+      </p:sp>
+      <p:sp>
+        <p:nvSpPr>
+          <p:cNvPr id="9" name="Text 7"/>
+          <p:cNvSpPr/>
+          <p:nvPr/>
+        </p:nvSpPr>
+        <p:spPr>
+          <a:xfrm>
+            <a:off x="640080" y="1360170"/>
+            <a:ext cx="7863840" cy="464058"/>
           </a:xfrm>
           <a:prstGeom prst="rect">
             <a:avLst/>
@@ -5543,50 +6951,575 @@
               <a:buNone/>
             </a:pPr>
             <a:r>
-              <a:rPr lang="en-US" sz="900" b="1" dirty="0">
+              <a:rPr lang="en-US" sz="1100" dirty="0">
                 <a:solidFill>
-                  <a:srgbClr val="0D47A1"/>
+                  <a:srgbClr val="1A1A2E"/>
+                </a:solidFill>
+                <a:latin typeface="Calibri" pitchFamily="34" charset="0"/>
+                <a:ea typeface="Calibri" pitchFamily="34" charset="-122"/>
+                <a:cs typeface="Calibri" pitchFamily="34" charset="-120"/>
+              </a:rPr>
+              <a:t>2. Albums entre 20 et 30 CHF tries par prix DESC</a:t>
+            </a:r>
+            <a:endParaRPr lang="en-US" sz="1100" dirty="0"/>
+          </a:p>
+        </p:txBody>
+      </p:sp>
+      <p:sp>
+        <p:nvSpPr>
+          <p:cNvPr id="10" name="Shape 8"/>
+          <p:cNvSpPr/>
+          <p:nvPr/>
+        </p:nvSpPr>
+        <p:spPr>
+          <a:xfrm>
+            <a:off x="457200" y="1851660"/>
+            <a:ext cx="8229600" cy="464058"/>
+          </a:xfrm>
+          <a:prstGeom prst="rect">
+            <a:avLst/>
+          </a:prstGeom>
+          <a:solidFill>
+            <a:srgbClr val="FFFFFF"/>
+          </a:solidFill>
+          <a:ln/>
+        </p:spPr>
+      </p:sp>
+      <p:sp>
+        <p:nvSpPr>
+          <p:cNvPr id="11" name="Shape 9"/>
+          <p:cNvSpPr/>
+          <p:nvPr/>
+        </p:nvSpPr>
+        <p:spPr>
+          <a:xfrm>
+            <a:off x="457200" y="1851660"/>
+            <a:ext cx="45720" cy="464058"/>
+          </a:xfrm>
+          <a:prstGeom prst="rect">
+            <a:avLst/>
+          </a:prstGeom>
+          <a:solidFill>
+            <a:srgbClr val="1565C0"/>
+          </a:solidFill>
+          <a:ln/>
+        </p:spPr>
+      </p:sp>
+      <p:sp>
+        <p:nvSpPr>
+          <p:cNvPr id="12" name="Text 10"/>
+          <p:cNvSpPr/>
+          <p:nvPr/>
+        </p:nvSpPr>
+        <p:spPr>
+          <a:xfrm>
+            <a:off x="640080" y="1851660"/>
+            <a:ext cx="7863840" cy="464058"/>
+          </a:xfrm>
+          <a:prstGeom prst="rect">
+            <a:avLst/>
+          </a:prstGeom>
+          <a:noFill/>
+          <a:ln/>
+        </p:spPr>
+        <p:txBody>
+          <a:bodyPr wrap="square" lIns="0" tIns="0" rIns="0" bIns="0" rtlCol="0" anchor="ctr"/>
+          <a:lstStyle/>
+          <a:p>
+            <a:pPr indent="0" marL="0">
+              <a:buNone/>
+            </a:pPr>
+            <a:r>
+              <a:rPr lang="en-US" sz="1100" dirty="0">
+                <a:solidFill>
+                  <a:srgbClr val="1A1A2E"/>
+                </a:solidFill>
+                <a:latin typeface="Calibri" pitchFamily="34" charset="0"/>
+                <a:ea typeface="Calibri" pitchFamily="34" charset="-122"/>
+                <a:cs typeface="Calibri" pitchFamily="34" charset="-120"/>
+              </a:rPr>
+              <a:t>3. Artistes dont le nom commence par 'M' ou 'L'</a:t>
+            </a:r>
+            <a:endParaRPr lang="en-US" sz="1100" dirty="0"/>
+          </a:p>
+        </p:txBody>
+      </p:sp>
+      <p:sp>
+        <p:nvSpPr>
+          <p:cNvPr id="13" name="Shape 11"/>
+          <p:cNvSpPr/>
+          <p:nvPr/>
+        </p:nvSpPr>
+        <p:spPr>
+          <a:xfrm>
+            <a:off x="457200" y="2343150"/>
+            <a:ext cx="8229600" cy="464058"/>
+          </a:xfrm>
+          <a:prstGeom prst="rect">
+            <a:avLst/>
+          </a:prstGeom>
+          <a:solidFill>
+            <a:srgbClr val="E3F2FD"/>
+          </a:solidFill>
+          <a:ln/>
+        </p:spPr>
+      </p:sp>
+      <p:sp>
+        <p:nvSpPr>
+          <p:cNvPr id="14" name="Shape 12"/>
+          <p:cNvSpPr/>
+          <p:nvPr/>
+        </p:nvSpPr>
+        <p:spPr>
+          <a:xfrm>
+            <a:off x="457200" y="2343150"/>
+            <a:ext cx="45720" cy="464058"/>
+          </a:xfrm>
+          <a:prstGeom prst="rect">
+            <a:avLst/>
+          </a:prstGeom>
+          <a:solidFill>
+            <a:srgbClr val="1565C0"/>
+          </a:solidFill>
+          <a:ln/>
+        </p:spPr>
+      </p:sp>
+      <p:sp>
+        <p:nvSpPr>
+          <p:cNvPr id="15" name="Text 13"/>
+          <p:cNvSpPr/>
+          <p:nvPr/>
+        </p:nvSpPr>
+        <p:spPr>
+          <a:xfrm>
+            <a:off x="640080" y="2343150"/>
+            <a:ext cx="7863840" cy="464058"/>
+          </a:xfrm>
+          <a:prstGeom prst="rect">
+            <a:avLst/>
+          </a:prstGeom>
+          <a:noFill/>
+          <a:ln/>
+        </p:spPr>
+        <p:txBody>
+          <a:bodyPr wrap="square" lIns="0" tIns="0" rIns="0" bIns="0" rtlCol="0" anchor="ctr"/>
+          <a:lstStyle/>
+          <a:p>
+            <a:pPr indent="0" marL="0">
+              <a:buNone/>
+            </a:pPr>
+            <a:r>
+              <a:rPr lang="en-US" sz="1100" dirty="0">
+                <a:solidFill>
+                  <a:srgbClr val="1A1A2E"/>
+                </a:solidFill>
+                <a:latin typeface="Calibri" pitchFamily="34" charset="0"/>
+                <a:ea typeface="Calibri" pitchFamily="34" charset="-122"/>
+                <a:cs typeface="Calibri" pitchFamily="34" charset="-120"/>
+              </a:rPr>
+              <a:t>4. Top 5 albums les plus chers</a:t>
+            </a:r>
+            <a:endParaRPr lang="en-US" sz="1100" dirty="0"/>
+          </a:p>
+        </p:txBody>
+      </p:sp>
+      <p:sp>
+        <p:nvSpPr>
+          <p:cNvPr id="16" name="Shape 14"/>
+          <p:cNvSpPr/>
+          <p:nvPr/>
+        </p:nvSpPr>
+        <p:spPr>
+          <a:xfrm>
+            <a:off x="457200" y="2834640"/>
+            <a:ext cx="8229600" cy="464058"/>
+          </a:xfrm>
+          <a:prstGeom prst="rect">
+            <a:avLst/>
+          </a:prstGeom>
+          <a:solidFill>
+            <a:srgbClr val="FFFFFF"/>
+          </a:solidFill>
+          <a:ln/>
+        </p:spPr>
+      </p:sp>
+      <p:sp>
+        <p:nvSpPr>
+          <p:cNvPr id="17" name="Shape 15"/>
+          <p:cNvSpPr/>
+          <p:nvPr/>
+        </p:nvSpPr>
+        <p:spPr>
+          <a:xfrm>
+            <a:off x="457200" y="2834640"/>
+            <a:ext cx="45720" cy="464058"/>
+          </a:xfrm>
+          <a:prstGeom prst="rect">
+            <a:avLst/>
+          </a:prstGeom>
+          <a:solidFill>
+            <a:srgbClr val="1565C0"/>
+          </a:solidFill>
+          <a:ln/>
+        </p:spPr>
+      </p:sp>
+      <p:sp>
+        <p:nvSpPr>
+          <p:cNvPr id="18" name="Text 16"/>
+          <p:cNvSpPr/>
+          <p:nvPr/>
+        </p:nvSpPr>
+        <p:spPr>
+          <a:xfrm>
+            <a:off x="640080" y="2834640"/>
+            <a:ext cx="7863840" cy="464058"/>
+          </a:xfrm>
+          <a:prstGeom prst="rect">
+            <a:avLst/>
+          </a:prstGeom>
+          <a:noFill/>
+          <a:ln/>
+        </p:spPr>
+        <p:txBody>
+          <a:bodyPr wrap="square" lIns="0" tIns="0" rIns="0" bIns="0" rtlCol="0" anchor="ctr"/>
+          <a:lstStyle/>
+          <a:p>
+            <a:pPr indent="0" marL="0">
+              <a:buNone/>
+            </a:pPr>
+            <a:r>
+              <a:rPr lang="en-US" sz="1100" dirty="0">
+                <a:solidFill>
+                  <a:srgbClr val="1A1A2E"/>
+                </a:solidFill>
+                <a:latin typeface="Calibri" pitchFamily="34" charset="0"/>
+                <a:ea typeface="Calibri" pitchFamily="34" charset="-122"/>
+                <a:cs typeface="Calibri" pitchFamily="34" charset="-120"/>
+              </a:rPr>
+              <a:t>5. Sessions planifiees en avril 2025</a:t>
+            </a:r>
+            <a:endParaRPr lang="en-US" sz="1100" dirty="0"/>
+          </a:p>
+        </p:txBody>
+      </p:sp>
+      <p:sp>
+        <p:nvSpPr>
+          <p:cNvPr id="19" name="Shape 17"/>
+          <p:cNvSpPr/>
+          <p:nvPr/>
+        </p:nvSpPr>
+        <p:spPr>
+          <a:xfrm>
+            <a:off x="457200" y="3326130"/>
+            <a:ext cx="8229600" cy="464058"/>
+          </a:xfrm>
+          <a:prstGeom prst="rect">
+            <a:avLst/>
+          </a:prstGeom>
+          <a:solidFill>
+            <a:srgbClr val="E3F2FD"/>
+          </a:solidFill>
+          <a:ln/>
+        </p:spPr>
+      </p:sp>
+      <p:sp>
+        <p:nvSpPr>
+          <p:cNvPr id="20" name="Shape 18"/>
+          <p:cNvSpPr/>
+          <p:nvPr/>
+        </p:nvSpPr>
+        <p:spPr>
+          <a:xfrm>
+            <a:off x="457200" y="3326130"/>
+            <a:ext cx="45720" cy="464058"/>
+          </a:xfrm>
+          <a:prstGeom prst="rect">
+            <a:avLst/>
+          </a:prstGeom>
+          <a:solidFill>
+            <a:srgbClr val="1565C0"/>
+          </a:solidFill>
+          <a:ln/>
+        </p:spPr>
+      </p:sp>
+      <p:sp>
+        <p:nvSpPr>
+          <p:cNvPr id="21" name="Text 19"/>
+          <p:cNvSpPr/>
+          <p:nvPr/>
+        </p:nvSpPr>
+        <p:spPr>
+          <a:xfrm>
+            <a:off x="640080" y="3326130"/>
+            <a:ext cx="7863840" cy="464058"/>
+          </a:xfrm>
+          <a:prstGeom prst="rect">
+            <a:avLst/>
+          </a:prstGeom>
+          <a:noFill/>
+          <a:ln/>
+        </p:spPr>
+        <p:txBody>
+          <a:bodyPr wrap="square" lIns="0" tIns="0" rIns="0" bIns="0" rtlCol="0" anchor="ctr"/>
+          <a:lstStyle/>
+          <a:p>
+            <a:pPr indent="0" marL="0">
+              <a:buNone/>
+            </a:pPr>
+            <a:r>
+              <a:rPr lang="en-US" sz="1100" dirty="0">
+                <a:solidFill>
+                  <a:srgbClr val="1A1A2E"/>
+                </a:solidFill>
+                <a:latin typeface="Calibri" pitchFamily="34" charset="0"/>
+                <a:ea typeface="Calibri" pitchFamily="34" charset="-122"/>
+                <a:cs typeface="Calibri" pitchFamily="34" charset="-120"/>
+              </a:rPr>
+              <a:t>6. Artistes sans prenom (groupes) — IS NULL</a:t>
+            </a:r>
+            <a:endParaRPr lang="en-US" sz="1100" dirty="0"/>
+          </a:p>
+        </p:txBody>
+      </p:sp>
+      <p:sp>
+        <p:nvSpPr>
+          <p:cNvPr id="22" name="Shape 20"/>
+          <p:cNvSpPr/>
+          <p:nvPr/>
+        </p:nvSpPr>
+        <p:spPr>
+          <a:xfrm>
+            <a:off x="457200" y="3817620"/>
+            <a:ext cx="8229600" cy="464058"/>
+          </a:xfrm>
+          <a:prstGeom prst="rect">
+            <a:avLst/>
+          </a:prstGeom>
+          <a:solidFill>
+            <a:srgbClr val="FFFFFF"/>
+          </a:solidFill>
+          <a:ln/>
+        </p:spPr>
+      </p:sp>
+      <p:sp>
+        <p:nvSpPr>
+          <p:cNvPr id="23" name="Shape 21"/>
+          <p:cNvSpPr/>
+          <p:nvPr/>
+        </p:nvSpPr>
+        <p:spPr>
+          <a:xfrm>
+            <a:off x="457200" y="3817620"/>
+            <a:ext cx="45720" cy="464058"/>
+          </a:xfrm>
+          <a:prstGeom prst="rect">
+            <a:avLst/>
+          </a:prstGeom>
+          <a:solidFill>
+            <a:srgbClr val="1565C0"/>
+          </a:solidFill>
+          <a:ln/>
+        </p:spPr>
+      </p:sp>
+      <p:sp>
+        <p:nvSpPr>
+          <p:cNvPr id="24" name="Text 22"/>
+          <p:cNvSpPr/>
+          <p:nvPr/>
+        </p:nvSpPr>
+        <p:spPr>
+          <a:xfrm>
+            <a:off x="640080" y="3817620"/>
+            <a:ext cx="7863840" cy="464058"/>
+          </a:xfrm>
+          <a:prstGeom prst="rect">
+            <a:avLst/>
+          </a:prstGeom>
+          <a:noFill/>
+          <a:ln/>
+        </p:spPr>
+        <p:txBody>
+          <a:bodyPr wrap="square" lIns="0" tIns="0" rIns="0" bIns="0" rtlCol="0" anchor="ctr"/>
+          <a:lstStyle/>
+          <a:p>
+            <a:pPr indent="0" marL="0">
+              <a:buNone/>
+            </a:pPr>
+            <a:r>
+              <a:rPr lang="en-US" sz="1100" dirty="0">
+                <a:solidFill>
+                  <a:srgbClr val="1A1A2E"/>
+                </a:solidFill>
+                <a:latin typeface="Calibri" pitchFamily="34" charset="0"/>
+                <a:ea typeface="Calibri" pitchFamily="34" charset="-122"/>
+                <a:cs typeface="Calibri" pitchFamily="34" charset="-120"/>
+              </a:rPr>
+              <a:t>7. Albums contenant 'Lac' dans le titre</a:t>
+            </a:r>
+            <a:endParaRPr lang="en-US" sz="1100" dirty="0"/>
+          </a:p>
+        </p:txBody>
+      </p:sp>
+      <p:sp>
+        <p:nvSpPr>
+          <p:cNvPr id="25" name="Shape 23"/>
+          <p:cNvSpPr/>
+          <p:nvPr/>
+        </p:nvSpPr>
+        <p:spPr>
+          <a:xfrm>
+            <a:off x="457200" y="4309110"/>
+            <a:ext cx="8229600" cy="464058"/>
+          </a:xfrm>
+          <a:prstGeom prst="rect">
+            <a:avLst/>
+          </a:prstGeom>
+          <a:solidFill>
+            <a:srgbClr val="E3F2FD"/>
+          </a:solidFill>
+          <a:ln/>
+        </p:spPr>
+      </p:sp>
+      <p:sp>
+        <p:nvSpPr>
+          <p:cNvPr id="26" name="Shape 24"/>
+          <p:cNvSpPr/>
+          <p:nvPr/>
+        </p:nvSpPr>
+        <p:spPr>
+          <a:xfrm>
+            <a:off x="457200" y="4309110"/>
+            <a:ext cx="45720" cy="464058"/>
+          </a:xfrm>
+          <a:prstGeom prst="rect">
+            <a:avLst/>
+          </a:prstGeom>
+          <a:solidFill>
+            <a:srgbClr val="1565C0"/>
+          </a:solidFill>
+          <a:ln/>
+        </p:spPr>
+      </p:sp>
+      <p:sp>
+        <p:nvSpPr>
+          <p:cNvPr id="27" name="Text 25"/>
+          <p:cNvSpPr/>
+          <p:nvPr/>
+        </p:nvSpPr>
+        <p:spPr>
+          <a:xfrm>
+            <a:off x="640080" y="4309110"/>
+            <a:ext cx="7863840" cy="464058"/>
+          </a:xfrm>
+          <a:prstGeom prst="rect">
+            <a:avLst/>
+          </a:prstGeom>
+          <a:noFill/>
+          <a:ln/>
+        </p:spPr>
+        <p:txBody>
+          <a:bodyPr wrap="square" lIns="0" tIns="0" rIns="0" bIns="0" rtlCol="0" anchor="ctr"/>
+          <a:lstStyle/>
+          <a:p>
+            <a:pPr indent="0" marL="0">
+              <a:buNone/>
+            </a:pPr>
+            <a:r>
+              <a:rPr lang="en-US" sz="1100" dirty="0">
+                <a:solidFill>
+                  <a:srgbClr val="1A1A2E"/>
+                </a:solidFill>
+                <a:latin typeface="Calibri" pitchFamily="34" charset="0"/>
+                <a:ea typeface="Calibri" pitchFamily="34" charset="-122"/>
+                <a:cs typeface="Calibri" pitchFamily="34" charset="-120"/>
+              </a:rPr>
+              <a:t>DEFI : combiner WHERE + IN + LIKE + ORDER + LIMIT + alias</a:t>
+            </a:r>
+            <a:endParaRPr lang="en-US" sz="1100" dirty="0"/>
+          </a:p>
+        </p:txBody>
+      </p:sp>
+    </p:spTree>
+  </p:cSld>
+  <p:clrMapOvr>
+    <a:masterClrMapping/>
+  </p:clrMapOvr>
+</p:sld>
+</file>
+
+<file path=ppt/slides/slide9.xml><?xml version="1.0" encoding="utf-8"?>
+<p:sld xmlns:a="http://schemas.openxmlformats.org/drawingml/2006/main" xmlns:r="http://schemas.openxmlformats.org/officeDocument/2006/relationships" xmlns:p="http://schemas.openxmlformats.org/presentationml/2006/main">
+  <p:cSld name="Slide 9">
+    <p:bg>
+      <p:bgPr>
+        <a:solidFill>
+          <a:srgbClr val="0D47A1"/>
+        </a:solidFill>
+      </p:bgPr>
+    </p:bg>
+    <p:spTree>
+      <p:nvGrpSpPr>
+        <p:cNvPr id="1" name=""/>
+        <p:cNvGrpSpPr/>
+        <p:nvPr/>
+      </p:nvGrpSpPr>
+      <p:grpSpPr>
+        <a:xfrm>
+          <a:off x="0" y="0"/>
+          <a:ext cx="0" cy="0"/>
+          <a:chOff x="0" y="0"/>
+          <a:chExt cx="0" cy="0"/>
+        </a:xfrm>
+      </p:grpSpPr>
+      <p:sp>
+        <p:nvSpPr>
+          <p:cNvPr id="2" name="Text 0"/>
+          <p:cNvSpPr/>
+          <p:nvPr/>
+        </p:nvSpPr>
+        <p:spPr>
+          <a:xfrm>
+            <a:off x="457200" y="1828800"/>
+            <a:ext cx="8229600" cy="548640"/>
+          </a:xfrm>
+          <a:prstGeom prst="rect">
+            <a:avLst/>
+          </a:prstGeom>
+          <a:noFill/>
+          <a:ln/>
+        </p:spPr>
+        <p:txBody>
+          <a:bodyPr wrap="square" lIns="0" tIns="0" rIns="0" bIns="0" rtlCol="0" anchor="ctr"/>
+          <a:lstStyle/>
+          <a:p>
+            <a:pPr algn="ctr" indent="0" marL="0">
+              <a:buNone/>
+            </a:pPr>
+            <a:r>
+              <a:rPr lang="en-US" sz="2400" b="1" dirty="0">
+                <a:solidFill>
+                  <a:srgbClr val="FFFFFF"/>
                 </a:solidFill>
                 <a:latin typeface="Trebuchet MS" pitchFamily="34" charset="0"/>
                 <a:ea typeface="Trebuchet MS" pitchFamily="34" charset="-122"/>
                 <a:cs typeface="Trebuchet MS" pitchFamily="34" charset="-120"/>
               </a:rPr>
-              <a:t>SELECT</a:t>
-            </a:r>
-            <a:endParaRPr lang="en-US" sz="900" dirty="0"/>
-          </a:p>
-        </p:txBody>
-      </p:sp>
-      <p:sp>
-        <p:nvSpPr>
-          <p:cNvPr id="7" name="Shape 5"/>
-          <p:cNvSpPr/>
-          <p:nvPr/>
-        </p:nvSpPr>
-        <p:spPr>
-          <a:xfrm>
-            <a:off x="2743200" y="960120"/>
-            <a:ext cx="5943600" cy="475488"/>
-          </a:xfrm>
-          <a:prstGeom prst="rect">
-            <a:avLst/>
-          </a:prstGeom>
-          <a:solidFill>
-            <a:srgbClr val="E3F2FD"/>
-          </a:solidFill>
-          <a:ln/>
-        </p:spPr>
-      </p:sp>
-      <p:sp>
-        <p:nvSpPr>
-          <p:cNvPr id="8" name="Text 6"/>
-          <p:cNvSpPr/>
-          <p:nvPr/>
-        </p:nvSpPr>
-        <p:spPr>
-          <a:xfrm>
-            <a:off x="2834640" y="960120"/>
-            <a:ext cx="5760720" cy="475488"/>
+              <a:t>Mini-jeu : Le Detective de Donnees</a:t>
+            </a:r>
+            <a:endParaRPr lang="en-US" sz="2400" dirty="0"/>
+          </a:p>
+        </p:txBody>
+      </p:sp>
+      <p:sp>
+        <p:nvSpPr>
+          <p:cNvPr id="3" name="Text 1"/>
+          <p:cNvSpPr/>
+          <p:nvPr/>
+        </p:nvSpPr>
+        <p:spPr>
+          <a:xfrm>
+            <a:off x="1371600" y="2468880"/>
+            <a:ext cx="6400800" cy="640080"/>
           </a:xfrm>
           <a:prstGeom prst="rect">
             <a:avLst/>
@@ -5598,729 +7531,21 @@
           <a:bodyPr wrap="square" lIns="0" tIns="0" rIns="0" bIns="0" rtlCol="0" anchor="ctr"/>
           <a:lstStyle/>
           <a:p>
-            <a:pPr indent="0" marL="0">
+            <a:pPr algn="ctr" indent="0" marL="0">
               <a:buNone/>
             </a:pPr>
             <a:r>
-              <a:rPr lang="en-US" sz="900" dirty="0">
+              <a:rPr lang="en-US" sz="1300" dirty="0">
                 <a:solidFill>
-                  <a:srgbClr val="333333"/>
+                  <a:srgbClr val="CCCCCC"/>
                 </a:solidFill>
                 <a:latin typeface="Calibri" pitchFamily="34" charset="0"/>
                 <a:ea typeface="Calibri" pitchFamily="34" charset="-122"/>
                 <a:cs typeface="Calibri" pitchFamily="34" charset="-120"/>
               </a:rPr>
-              <a:t>* = tout, nommer colonnes = spécifique, DISTINCT = sans doublons</a:t>
-            </a:r>
-            <a:endParaRPr lang="en-US" sz="900" dirty="0"/>
-          </a:p>
-        </p:txBody>
-      </p:sp>
-      <p:sp>
-        <p:nvSpPr>
-          <p:cNvPr id="9" name="Shape 7"/>
-          <p:cNvSpPr/>
-          <p:nvPr/>
-        </p:nvSpPr>
-        <p:spPr>
-          <a:xfrm>
-            <a:off x="457200" y="1463040"/>
-            <a:ext cx="2286000" cy="475488"/>
-          </a:xfrm>
-          <a:prstGeom prst="rect">
-            <a:avLst/>
-          </a:prstGeom>
-          <a:solidFill>
-            <a:srgbClr val="F0F0F0"/>
-          </a:solidFill>
-          <a:ln/>
-        </p:spPr>
-      </p:sp>
-      <p:sp>
-        <p:nvSpPr>
-          <p:cNvPr id="10" name="Text 8"/>
-          <p:cNvSpPr/>
-          <p:nvPr/>
-        </p:nvSpPr>
-        <p:spPr>
-          <a:xfrm>
-            <a:off x="548640" y="1463040"/>
-            <a:ext cx="2103120" cy="475488"/>
-          </a:xfrm>
-          <a:prstGeom prst="rect">
-            <a:avLst/>
-          </a:prstGeom>
-          <a:noFill/>
-          <a:ln/>
-        </p:spPr>
-        <p:txBody>
-          <a:bodyPr wrap="square" lIns="0" tIns="0" rIns="0" bIns="0" rtlCol="0" anchor="ctr"/>
-          <a:lstStyle/>
-          <a:p>
-            <a:pPr indent="0" marL="0">
-              <a:buNone/>
-            </a:pPr>
-            <a:r>
-              <a:rPr lang="en-US" sz="900" b="1" dirty="0">
-                <a:solidFill>
-                  <a:srgbClr val="0D47A1"/>
-                </a:solidFill>
-                <a:latin typeface="Trebuchet MS" pitchFamily="34" charset="0"/>
-                <a:ea typeface="Trebuchet MS" pitchFamily="34" charset="-122"/>
-                <a:cs typeface="Trebuchet MS" pitchFamily="34" charset="-120"/>
-              </a:rPr>
-              <a:t>WHERE</a:t>
-            </a:r>
-            <a:endParaRPr lang="en-US" sz="900" dirty="0"/>
-          </a:p>
-        </p:txBody>
-      </p:sp>
-      <p:sp>
-        <p:nvSpPr>
-          <p:cNvPr id="11" name="Shape 9"/>
-          <p:cNvSpPr/>
-          <p:nvPr/>
-        </p:nvSpPr>
-        <p:spPr>
-          <a:xfrm>
-            <a:off x="2743200" y="1463040"/>
-            <a:ext cx="5943600" cy="475488"/>
-          </a:xfrm>
-          <a:prstGeom prst="rect">
-            <a:avLst/>
-          </a:prstGeom>
-          <a:solidFill>
-            <a:srgbClr val="F0F0F0"/>
-          </a:solidFill>
-          <a:ln/>
-        </p:spPr>
-      </p:sp>
-      <p:sp>
-        <p:nvSpPr>
-          <p:cNvPr id="12" name="Text 10"/>
-          <p:cNvSpPr/>
-          <p:nvPr/>
-        </p:nvSpPr>
-        <p:spPr>
-          <a:xfrm>
-            <a:off x="2834640" y="1463040"/>
-            <a:ext cx="5760720" cy="475488"/>
-          </a:xfrm>
-          <a:prstGeom prst="rect">
-            <a:avLst/>
-          </a:prstGeom>
-          <a:noFill/>
-          <a:ln/>
-        </p:spPr>
-        <p:txBody>
-          <a:bodyPr wrap="square" lIns="0" tIns="0" rIns="0" bIns="0" rtlCol="0" anchor="ctr"/>
-          <a:lstStyle/>
-          <a:p>
-            <a:pPr indent="0" marL="0">
-              <a:buNone/>
-            </a:pPr>
-            <a:r>
-              <a:rPr lang="en-US" sz="900" dirty="0">
-                <a:solidFill>
-                  <a:srgbClr val="333333"/>
-                </a:solidFill>
-                <a:latin typeface="Calibri" pitchFamily="34" charset="0"/>
-                <a:ea typeface="Calibri" pitchFamily="34" charset="-122"/>
-                <a:cs typeface="Calibri" pitchFamily="34" charset="-120"/>
-              </a:rPr>
-              <a:t>=, &lt;&gt;, BETWEEN, IN, LIKE (%, _), IS NULL, AND/OR/NOT</a:t>
-            </a:r>
-            <a:endParaRPr lang="en-US" sz="900" dirty="0"/>
-          </a:p>
-        </p:txBody>
-      </p:sp>
-      <p:sp>
-        <p:nvSpPr>
-          <p:cNvPr id="13" name="Shape 11"/>
-          <p:cNvSpPr/>
-          <p:nvPr/>
-        </p:nvSpPr>
-        <p:spPr>
-          <a:xfrm>
-            <a:off x="457200" y="1965960"/>
-            <a:ext cx="2286000" cy="475488"/>
-          </a:xfrm>
-          <a:prstGeom prst="rect">
-            <a:avLst/>
-          </a:prstGeom>
-          <a:solidFill>
-            <a:srgbClr val="E3F2FD"/>
-          </a:solidFill>
-          <a:ln/>
-        </p:spPr>
-      </p:sp>
-      <p:sp>
-        <p:nvSpPr>
-          <p:cNvPr id="14" name="Text 12"/>
-          <p:cNvSpPr/>
-          <p:nvPr/>
-        </p:nvSpPr>
-        <p:spPr>
-          <a:xfrm>
-            <a:off x="548640" y="1965960"/>
-            <a:ext cx="2103120" cy="475488"/>
-          </a:xfrm>
-          <a:prstGeom prst="rect">
-            <a:avLst/>
-          </a:prstGeom>
-          <a:noFill/>
-          <a:ln/>
-        </p:spPr>
-        <p:txBody>
-          <a:bodyPr wrap="square" lIns="0" tIns="0" rIns="0" bIns="0" rtlCol="0" anchor="ctr"/>
-          <a:lstStyle/>
-          <a:p>
-            <a:pPr indent="0" marL="0">
-              <a:buNone/>
-            </a:pPr>
-            <a:r>
-              <a:rPr lang="en-US" sz="900" b="1" dirty="0">
-                <a:solidFill>
-                  <a:srgbClr val="0D47A1"/>
-                </a:solidFill>
-                <a:latin typeface="Trebuchet MS" pitchFamily="34" charset="0"/>
-                <a:ea typeface="Trebuchet MS" pitchFamily="34" charset="-122"/>
-                <a:cs typeface="Trebuchet MS" pitchFamily="34" charset="-120"/>
-              </a:rPr>
-              <a:t>LIKE</a:t>
-            </a:r>
-            <a:endParaRPr lang="en-US" sz="900" dirty="0"/>
-          </a:p>
-        </p:txBody>
-      </p:sp>
-      <p:sp>
-        <p:nvSpPr>
-          <p:cNvPr id="15" name="Shape 13"/>
-          <p:cNvSpPr/>
-          <p:nvPr/>
-        </p:nvSpPr>
-        <p:spPr>
-          <a:xfrm>
-            <a:off x="2743200" y="1965960"/>
-            <a:ext cx="5943600" cy="475488"/>
-          </a:xfrm>
-          <a:prstGeom prst="rect">
-            <a:avLst/>
-          </a:prstGeom>
-          <a:solidFill>
-            <a:srgbClr val="E3F2FD"/>
-          </a:solidFill>
-          <a:ln/>
-        </p:spPr>
-      </p:sp>
-      <p:sp>
-        <p:nvSpPr>
-          <p:cNvPr id="16" name="Text 14"/>
-          <p:cNvSpPr/>
-          <p:nvPr/>
-        </p:nvSpPr>
-        <p:spPr>
-          <a:xfrm>
-            <a:off x="2834640" y="1965960"/>
-            <a:ext cx="5760720" cy="475488"/>
-          </a:xfrm>
-          <a:prstGeom prst="rect">
-            <a:avLst/>
-          </a:prstGeom>
-          <a:noFill/>
-          <a:ln/>
-        </p:spPr>
-        <p:txBody>
-          <a:bodyPr wrap="square" lIns="0" tIns="0" rIns="0" bIns="0" rtlCol="0" anchor="ctr"/>
-          <a:lstStyle/>
-          <a:p>
-            <a:pPr indent="0" marL="0">
-              <a:buNone/>
-            </a:pPr>
-            <a:r>
-              <a:rPr lang="en-US" sz="900" dirty="0">
-                <a:solidFill>
-                  <a:srgbClr val="333333"/>
-                </a:solidFill>
-                <a:latin typeface="Calibri" pitchFamily="34" charset="0"/>
-                <a:ea typeface="Calibri" pitchFamily="34" charset="-122"/>
-                <a:cs typeface="Calibri" pitchFamily="34" charset="-120"/>
-              </a:rPr>
-              <a:t>% = n'importe quoi, _ = 1 caractère. 'A%' = commence par A</a:t>
-            </a:r>
-            <a:endParaRPr lang="en-US" sz="900" dirty="0"/>
-          </a:p>
-        </p:txBody>
-      </p:sp>
-      <p:sp>
-        <p:nvSpPr>
-          <p:cNvPr id="17" name="Shape 15"/>
-          <p:cNvSpPr/>
-          <p:nvPr/>
-        </p:nvSpPr>
-        <p:spPr>
-          <a:xfrm>
-            <a:off x="457200" y="2468880"/>
-            <a:ext cx="2286000" cy="475488"/>
-          </a:xfrm>
-          <a:prstGeom prst="rect">
-            <a:avLst/>
-          </a:prstGeom>
-          <a:solidFill>
-            <a:srgbClr val="F0F0F0"/>
-          </a:solidFill>
-          <a:ln/>
-        </p:spPr>
-      </p:sp>
-      <p:sp>
-        <p:nvSpPr>
-          <p:cNvPr id="18" name="Text 16"/>
-          <p:cNvSpPr/>
-          <p:nvPr/>
-        </p:nvSpPr>
-        <p:spPr>
-          <a:xfrm>
-            <a:off x="548640" y="2468880"/>
-            <a:ext cx="2103120" cy="475488"/>
-          </a:xfrm>
-          <a:prstGeom prst="rect">
-            <a:avLst/>
-          </a:prstGeom>
-          <a:noFill/>
-          <a:ln/>
-        </p:spPr>
-        <p:txBody>
-          <a:bodyPr wrap="square" lIns="0" tIns="0" rIns="0" bIns="0" rtlCol="0" anchor="ctr"/>
-          <a:lstStyle/>
-          <a:p>
-            <a:pPr indent="0" marL="0">
-              <a:buNone/>
-            </a:pPr>
-            <a:r>
-              <a:rPr lang="en-US" sz="900" b="1" dirty="0">
-                <a:solidFill>
-                  <a:srgbClr val="0D47A1"/>
-                </a:solidFill>
-                <a:latin typeface="Trebuchet MS" pitchFamily="34" charset="0"/>
-                <a:ea typeface="Trebuchet MS" pitchFamily="34" charset="-122"/>
-                <a:cs typeface="Trebuchet MS" pitchFamily="34" charset="-120"/>
-              </a:rPr>
-              <a:t>IS NULL</a:t>
-            </a:r>
-            <a:endParaRPr lang="en-US" sz="900" dirty="0"/>
-          </a:p>
-        </p:txBody>
-      </p:sp>
-      <p:sp>
-        <p:nvSpPr>
-          <p:cNvPr id="19" name="Shape 17"/>
-          <p:cNvSpPr/>
-          <p:nvPr/>
-        </p:nvSpPr>
-        <p:spPr>
-          <a:xfrm>
-            <a:off x="2743200" y="2468880"/>
-            <a:ext cx="5943600" cy="475488"/>
-          </a:xfrm>
-          <a:prstGeom prst="rect">
-            <a:avLst/>
-          </a:prstGeom>
-          <a:solidFill>
-            <a:srgbClr val="F0F0F0"/>
-          </a:solidFill>
-          <a:ln/>
-        </p:spPr>
-      </p:sp>
-      <p:sp>
-        <p:nvSpPr>
-          <p:cNvPr id="20" name="Text 18"/>
-          <p:cNvSpPr/>
-          <p:nvPr/>
-        </p:nvSpPr>
-        <p:spPr>
-          <a:xfrm>
-            <a:off x="2834640" y="2468880"/>
-            <a:ext cx="5760720" cy="475488"/>
-          </a:xfrm>
-          <a:prstGeom prst="rect">
-            <a:avLst/>
-          </a:prstGeom>
-          <a:noFill/>
-          <a:ln/>
-        </p:spPr>
-        <p:txBody>
-          <a:bodyPr wrap="square" lIns="0" tIns="0" rIns="0" bIns="0" rtlCol="0" anchor="ctr"/>
-          <a:lstStyle/>
-          <a:p>
-            <a:pPr indent="0" marL="0">
-              <a:buNone/>
-            </a:pPr>
-            <a:r>
-              <a:rPr lang="en-US" sz="900" dirty="0">
-                <a:solidFill>
-                  <a:srgbClr val="333333"/>
-                </a:solidFill>
-                <a:latin typeface="Calibri" pitchFamily="34" charset="0"/>
-                <a:ea typeface="Calibri" pitchFamily="34" charset="-122"/>
-                <a:cs typeface="Calibri" pitchFamily="34" charset="-120"/>
-              </a:rPr>
-              <a:t>⚠️ Pas = NULL ! Seul IS NULL fonctionne</a:t>
-            </a:r>
-            <a:endParaRPr lang="en-US" sz="900" dirty="0"/>
-          </a:p>
-        </p:txBody>
-      </p:sp>
-      <p:sp>
-        <p:nvSpPr>
-          <p:cNvPr id="21" name="Shape 19"/>
-          <p:cNvSpPr/>
-          <p:nvPr/>
-        </p:nvSpPr>
-        <p:spPr>
-          <a:xfrm>
-            <a:off x="457200" y="2971800"/>
-            <a:ext cx="2286000" cy="475488"/>
-          </a:xfrm>
-          <a:prstGeom prst="rect">
-            <a:avLst/>
-          </a:prstGeom>
-          <a:solidFill>
-            <a:srgbClr val="E3F2FD"/>
-          </a:solidFill>
-          <a:ln/>
-        </p:spPr>
-      </p:sp>
-      <p:sp>
-        <p:nvSpPr>
-          <p:cNvPr id="22" name="Text 20"/>
-          <p:cNvSpPr/>
-          <p:nvPr/>
-        </p:nvSpPr>
-        <p:spPr>
-          <a:xfrm>
-            <a:off x="548640" y="2971800"/>
-            <a:ext cx="2103120" cy="475488"/>
-          </a:xfrm>
-          <a:prstGeom prst="rect">
-            <a:avLst/>
-          </a:prstGeom>
-          <a:noFill/>
-          <a:ln/>
-        </p:spPr>
-        <p:txBody>
-          <a:bodyPr wrap="square" lIns="0" tIns="0" rIns="0" bIns="0" rtlCol="0" anchor="ctr"/>
-          <a:lstStyle/>
-          <a:p>
-            <a:pPr indent="0" marL="0">
-              <a:buNone/>
-            </a:pPr>
-            <a:r>
-              <a:rPr lang="en-US" sz="900" b="1" dirty="0">
-                <a:solidFill>
-                  <a:srgbClr val="0D47A1"/>
-                </a:solidFill>
-                <a:latin typeface="Trebuchet MS" pitchFamily="34" charset="0"/>
-                <a:ea typeface="Trebuchet MS" pitchFamily="34" charset="-122"/>
-                <a:cs typeface="Trebuchet MS" pitchFamily="34" charset="-120"/>
-              </a:rPr>
-              <a:t>ORDER BY</a:t>
-            </a:r>
-            <a:endParaRPr lang="en-US" sz="900" dirty="0"/>
-          </a:p>
-        </p:txBody>
-      </p:sp>
-      <p:sp>
-        <p:nvSpPr>
-          <p:cNvPr id="23" name="Shape 21"/>
-          <p:cNvSpPr/>
-          <p:nvPr/>
-        </p:nvSpPr>
-        <p:spPr>
-          <a:xfrm>
-            <a:off x="2743200" y="2971800"/>
-            <a:ext cx="5943600" cy="475488"/>
-          </a:xfrm>
-          <a:prstGeom prst="rect">
-            <a:avLst/>
-          </a:prstGeom>
-          <a:solidFill>
-            <a:srgbClr val="E3F2FD"/>
-          </a:solidFill>
-          <a:ln/>
-        </p:spPr>
-      </p:sp>
-      <p:sp>
-        <p:nvSpPr>
-          <p:cNvPr id="24" name="Text 22"/>
-          <p:cNvSpPr/>
-          <p:nvPr/>
-        </p:nvSpPr>
-        <p:spPr>
-          <a:xfrm>
-            <a:off x="2834640" y="2971800"/>
-            <a:ext cx="5760720" cy="475488"/>
-          </a:xfrm>
-          <a:prstGeom prst="rect">
-            <a:avLst/>
-          </a:prstGeom>
-          <a:noFill/>
-          <a:ln/>
-        </p:spPr>
-        <p:txBody>
-          <a:bodyPr wrap="square" lIns="0" tIns="0" rIns="0" bIns="0" rtlCol="0" anchor="ctr"/>
-          <a:lstStyle/>
-          <a:p>
-            <a:pPr indent="0" marL="0">
-              <a:buNone/>
-            </a:pPr>
-            <a:r>
-              <a:rPr lang="en-US" sz="900" dirty="0">
-                <a:solidFill>
-                  <a:srgbClr val="333333"/>
-                </a:solidFill>
-                <a:latin typeface="Calibri" pitchFamily="34" charset="0"/>
-                <a:ea typeface="Calibri" pitchFamily="34" charset="-122"/>
-                <a:cs typeface="Calibri" pitchFamily="34" charset="-120"/>
-              </a:rPr>
-              <a:t>ASC (défaut), DESC, multi-colonnes possible</a:t>
-            </a:r>
-            <a:endParaRPr lang="en-US" sz="900" dirty="0"/>
-          </a:p>
-        </p:txBody>
-      </p:sp>
-      <p:sp>
-        <p:nvSpPr>
-          <p:cNvPr id="25" name="Shape 23"/>
-          <p:cNvSpPr/>
-          <p:nvPr/>
-        </p:nvSpPr>
-        <p:spPr>
-          <a:xfrm>
-            <a:off x="457200" y="3474720"/>
-            <a:ext cx="2286000" cy="475488"/>
-          </a:xfrm>
-          <a:prstGeom prst="rect">
-            <a:avLst/>
-          </a:prstGeom>
-          <a:solidFill>
-            <a:srgbClr val="F0F0F0"/>
-          </a:solidFill>
-          <a:ln/>
-        </p:spPr>
-      </p:sp>
-      <p:sp>
-        <p:nvSpPr>
-          <p:cNvPr id="26" name="Text 24"/>
-          <p:cNvSpPr/>
-          <p:nvPr/>
-        </p:nvSpPr>
-        <p:spPr>
-          <a:xfrm>
-            <a:off x="548640" y="3474720"/>
-            <a:ext cx="2103120" cy="475488"/>
-          </a:xfrm>
-          <a:prstGeom prst="rect">
-            <a:avLst/>
-          </a:prstGeom>
-          <a:noFill/>
-          <a:ln/>
-        </p:spPr>
-        <p:txBody>
-          <a:bodyPr wrap="square" lIns="0" tIns="0" rIns="0" bIns="0" rtlCol="0" anchor="ctr"/>
-          <a:lstStyle/>
-          <a:p>
-            <a:pPr indent="0" marL="0">
-              <a:buNone/>
-            </a:pPr>
-            <a:r>
-              <a:rPr lang="en-US" sz="900" b="1" dirty="0">
-                <a:solidFill>
-                  <a:srgbClr val="0D47A1"/>
-                </a:solidFill>
-                <a:latin typeface="Trebuchet MS" pitchFamily="34" charset="0"/>
-                <a:ea typeface="Trebuchet MS" pitchFamily="34" charset="-122"/>
-                <a:cs typeface="Trebuchet MS" pitchFamily="34" charset="-120"/>
-              </a:rPr>
-              <a:t>LIMIT/OFFSET</a:t>
-            </a:r>
-            <a:endParaRPr lang="en-US" sz="900" dirty="0"/>
-          </a:p>
-        </p:txBody>
-      </p:sp>
-      <p:sp>
-        <p:nvSpPr>
-          <p:cNvPr id="27" name="Shape 25"/>
-          <p:cNvSpPr/>
-          <p:nvPr/>
-        </p:nvSpPr>
-        <p:spPr>
-          <a:xfrm>
-            <a:off x="2743200" y="3474720"/>
-            <a:ext cx="5943600" cy="475488"/>
-          </a:xfrm>
-          <a:prstGeom prst="rect">
-            <a:avLst/>
-          </a:prstGeom>
-          <a:solidFill>
-            <a:srgbClr val="F0F0F0"/>
-          </a:solidFill>
-          <a:ln/>
-        </p:spPr>
-      </p:sp>
-      <p:sp>
-        <p:nvSpPr>
-          <p:cNvPr id="28" name="Text 26"/>
-          <p:cNvSpPr/>
-          <p:nvPr/>
-        </p:nvSpPr>
-        <p:spPr>
-          <a:xfrm>
-            <a:off x="2834640" y="3474720"/>
-            <a:ext cx="5760720" cy="475488"/>
-          </a:xfrm>
-          <a:prstGeom prst="rect">
-            <a:avLst/>
-          </a:prstGeom>
-          <a:noFill/>
-          <a:ln/>
-        </p:spPr>
-        <p:txBody>
-          <a:bodyPr wrap="square" lIns="0" tIns="0" rIns="0" bIns="0" rtlCol="0" anchor="ctr"/>
-          <a:lstStyle/>
-          <a:p>
-            <a:pPr indent="0" marL="0">
-              <a:buNone/>
-            </a:pPr>
-            <a:r>
-              <a:rPr lang="en-US" sz="900" dirty="0">
-                <a:solidFill>
-                  <a:srgbClr val="333333"/>
-                </a:solidFill>
-                <a:latin typeface="Calibri" pitchFamily="34" charset="0"/>
-                <a:ea typeface="Calibri" pitchFamily="34" charset="-122"/>
-                <a:cs typeface="Calibri" pitchFamily="34" charset="-120"/>
-              </a:rPr>
-              <a:t>Pagination : LIMIT 10 OFFSET 20 = lignes 21-30</a:t>
-            </a:r>
-            <a:endParaRPr lang="en-US" sz="900" dirty="0"/>
-          </a:p>
-        </p:txBody>
-      </p:sp>
-      <p:sp>
-        <p:nvSpPr>
-          <p:cNvPr id="29" name="Shape 27"/>
-          <p:cNvSpPr/>
-          <p:nvPr/>
-        </p:nvSpPr>
-        <p:spPr>
-          <a:xfrm>
-            <a:off x="457200" y="3977640"/>
-            <a:ext cx="2286000" cy="475488"/>
-          </a:xfrm>
-          <a:prstGeom prst="rect">
-            <a:avLst/>
-          </a:prstGeom>
-          <a:solidFill>
-            <a:srgbClr val="E3F2FD"/>
-          </a:solidFill>
-          <a:ln/>
-        </p:spPr>
-      </p:sp>
-      <p:sp>
-        <p:nvSpPr>
-          <p:cNvPr id="30" name="Text 28"/>
-          <p:cNvSpPr/>
-          <p:nvPr/>
-        </p:nvSpPr>
-        <p:spPr>
-          <a:xfrm>
-            <a:off x="548640" y="3977640"/>
-            <a:ext cx="2103120" cy="475488"/>
-          </a:xfrm>
-          <a:prstGeom prst="rect">
-            <a:avLst/>
-          </a:prstGeom>
-          <a:noFill/>
-          <a:ln/>
-        </p:spPr>
-        <p:txBody>
-          <a:bodyPr wrap="square" lIns="0" tIns="0" rIns="0" bIns="0" rtlCol="0" anchor="ctr"/>
-          <a:lstStyle/>
-          <a:p>
-            <a:pPr indent="0" marL="0">
-              <a:buNone/>
-            </a:pPr>
-            <a:r>
-              <a:rPr lang="en-US" sz="900" b="1" dirty="0">
-                <a:solidFill>
-                  <a:srgbClr val="0D47A1"/>
-                </a:solidFill>
-                <a:latin typeface="Trebuchet MS" pitchFamily="34" charset="0"/>
-                <a:ea typeface="Trebuchet MS" pitchFamily="34" charset="-122"/>
-                <a:cs typeface="Trebuchet MS" pitchFamily="34" charset="-120"/>
-              </a:rPr>
-              <a:t>Alias</a:t>
-            </a:r>
-            <a:endParaRPr lang="en-US" sz="900" dirty="0"/>
-          </a:p>
-        </p:txBody>
-      </p:sp>
-      <p:sp>
-        <p:nvSpPr>
-          <p:cNvPr id="31" name="Shape 29"/>
-          <p:cNvSpPr/>
-          <p:nvPr/>
-        </p:nvSpPr>
-        <p:spPr>
-          <a:xfrm>
-            <a:off x="2743200" y="3977640"/>
-            <a:ext cx="5943600" cy="475488"/>
-          </a:xfrm>
-          <a:prstGeom prst="rect">
-            <a:avLst/>
-          </a:prstGeom>
-          <a:solidFill>
-            <a:srgbClr val="E3F2FD"/>
-          </a:solidFill>
-          <a:ln/>
-        </p:spPr>
-      </p:sp>
-      <p:sp>
-        <p:nvSpPr>
-          <p:cNvPr id="32" name="Text 30"/>
-          <p:cNvSpPr/>
-          <p:nvPr/>
-        </p:nvSpPr>
-        <p:spPr>
-          <a:xfrm>
-            <a:off x="2834640" y="3977640"/>
-            <a:ext cx="5760720" cy="475488"/>
-          </a:xfrm>
-          <a:prstGeom prst="rect">
-            <a:avLst/>
-          </a:prstGeom>
-          <a:noFill/>
-          <a:ln/>
-        </p:spPr>
-        <p:txBody>
-          <a:bodyPr wrap="square" lIns="0" tIns="0" rIns="0" bIns="0" rtlCol="0" anchor="ctr"/>
-          <a:lstStyle/>
-          <a:p>
-            <a:pPr indent="0" marL="0">
-              <a:buNone/>
-            </a:pPr>
-            <a:r>
-              <a:rPr lang="en-US" sz="900" dirty="0">
-                <a:solidFill>
-                  <a:srgbClr val="333333"/>
-                </a:solidFill>
-                <a:latin typeface="Calibri" pitchFamily="34" charset="0"/>
-                <a:ea typeface="Calibri" pitchFamily="34" charset="-122"/>
-                <a:cs typeface="Calibri" pitchFamily="34" charset="-120"/>
-              </a:rPr>
-              <a:t>AS pour renommer colonnes dans le résultat</a:t>
-            </a:r>
-            <a:endParaRPr lang="en-US" sz="900" dirty="0"/>
+              <a:t>Resolvez les enigmes avec les bonnes requetes SELECT</a:t>
+            </a:r>
+            <a:endParaRPr lang="en-US" sz="1300" dirty="0"/>
           </a:p>
         </p:txBody>
       </p:sp>
